--- a/TDs/FR_EN/TD_Flyback/fig/images.pptx
+++ b/TDs/FR_EN/TD_Flyback/fig/images.pptx
@@ -105,13 +105,18 @@
       </a:defRPr>
     </a:lvl9pPr>
   </p:defaultTextStyle>
+  <p:extLst>
+    <p:ext uri="{EFAFB233-063F-42B5-8137-9DF3F51BA10A}">
+      <p15:sldGuideLst xmlns:p15="http://schemas.microsoft.com/office/powerpoint/2012/main"/>
+    </p:ext>
+  </p:extLst>
 </p:presentation>
 </file>
 
 <file path=ppt/revisionInfo.xml><?xml version="1.0" encoding="utf-8"?>
 <p1510:revInfo xmlns:a="http://schemas.openxmlformats.org/drawingml/2006/main" xmlns:r="http://schemas.openxmlformats.org/officeDocument/2006/relationships" xmlns:p1510="http://schemas.microsoft.com/office/powerpoint/2015/10/main">
   <p1510:revLst>
-    <p1510:client id="{D13A2CE6-E822-49B7-ABE7-6062E5A36FD0}" v="146" dt="2026-05-06T16:57:10.938"/>
+    <p1510:client id="{80C6DEC8-A2D3-4A59-A1FF-8A60BC486DC8}" v="20" dt="2026-06-22T13:20:29.068"/>
   </p1510:revLst>
 </p1510:revInfo>
 </file>
@@ -120,1118 +125,231 @@
 <pc:chgInfo xmlns:a="http://schemas.openxmlformats.org/drawingml/2006/main" xmlns:r="http://schemas.openxmlformats.org/officeDocument/2006/relationships" xmlns:ac="http://schemas.microsoft.com/office/drawing/2013/main/command" xmlns:pc="http://schemas.microsoft.com/office/powerpoint/2013/main/command">
   <pc:docChgLst>
     <pc:chgData name="Alexis MARTIN" userId="ec32c3d9-5957-42d0-8757-996fd533d25b" providerId="ADAL" clId="{B76BE869-635B-4DC9-A437-AFDC8BC5A345}"/>
-    <pc:docChg chg="custSel addSld modSld">
-      <pc:chgData name="Alexis MARTIN" userId="ec32c3d9-5957-42d0-8757-996fd533d25b" providerId="ADAL" clId="{B76BE869-635B-4DC9-A437-AFDC8BC5A345}" dt="2026-05-06T16:57:10.938" v="195" actId="255"/>
+    <pc:docChg chg="undo custSel addSld modSld">
+      <pc:chgData name="Alexis MARTIN" userId="ec32c3d9-5957-42d0-8757-996fd533d25b" providerId="ADAL" clId="{B76BE869-635B-4DC9-A437-AFDC8BC5A345}" dt="2026-06-22T13:20:29.068" v="268" actId="1076"/>
       <pc:docMkLst>
         <pc:docMk/>
       </pc:docMkLst>
-      <pc:sldChg chg="addSp delSp modSp new mod modAnim">
-        <pc:chgData name="Alexis MARTIN" userId="ec32c3d9-5957-42d0-8757-996fd533d25b" providerId="ADAL" clId="{B76BE869-635B-4DC9-A437-AFDC8BC5A345}" dt="2026-05-06T16:57:10.938" v="195" actId="255"/>
-        <pc:sldMkLst>
-          <pc:docMk/>
-          <pc:sldMk cId="2852815459" sldId="256"/>
-        </pc:sldMkLst>
-        <pc:spChg chg="del">
-          <ac:chgData name="Alexis MARTIN" userId="ec32c3d9-5957-42d0-8757-996fd533d25b" providerId="ADAL" clId="{B76BE869-635B-4DC9-A437-AFDC8BC5A345}" dt="2026-05-06T16:42:12.282" v="1" actId="478"/>
-          <ac:spMkLst>
-            <pc:docMk/>
-            <pc:sldMk cId="2852815459" sldId="256"/>
-            <ac:spMk id="2" creationId="{E1D6FA20-3966-C591-9220-C8D4B1C96E78}"/>
-          </ac:spMkLst>
-        </pc:spChg>
-        <pc:spChg chg="del">
-          <ac:chgData name="Alexis MARTIN" userId="ec32c3d9-5957-42d0-8757-996fd533d25b" providerId="ADAL" clId="{B76BE869-635B-4DC9-A437-AFDC8BC5A345}" dt="2026-05-06T16:42:12.282" v="1" actId="478"/>
-          <ac:spMkLst>
-            <pc:docMk/>
-            <pc:sldMk cId="2852815459" sldId="256"/>
-            <ac:spMk id="3" creationId="{6D086C32-A884-E1EA-B3C4-2A29E5E577F7}"/>
-          </ac:spMkLst>
-        </pc:spChg>
-        <pc:spChg chg="mod">
-          <ac:chgData name="Alexis MARTIN" userId="ec32c3d9-5957-42d0-8757-996fd533d25b" providerId="ADAL" clId="{B76BE869-635B-4DC9-A437-AFDC8BC5A345}" dt="2026-05-06T16:56:19.260" v="175" actId="14100"/>
-          <ac:spMkLst>
-            <pc:docMk/>
-            <pc:sldMk cId="2852815459" sldId="256"/>
-            <ac:spMk id="6" creationId="{E40DA6DA-A155-A369-0C28-3176E58ABFE5}"/>
-          </ac:spMkLst>
-        </pc:spChg>
-        <pc:spChg chg="mod">
-          <ac:chgData name="Alexis MARTIN" userId="ec32c3d9-5957-42d0-8757-996fd533d25b" providerId="ADAL" clId="{B76BE869-635B-4DC9-A437-AFDC8BC5A345}" dt="2026-05-06T16:56:19.260" v="175" actId="14100"/>
-          <ac:spMkLst>
-            <pc:docMk/>
-            <pc:sldMk cId="2852815459" sldId="256"/>
-            <ac:spMk id="7" creationId="{F204E778-6D92-145A-1009-A6632B8BB00B}"/>
-          </ac:spMkLst>
-        </pc:spChg>
-        <pc:spChg chg="mod">
-          <ac:chgData name="Alexis MARTIN" userId="ec32c3d9-5957-42d0-8757-996fd533d25b" providerId="ADAL" clId="{B76BE869-635B-4DC9-A437-AFDC8BC5A345}" dt="2026-05-06T16:45:11.274" v="42" actId="1076"/>
-          <ac:spMkLst>
-            <pc:docMk/>
-            <pc:sldMk cId="2852815459" sldId="256"/>
-            <ac:spMk id="10" creationId="{795C0729-1545-66F2-1F14-8ED23FF119D6}"/>
-          </ac:spMkLst>
-        </pc:spChg>
-        <pc:spChg chg="mod">
-          <ac:chgData name="Alexis MARTIN" userId="ec32c3d9-5957-42d0-8757-996fd533d25b" providerId="ADAL" clId="{B76BE869-635B-4DC9-A437-AFDC8BC5A345}" dt="2026-05-06T16:45:11.274" v="42" actId="1076"/>
-          <ac:spMkLst>
-            <pc:docMk/>
-            <pc:sldMk cId="2852815459" sldId="256"/>
-            <ac:spMk id="11" creationId="{F476B511-7100-A027-D934-A65334E05D15}"/>
-          </ac:spMkLst>
-        </pc:spChg>
-        <pc:spChg chg="mod">
-          <ac:chgData name="Alexis MARTIN" userId="ec32c3d9-5957-42d0-8757-996fd533d25b" providerId="ADAL" clId="{B76BE869-635B-4DC9-A437-AFDC8BC5A345}" dt="2026-05-06T16:45:11.274" v="42" actId="1076"/>
-          <ac:spMkLst>
-            <pc:docMk/>
-            <pc:sldMk cId="2852815459" sldId="256"/>
-            <ac:spMk id="12" creationId="{20CBEE8C-21C5-40C0-4386-34B5C4037739}"/>
-          </ac:spMkLst>
-        </pc:spChg>
-        <pc:spChg chg="mod">
-          <ac:chgData name="Alexis MARTIN" userId="ec32c3d9-5957-42d0-8757-996fd533d25b" providerId="ADAL" clId="{B76BE869-635B-4DC9-A437-AFDC8BC5A345}" dt="2026-05-06T16:45:11.274" v="42" actId="1076"/>
-          <ac:spMkLst>
-            <pc:docMk/>
-            <pc:sldMk cId="2852815459" sldId="256"/>
-            <ac:spMk id="13" creationId="{E0936474-8519-0551-B47F-0079468A9012}"/>
-          </ac:spMkLst>
-        </pc:spChg>
-        <pc:spChg chg="del mod">
-          <ac:chgData name="Alexis MARTIN" userId="ec32c3d9-5957-42d0-8757-996fd533d25b" providerId="ADAL" clId="{B76BE869-635B-4DC9-A437-AFDC8BC5A345}" dt="2026-05-06T16:43:15.588" v="17"/>
-          <ac:spMkLst>
-            <pc:docMk/>
-            <pc:sldMk cId="2852815459" sldId="256"/>
-            <ac:spMk id="14" creationId="{69192839-0542-1C02-1BFE-D68AEE5D78AA}"/>
-          </ac:spMkLst>
-        </pc:spChg>
-        <pc:spChg chg="del mod">
-          <ac:chgData name="Alexis MARTIN" userId="ec32c3d9-5957-42d0-8757-996fd533d25b" providerId="ADAL" clId="{B76BE869-635B-4DC9-A437-AFDC8BC5A345}" dt="2026-05-06T16:43:15.588" v="15" actId="478"/>
-          <ac:spMkLst>
-            <pc:docMk/>
-            <pc:sldMk cId="2852815459" sldId="256"/>
-            <ac:spMk id="15" creationId="{68FD7184-298F-C789-4AD7-EDA3478D56E4}"/>
-          </ac:spMkLst>
-        </pc:spChg>
-        <pc:spChg chg="del mod">
-          <ac:chgData name="Alexis MARTIN" userId="ec32c3d9-5957-42d0-8757-996fd533d25b" providerId="ADAL" clId="{B76BE869-635B-4DC9-A437-AFDC8BC5A345}" dt="2026-05-06T16:54:09.754" v="142" actId="478"/>
-          <ac:spMkLst>
-            <pc:docMk/>
-            <pc:sldMk cId="2852815459" sldId="256"/>
-            <ac:spMk id="16" creationId="{BDDD386C-EA31-F76F-79FF-F2CD1A0387D1}"/>
-          </ac:spMkLst>
-        </pc:spChg>
-        <pc:spChg chg="add del mod">
-          <ac:chgData name="Alexis MARTIN" userId="ec32c3d9-5957-42d0-8757-996fd533d25b" providerId="ADAL" clId="{B76BE869-635B-4DC9-A437-AFDC8BC5A345}" dt="2026-05-06T16:54:09.754" v="142" actId="478"/>
-          <ac:spMkLst>
-            <pc:docMk/>
-            <pc:sldMk cId="2852815459" sldId="256"/>
-            <ac:spMk id="17" creationId="{79543A41-4833-5EFD-1660-C22D6E5912CB}"/>
-          </ac:spMkLst>
-        </pc:spChg>
-        <pc:spChg chg="del mod">
-          <ac:chgData name="Alexis MARTIN" userId="ec32c3d9-5957-42d0-8757-996fd533d25b" providerId="ADAL" clId="{B76BE869-635B-4DC9-A437-AFDC8BC5A345}" dt="2026-05-06T16:54:09.754" v="142" actId="478"/>
-          <ac:spMkLst>
-            <pc:docMk/>
-            <pc:sldMk cId="2852815459" sldId="256"/>
-            <ac:spMk id="18" creationId="{40CB0C5E-BE35-752D-0073-69769D2B7AA5}"/>
-          </ac:spMkLst>
-        </pc:spChg>
-        <pc:spChg chg="mod">
-          <ac:chgData name="Alexis MARTIN" userId="ec32c3d9-5957-42d0-8757-996fd533d25b" providerId="ADAL" clId="{B76BE869-635B-4DC9-A437-AFDC8BC5A345}" dt="2026-05-06T16:42:34.299" v="3" actId="1076"/>
-          <ac:spMkLst>
-            <pc:docMk/>
-            <pc:sldMk cId="2852815459" sldId="256"/>
-            <ac:spMk id="33" creationId="{8ACC7992-A631-0588-1A1E-8234964AC1A6}"/>
-          </ac:spMkLst>
-        </pc:spChg>
-        <pc:spChg chg="mod">
-          <ac:chgData name="Alexis MARTIN" userId="ec32c3d9-5957-42d0-8757-996fd533d25b" providerId="ADAL" clId="{B76BE869-635B-4DC9-A437-AFDC8BC5A345}" dt="2026-05-06T16:42:34.299" v="3" actId="1076"/>
-          <ac:spMkLst>
-            <pc:docMk/>
-            <pc:sldMk cId="2852815459" sldId="256"/>
-            <ac:spMk id="35" creationId="{6FE8E832-284F-24FC-EACD-0DB8226E78CA}"/>
-          </ac:spMkLst>
-        </pc:spChg>
-        <pc:spChg chg="mod">
-          <ac:chgData name="Alexis MARTIN" userId="ec32c3d9-5957-42d0-8757-996fd533d25b" providerId="ADAL" clId="{B76BE869-635B-4DC9-A437-AFDC8BC5A345}" dt="2026-05-06T16:42:34.299" v="3" actId="1076"/>
-          <ac:spMkLst>
-            <pc:docMk/>
-            <pc:sldMk cId="2852815459" sldId="256"/>
-            <ac:spMk id="48" creationId="{048D2F2A-92A9-996E-8F9E-74BA377A44EE}"/>
-          </ac:spMkLst>
-        </pc:spChg>
-        <pc:spChg chg="mod">
-          <ac:chgData name="Alexis MARTIN" userId="ec32c3d9-5957-42d0-8757-996fd533d25b" providerId="ADAL" clId="{B76BE869-635B-4DC9-A437-AFDC8BC5A345}" dt="2026-05-06T16:42:34.299" v="3" actId="1076"/>
-          <ac:spMkLst>
-            <pc:docMk/>
-            <pc:sldMk cId="2852815459" sldId="256"/>
-            <ac:spMk id="83" creationId="{9C38C5A3-66EA-30F2-FEBF-A3F57601F142}"/>
-          </ac:spMkLst>
-        </pc:spChg>
-        <pc:spChg chg="mod">
-          <ac:chgData name="Alexis MARTIN" userId="ec32c3d9-5957-42d0-8757-996fd533d25b" providerId="ADAL" clId="{B76BE869-635B-4DC9-A437-AFDC8BC5A345}" dt="2026-05-06T16:42:34.299" v="3" actId="1076"/>
-          <ac:spMkLst>
-            <pc:docMk/>
-            <pc:sldMk cId="2852815459" sldId="256"/>
-            <ac:spMk id="93" creationId="{4F20C314-C457-8C2E-221E-E25A7F263DF0}"/>
-          </ac:spMkLst>
-        </pc:spChg>
-        <pc:spChg chg="mod">
-          <ac:chgData name="Alexis MARTIN" userId="ec32c3d9-5957-42d0-8757-996fd533d25b" providerId="ADAL" clId="{B76BE869-635B-4DC9-A437-AFDC8BC5A345}" dt="2026-05-06T16:42:34.299" v="3" actId="1076"/>
-          <ac:spMkLst>
-            <pc:docMk/>
-            <pc:sldMk cId="2852815459" sldId="256"/>
-            <ac:spMk id="106" creationId="{4AD1CB85-DE71-6727-5603-9EC7A6D3A99A}"/>
-          </ac:spMkLst>
-        </pc:spChg>
-        <pc:spChg chg="mod">
-          <ac:chgData name="Alexis MARTIN" userId="ec32c3d9-5957-42d0-8757-996fd533d25b" providerId="ADAL" clId="{B76BE869-635B-4DC9-A437-AFDC8BC5A345}" dt="2026-05-06T16:42:34.299" v="3" actId="1076"/>
-          <ac:spMkLst>
-            <pc:docMk/>
-            <pc:sldMk cId="2852815459" sldId="256"/>
-            <ac:spMk id="120" creationId="{302B360D-7DEE-059F-FF65-F4C44BE3DD18}"/>
-          </ac:spMkLst>
-        </pc:spChg>
-        <pc:spChg chg="mod">
-          <ac:chgData name="Alexis MARTIN" userId="ec32c3d9-5957-42d0-8757-996fd533d25b" providerId="ADAL" clId="{B76BE869-635B-4DC9-A437-AFDC8BC5A345}" dt="2026-05-06T16:56:37.490" v="184" actId="255"/>
-          <ac:spMkLst>
-            <pc:docMk/>
-            <pc:sldMk cId="2852815459" sldId="256"/>
-            <ac:spMk id="123" creationId="{6747E12A-616E-3699-36D7-4564492C531D}"/>
-          </ac:spMkLst>
-        </pc:spChg>
-        <pc:spChg chg="mod">
-          <ac:chgData name="Alexis MARTIN" userId="ec32c3d9-5957-42d0-8757-996fd533d25b" providerId="ADAL" clId="{B76BE869-635B-4DC9-A437-AFDC8BC5A345}" dt="2026-05-06T16:45:11.274" v="42" actId="1076"/>
-          <ac:spMkLst>
-            <pc:docMk/>
-            <pc:sldMk cId="2852815459" sldId="256"/>
-            <ac:spMk id="124" creationId="{919000E6-3D13-262F-3B75-917BE68B7A54}"/>
-          </ac:spMkLst>
-        </pc:spChg>
-        <pc:spChg chg="mod">
-          <ac:chgData name="Alexis MARTIN" userId="ec32c3d9-5957-42d0-8757-996fd533d25b" providerId="ADAL" clId="{B76BE869-635B-4DC9-A437-AFDC8BC5A345}" dt="2026-05-06T16:42:34.299" v="3" actId="1076"/>
-          <ac:spMkLst>
-            <pc:docMk/>
-            <pc:sldMk cId="2852815459" sldId="256"/>
-            <ac:spMk id="126" creationId="{DB7D33BE-2D4E-838C-712C-2DF97E28B72B}"/>
-          </ac:spMkLst>
-        </pc:spChg>
-        <pc:spChg chg="del">
-          <ac:chgData name="Alexis MARTIN" userId="ec32c3d9-5957-42d0-8757-996fd533d25b" providerId="ADAL" clId="{B76BE869-635B-4DC9-A437-AFDC8BC5A345}" dt="2026-05-06T16:44:49.916" v="35" actId="21"/>
-          <ac:spMkLst>
-            <pc:docMk/>
-            <pc:sldMk cId="2852815459" sldId="256"/>
-            <ac:spMk id="132" creationId="{2F104041-3CF3-2C77-33CE-20579DACF7FB}"/>
-          </ac:spMkLst>
-        </pc:spChg>
-        <pc:spChg chg="mod">
-          <ac:chgData name="Alexis MARTIN" userId="ec32c3d9-5957-42d0-8757-996fd533d25b" providerId="ADAL" clId="{B76BE869-635B-4DC9-A437-AFDC8BC5A345}" dt="2026-05-06T16:44:02.669" v="29" actId="58"/>
-          <ac:spMkLst>
-            <pc:docMk/>
-            <pc:sldMk cId="2852815459" sldId="256"/>
-            <ac:spMk id="133" creationId="{76459D52-72BE-7A01-2747-E3B86F4584C6}"/>
-          </ac:spMkLst>
-        </pc:spChg>
-        <pc:spChg chg="del">
-          <ac:chgData name="Alexis MARTIN" userId="ec32c3d9-5957-42d0-8757-996fd533d25b" providerId="ADAL" clId="{B76BE869-635B-4DC9-A437-AFDC8BC5A345}" dt="2026-05-06T16:44:06.060" v="30" actId="478"/>
-          <ac:spMkLst>
-            <pc:docMk/>
-            <pc:sldMk cId="2852815459" sldId="256"/>
-            <ac:spMk id="134" creationId="{94EBA2BE-8AC3-1801-5B08-E6D9010CD3B8}"/>
-          </ac:spMkLst>
-        </pc:spChg>
-        <pc:spChg chg="del">
-          <ac:chgData name="Alexis MARTIN" userId="ec32c3d9-5957-42d0-8757-996fd533d25b" providerId="ADAL" clId="{B76BE869-635B-4DC9-A437-AFDC8BC5A345}" dt="2026-05-06T16:44:49.916" v="35" actId="21"/>
-          <ac:spMkLst>
-            <pc:docMk/>
-            <pc:sldMk cId="2852815459" sldId="256"/>
-            <ac:spMk id="136" creationId="{A72BA46F-110B-9BDD-E67A-7CECB53B1802}"/>
-          </ac:spMkLst>
-        </pc:spChg>
-        <pc:spChg chg="del">
-          <ac:chgData name="Alexis MARTIN" userId="ec32c3d9-5957-42d0-8757-996fd533d25b" providerId="ADAL" clId="{B76BE869-635B-4DC9-A437-AFDC8BC5A345}" dt="2026-05-06T16:44:49.916" v="35" actId="21"/>
-          <ac:spMkLst>
-            <pc:docMk/>
-            <pc:sldMk cId="2852815459" sldId="256"/>
-            <ac:spMk id="137" creationId="{BD5296D8-FA0B-8EE9-96CA-1817FD72D54C}"/>
-          </ac:spMkLst>
-        </pc:spChg>
-        <pc:spChg chg="del">
-          <ac:chgData name="Alexis MARTIN" userId="ec32c3d9-5957-42d0-8757-996fd533d25b" providerId="ADAL" clId="{B76BE869-635B-4DC9-A437-AFDC8BC5A345}" dt="2026-05-06T16:44:49.916" v="35" actId="21"/>
-          <ac:spMkLst>
-            <pc:docMk/>
-            <pc:sldMk cId="2852815459" sldId="256"/>
-            <ac:spMk id="138" creationId="{098F864B-6E33-8A89-ACCC-D53CE5ECDE76}"/>
-          </ac:spMkLst>
-        </pc:spChg>
-        <pc:spChg chg="add del mod">
-          <ac:chgData name="Alexis MARTIN" userId="ec32c3d9-5957-42d0-8757-996fd533d25b" providerId="ADAL" clId="{B76BE869-635B-4DC9-A437-AFDC8BC5A345}" dt="2026-05-06T16:43:52.937" v="26" actId="1076"/>
-          <ac:spMkLst>
-            <pc:docMk/>
-            <pc:sldMk cId="2852815459" sldId="256"/>
-            <ac:spMk id="148" creationId="{555B3637-5864-0E17-CCA2-295BC5BCE0EA}"/>
-          </ac:spMkLst>
-        </pc:spChg>
-        <pc:spChg chg="del">
-          <ac:chgData name="Alexis MARTIN" userId="ec32c3d9-5957-42d0-8757-996fd533d25b" providerId="ADAL" clId="{B76BE869-635B-4DC9-A437-AFDC8BC5A345}" dt="2026-05-06T16:43:50.167" v="25" actId="478"/>
-          <ac:spMkLst>
-            <pc:docMk/>
-            <pc:sldMk cId="2852815459" sldId="256"/>
-            <ac:spMk id="149" creationId="{B6D269C7-AB76-1848-27C2-826BB1789423}"/>
-          </ac:spMkLst>
-        </pc:spChg>
-        <pc:spChg chg="del">
-          <ac:chgData name="Alexis MARTIN" userId="ec32c3d9-5957-42d0-8757-996fd533d25b" providerId="ADAL" clId="{B76BE869-635B-4DC9-A437-AFDC8BC5A345}" dt="2026-05-06T16:44:49.916" v="35" actId="21"/>
-          <ac:spMkLst>
-            <pc:docMk/>
-            <pc:sldMk cId="2852815459" sldId="256"/>
-            <ac:spMk id="150" creationId="{0BF764AA-9B2A-481A-B1B1-E96CA4A36EC9}"/>
-          </ac:spMkLst>
-        </pc:spChg>
-        <pc:spChg chg="del">
-          <ac:chgData name="Alexis MARTIN" userId="ec32c3d9-5957-42d0-8757-996fd533d25b" providerId="ADAL" clId="{B76BE869-635B-4DC9-A437-AFDC8BC5A345}" dt="2026-05-06T16:44:49.916" v="35" actId="21"/>
-          <ac:spMkLst>
-            <pc:docMk/>
-            <pc:sldMk cId="2852815459" sldId="256"/>
-            <ac:spMk id="151" creationId="{8B673735-D05D-A219-3C6A-B8BFAAE654F9}"/>
-          </ac:spMkLst>
-        </pc:spChg>
-        <pc:spChg chg="del">
-          <ac:chgData name="Alexis MARTIN" userId="ec32c3d9-5957-42d0-8757-996fd533d25b" providerId="ADAL" clId="{B76BE869-635B-4DC9-A437-AFDC8BC5A345}" dt="2026-05-06T16:44:49.916" v="35" actId="21"/>
-          <ac:spMkLst>
-            <pc:docMk/>
-            <pc:sldMk cId="2852815459" sldId="256"/>
-            <ac:spMk id="153" creationId="{FD7666C7-2745-211B-3994-C648209D5817}"/>
-          </ac:spMkLst>
-        </pc:spChg>
-        <pc:spChg chg="mod">
-          <ac:chgData name="Alexis MARTIN" userId="ec32c3d9-5957-42d0-8757-996fd533d25b" providerId="ADAL" clId="{B76BE869-635B-4DC9-A437-AFDC8BC5A345}" dt="2026-05-06T16:55:52.411" v="171" actId="1035"/>
-          <ac:spMkLst>
-            <pc:docMk/>
-            <pc:sldMk cId="2852815459" sldId="256"/>
-            <ac:spMk id="157" creationId="{4DF89C00-8973-893C-74BD-EC5397E167F4}"/>
-          </ac:spMkLst>
-        </pc:spChg>
-        <pc:spChg chg="mod">
-          <ac:chgData name="Alexis MARTIN" userId="ec32c3d9-5957-42d0-8757-996fd533d25b" providerId="ADAL" clId="{B76BE869-635B-4DC9-A437-AFDC8BC5A345}" dt="2026-05-06T16:55:52.411" v="171" actId="1035"/>
-          <ac:spMkLst>
-            <pc:docMk/>
-            <pc:sldMk cId="2852815459" sldId="256"/>
-            <ac:spMk id="160" creationId="{DD5BF54F-7AD9-A0D1-9843-F39C9834DBD9}"/>
-          </ac:spMkLst>
-        </pc:spChg>
-        <pc:spChg chg="del mod">
-          <ac:chgData name="Alexis MARTIN" userId="ec32c3d9-5957-42d0-8757-996fd533d25b" providerId="ADAL" clId="{B76BE869-635B-4DC9-A437-AFDC8BC5A345}" dt="2026-05-06T16:44:49.916" v="35" actId="21"/>
-          <ac:spMkLst>
-            <pc:docMk/>
-            <pc:sldMk cId="2852815459" sldId="256"/>
-            <ac:spMk id="161" creationId="{DEF8F0FA-AA18-0538-A038-2D6444047804}"/>
-          </ac:spMkLst>
-        </pc:spChg>
-        <pc:spChg chg="del">
-          <ac:chgData name="Alexis MARTIN" userId="ec32c3d9-5957-42d0-8757-996fd533d25b" providerId="ADAL" clId="{B76BE869-635B-4DC9-A437-AFDC8BC5A345}" dt="2026-05-06T16:42:54.110" v="7" actId="478"/>
-          <ac:spMkLst>
-            <pc:docMk/>
-            <pc:sldMk cId="2852815459" sldId="256"/>
-            <ac:spMk id="163" creationId="{7754C862-20DC-C3E4-E104-1D76913D6AFF}"/>
-          </ac:spMkLst>
-        </pc:spChg>
-        <pc:spChg chg="mod">
-          <ac:chgData name="Alexis MARTIN" userId="ec32c3d9-5957-42d0-8757-996fd533d25b" providerId="ADAL" clId="{B76BE869-635B-4DC9-A437-AFDC8BC5A345}" dt="2026-05-06T16:56:10.969" v="174" actId="113"/>
-          <ac:spMkLst>
-            <pc:docMk/>
-            <pc:sldMk cId="2852815459" sldId="256"/>
-            <ac:spMk id="164" creationId="{88DF992C-1443-FF83-680D-F6213E3E474F}"/>
-          </ac:spMkLst>
-        </pc:spChg>
-        <pc:spChg chg="del">
-          <ac:chgData name="Alexis MARTIN" userId="ec32c3d9-5957-42d0-8757-996fd533d25b" providerId="ADAL" clId="{B76BE869-635B-4DC9-A437-AFDC8BC5A345}" dt="2026-05-06T16:44:14.442" v="31" actId="478"/>
-          <ac:spMkLst>
-            <pc:docMk/>
-            <pc:sldMk cId="2852815459" sldId="256"/>
-            <ac:spMk id="165" creationId="{5B45A207-3344-0A09-CB90-E978579846BB}"/>
-          </ac:spMkLst>
-        </pc:spChg>
-        <pc:spChg chg="del mod">
-          <ac:chgData name="Alexis MARTIN" userId="ec32c3d9-5957-42d0-8757-996fd533d25b" providerId="ADAL" clId="{B76BE869-635B-4DC9-A437-AFDC8BC5A345}" dt="2026-05-06T16:54:05.488" v="141" actId="478"/>
-          <ac:spMkLst>
-            <pc:docMk/>
-            <pc:sldMk cId="2852815459" sldId="256"/>
-            <ac:spMk id="166" creationId="{77F0501A-6248-C77D-BD31-114EBBA19981}"/>
-          </ac:spMkLst>
-        </pc:spChg>
-        <pc:spChg chg="del">
-          <ac:chgData name="Alexis MARTIN" userId="ec32c3d9-5957-42d0-8757-996fd533d25b" providerId="ADAL" clId="{B76BE869-635B-4DC9-A437-AFDC8BC5A345}" dt="2026-05-06T16:54:05.488" v="141" actId="478"/>
-          <ac:spMkLst>
-            <pc:docMk/>
-            <pc:sldMk cId="2852815459" sldId="256"/>
-            <ac:spMk id="167" creationId="{D3AF2583-9E1F-1C27-87C1-AC3B15C0377B}"/>
-          </ac:spMkLst>
-        </pc:spChg>
-        <pc:spChg chg="del mod">
-          <ac:chgData name="Alexis MARTIN" userId="ec32c3d9-5957-42d0-8757-996fd533d25b" providerId="ADAL" clId="{B76BE869-635B-4DC9-A437-AFDC8BC5A345}" dt="2026-05-06T16:54:05.488" v="141" actId="478"/>
-          <ac:spMkLst>
-            <pc:docMk/>
-            <pc:sldMk cId="2852815459" sldId="256"/>
-            <ac:spMk id="168" creationId="{155FEA70-F7B8-7074-6914-AAE23CB936D8}"/>
-          </ac:spMkLst>
-        </pc:spChg>
-        <pc:spChg chg="mod">
-          <ac:chgData name="Alexis MARTIN" userId="ec32c3d9-5957-42d0-8757-996fd533d25b" providerId="ADAL" clId="{B76BE869-635B-4DC9-A437-AFDC8BC5A345}" dt="2026-05-06T16:56:37.490" v="184" actId="255"/>
-          <ac:spMkLst>
-            <pc:docMk/>
-            <pc:sldMk cId="2852815459" sldId="256"/>
-            <ac:spMk id="169" creationId="{F1CA2F38-CFB8-8DEB-525A-90798BC671AA}"/>
-          </ac:spMkLst>
-        </pc:spChg>
-        <pc:spChg chg="mod">
-          <ac:chgData name="Alexis MARTIN" userId="ec32c3d9-5957-42d0-8757-996fd533d25b" providerId="ADAL" clId="{B76BE869-635B-4DC9-A437-AFDC8BC5A345}" dt="2026-05-06T16:55:52.411" v="171" actId="1035"/>
-          <ac:spMkLst>
-            <pc:docMk/>
-            <pc:sldMk cId="2852815459" sldId="256"/>
-            <ac:spMk id="170" creationId="{F8385C38-C6B0-1150-2E5E-E6B38B97F2F4}"/>
-          </ac:spMkLst>
-        </pc:spChg>
-        <pc:spChg chg="mod">
-          <ac:chgData name="Alexis MARTIN" userId="ec32c3d9-5957-42d0-8757-996fd533d25b" providerId="ADAL" clId="{B76BE869-635B-4DC9-A437-AFDC8BC5A345}" dt="2026-05-06T16:55:52.411" v="171" actId="1035"/>
-          <ac:spMkLst>
-            <pc:docMk/>
-            <pc:sldMk cId="2852815459" sldId="256"/>
-            <ac:spMk id="172" creationId="{E085F179-403A-AC52-0A57-31DBA97A8FFE}"/>
-          </ac:spMkLst>
-        </pc:spChg>
-        <pc:spChg chg="mod">
-          <ac:chgData name="Alexis MARTIN" userId="ec32c3d9-5957-42d0-8757-996fd533d25b" providerId="ADAL" clId="{B76BE869-635B-4DC9-A437-AFDC8BC5A345}" dt="2026-05-06T16:45:53.823" v="50" actId="14100"/>
-          <ac:spMkLst>
-            <pc:docMk/>
-            <pc:sldMk cId="2852815459" sldId="256"/>
-            <ac:spMk id="173" creationId="{40DE076D-85F9-8DA4-A3D8-ED002AC8CA23}"/>
-          </ac:spMkLst>
-        </pc:spChg>
-        <pc:spChg chg="mod">
-          <ac:chgData name="Alexis MARTIN" userId="ec32c3d9-5957-42d0-8757-996fd533d25b" providerId="ADAL" clId="{B76BE869-635B-4DC9-A437-AFDC8BC5A345}" dt="2026-05-06T16:56:22.943" v="176" actId="1076"/>
-          <ac:spMkLst>
-            <pc:docMk/>
-            <pc:sldMk cId="2852815459" sldId="256"/>
-            <ac:spMk id="174" creationId="{E9B07447-9C05-9B05-9BF7-9A36AE736D2C}"/>
-          </ac:spMkLst>
-        </pc:spChg>
-        <pc:spChg chg="del mod">
-          <ac:chgData name="Alexis MARTIN" userId="ec32c3d9-5957-42d0-8757-996fd533d25b" providerId="ADAL" clId="{B76BE869-635B-4DC9-A437-AFDC8BC5A345}" dt="2026-05-06T16:45:49.924" v="49" actId="478"/>
-          <ac:spMkLst>
-            <pc:docMk/>
-            <pc:sldMk cId="2852815459" sldId="256"/>
-            <ac:spMk id="181" creationId="{574AB99C-911C-D087-4078-FC4CF3145346}"/>
-          </ac:spMkLst>
-        </pc:spChg>
-        <pc:spChg chg="mod">
-          <ac:chgData name="Alexis MARTIN" userId="ec32c3d9-5957-42d0-8757-996fd533d25b" providerId="ADAL" clId="{B76BE869-635B-4DC9-A437-AFDC8BC5A345}" dt="2026-05-06T16:55:52.411" v="171" actId="1035"/>
-          <ac:spMkLst>
-            <pc:docMk/>
-            <pc:sldMk cId="2852815459" sldId="256"/>
-            <ac:spMk id="182" creationId="{C860A70D-7F79-04C3-02DD-BC05A71E324B}"/>
-          </ac:spMkLst>
-        </pc:spChg>
-        <pc:spChg chg="mod">
-          <ac:chgData name="Alexis MARTIN" userId="ec32c3d9-5957-42d0-8757-996fd533d25b" providerId="ADAL" clId="{B76BE869-635B-4DC9-A437-AFDC8BC5A345}" dt="2026-05-06T16:46:01.499" v="53" actId="14100"/>
-          <ac:spMkLst>
-            <pc:docMk/>
-            <pc:sldMk cId="2852815459" sldId="256"/>
-            <ac:spMk id="184" creationId="{38CDDBB0-0906-5651-67CF-83E6B2FE219B}"/>
-          </ac:spMkLst>
-        </pc:spChg>
-        <pc:spChg chg="del">
-          <ac:chgData name="Alexis MARTIN" userId="ec32c3d9-5957-42d0-8757-996fd533d25b" providerId="ADAL" clId="{B76BE869-635B-4DC9-A437-AFDC8BC5A345}" dt="2026-05-06T16:45:57.893" v="51" actId="478"/>
-          <ac:spMkLst>
-            <pc:docMk/>
-            <pc:sldMk cId="2852815459" sldId="256"/>
-            <ac:spMk id="185" creationId="{60E54FAE-841D-3255-9661-78A0206BD7ED}"/>
-          </ac:spMkLst>
-        </pc:spChg>
-        <pc:spChg chg="mod">
-          <ac:chgData name="Alexis MARTIN" userId="ec32c3d9-5957-42d0-8757-996fd533d25b" providerId="ADAL" clId="{B76BE869-635B-4DC9-A437-AFDC8BC5A345}" dt="2026-05-06T16:55:52.411" v="171" actId="1035"/>
-          <ac:spMkLst>
-            <pc:docMk/>
-            <pc:sldMk cId="2852815459" sldId="256"/>
-            <ac:spMk id="186" creationId="{8F2845FC-54ED-3BD3-5971-044553853EA0}"/>
-          </ac:spMkLst>
-        </pc:spChg>
-        <pc:spChg chg="mod">
-          <ac:chgData name="Alexis MARTIN" userId="ec32c3d9-5957-42d0-8757-996fd533d25b" providerId="ADAL" clId="{B76BE869-635B-4DC9-A437-AFDC8BC5A345}" dt="2026-05-06T16:45:38.645" v="45" actId="1076"/>
-          <ac:spMkLst>
-            <pc:docMk/>
-            <pc:sldMk cId="2852815459" sldId="256"/>
-            <ac:spMk id="187" creationId="{DC2BBCA4-B1EF-0961-1B6D-A169E073AACD}"/>
-          </ac:spMkLst>
-        </pc:spChg>
-        <pc:spChg chg="mod">
-          <ac:chgData name="Alexis MARTIN" userId="ec32c3d9-5957-42d0-8757-996fd533d25b" providerId="ADAL" clId="{B76BE869-635B-4DC9-A437-AFDC8BC5A345}" dt="2026-05-06T16:57:10.938" v="195" actId="255"/>
-          <ac:spMkLst>
-            <pc:docMk/>
-            <pc:sldMk cId="2852815459" sldId="256"/>
-            <ac:spMk id="188" creationId="{F89CA36C-6047-1FC4-CAB7-2D394881D8BD}"/>
-          </ac:spMkLst>
-        </pc:spChg>
-        <pc:spChg chg="add mod">
-          <ac:chgData name="Alexis MARTIN" userId="ec32c3d9-5957-42d0-8757-996fd533d25b" providerId="ADAL" clId="{B76BE869-635B-4DC9-A437-AFDC8BC5A345}" dt="2026-05-06T16:57:04.783" v="193" actId="1076"/>
-          <ac:spMkLst>
-            <pc:docMk/>
-            <pc:sldMk cId="2852815459" sldId="256"/>
-            <ac:spMk id="189" creationId="{1AAA4467-DAEA-DDA9-2B4D-4975F423F538}"/>
-          </ac:spMkLst>
-        </pc:spChg>
-        <pc:spChg chg="mod">
-          <ac:chgData name="Alexis MARTIN" userId="ec32c3d9-5957-42d0-8757-996fd533d25b" providerId="ADAL" clId="{B76BE869-635B-4DC9-A437-AFDC8BC5A345}" dt="2026-05-06T16:55:52.411" v="171" actId="1035"/>
-          <ac:spMkLst>
-            <pc:docMk/>
-            <pc:sldMk cId="2852815459" sldId="256"/>
-            <ac:spMk id="190" creationId="{70470B9F-78AE-B647-E5C3-59263CC8035D}"/>
-          </ac:spMkLst>
-        </pc:spChg>
-        <pc:spChg chg="del">
-          <ac:chgData name="Alexis MARTIN" userId="ec32c3d9-5957-42d0-8757-996fd533d25b" providerId="ADAL" clId="{B76BE869-635B-4DC9-A437-AFDC8BC5A345}" dt="2026-05-06T16:42:50.705" v="6" actId="478"/>
-          <ac:spMkLst>
-            <pc:docMk/>
-            <pc:sldMk cId="2852815459" sldId="256"/>
-            <ac:spMk id="191" creationId="{F40A4691-2074-D62C-E08B-80C426AEBFF0}"/>
-          </ac:spMkLst>
-        </pc:spChg>
-        <pc:spChg chg="del">
-          <ac:chgData name="Alexis MARTIN" userId="ec32c3d9-5957-42d0-8757-996fd533d25b" providerId="ADAL" clId="{B76BE869-635B-4DC9-A437-AFDC8BC5A345}" dt="2026-05-06T16:42:45.701" v="4" actId="478"/>
-          <ac:spMkLst>
-            <pc:docMk/>
-            <pc:sldMk cId="2852815459" sldId="256"/>
-            <ac:spMk id="192" creationId="{E938DA71-D467-12E1-7D14-4B19B2328BEC}"/>
-          </ac:spMkLst>
-        </pc:spChg>
-        <pc:spChg chg="add del mod">
-          <ac:chgData name="Alexis MARTIN" userId="ec32c3d9-5957-42d0-8757-996fd533d25b" providerId="ADAL" clId="{B76BE869-635B-4DC9-A437-AFDC8BC5A345}" dt="2026-05-06T16:53:57.767" v="140" actId="478"/>
-          <ac:spMkLst>
-            <pc:docMk/>
-            <pc:sldMk cId="2852815459" sldId="256"/>
-            <ac:spMk id="193" creationId="{1C52EF94-70A5-3A4F-DFF3-866FEE7A19A7}"/>
-          </ac:spMkLst>
-        </pc:spChg>
-        <pc:spChg chg="del">
-          <ac:chgData name="Alexis MARTIN" userId="ec32c3d9-5957-42d0-8757-996fd533d25b" providerId="ADAL" clId="{B76BE869-635B-4DC9-A437-AFDC8BC5A345}" dt="2026-05-06T16:53:57.767" v="140" actId="478"/>
-          <ac:spMkLst>
-            <pc:docMk/>
-            <pc:sldMk cId="2852815459" sldId="256"/>
-            <ac:spMk id="194" creationId="{CD38DAC7-3E3E-92E6-8671-F951E3481EB8}"/>
-          </ac:spMkLst>
-        </pc:spChg>
-        <pc:spChg chg="mod">
-          <ac:chgData name="Alexis MARTIN" userId="ec32c3d9-5957-42d0-8757-996fd533d25b" providerId="ADAL" clId="{B76BE869-635B-4DC9-A437-AFDC8BC5A345}" dt="2026-05-06T16:46:17.432" v="57" actId="1076"/>
-          <ac:spMkLst>
-            <pc:docMk/>
-            <pc:sldMk cId="2852815459" sldId="256"/>
-            <ac:spMk id="195" creationId="{0BF69296-17DC-F3BC-BFB6-7917E4D7F247}"/>
-          </ac:spMkLst>
-        </pc:spChg>
-        <pc:spChg chg="del">
-          <ac:chgData name="Alexis MARTIN" userId="ec32c3d9-5957-42d0-8757-996fd533d25b" providerId="ADAL" clId="{B76BE869-635B-4DC9-A437-AFDC8BC5A345}" dt="2026-05-06T16:45:58.622" v="52" actId="478"/>
-          <ac:spMkLst>
-            <pc:docMk/>
-            <pc:sldMk cId="2852815459" sldId="256"/>
-            <ac:spMk id="196" creationId="{C473BDAF-90BC-DBF3-99DC-85605DC76BF2}"/>
-          </ac:spMkLst>
-        </pc:spChg>
-        <pc:spChg chg="del mod">
-          <ac:chgData name="Alexis MARTIN" userId="ec32c3d9-5957-42d0-8757-996fd533d25b" providerId="ADAL" clId="{B76BE869-635B-4DC9-A437-AFDC8BC5A345}" dt="2026-05-06T16:45:47.993" v="48" actId="478"/>
-          <ac:spMkLst>
-            <pc:docMk/>
-            <pc:sldMk cId="2852815459" sldId="256"/>
-            <ac:spMk id="197" creationId="{6A40C456-1BCE-FB21-05A9-D48878B64D1A}"/>
-          </ac:spMkLst>
-        </pc:spChg>
-        <pc:spChg chg="del mod">
-          <ac:chgData name="Alexis MARTIN" userId="ec32c3d9-5957-42d0-8757-996fd533d25b" providerId="ADAL" clId="{B76BE869-635B-4DC9-A437-AFDC8BC5A345}" dt="2026-05-06T16:45:45.480" v="46" actId="478"/>
-          <ac:spMkLst>
-            <pc:docMk/>
-            <pc:sldMk cId="2852815459" sldId="256"/>
-            <ac:spMk id="198" creationId="{87A8A421-1ACA-18D2-1710-84FBE915EFD8}"/>
-          </ac:spMkLst>
-        </pc:spChg>
-        <pc:spChg chg="del">
-          <ac:chgData name="Alexis MARTIN" userId="ec32c3d9-5957-42d0-8757-996fd533d25b" providerId="ADAL" clId="{B76BE869-635B-4DC9-A437-AFDC8BC5A345}" dt="2026-05-06T16:44:49.916" v="35" actId="21"/>
-          <ac:spMkLst>
-            <pc:docMk/>
-            <pc:sldMk cId="2852815459" sldId="256"/>
-            <ac:spMk id="199" creationId="{78E92997-CA48-C093-E4C4-E4034182BB16}"/>
-          </ac:spMkLst>
-        </pc:spChg>
-        <pc:spChg chg="add del mod">
-          <ac:chgData name="Alexis MARTIN" userId="ec32c3d9-5957-42d0-8757-996fd533d25b" providerId="ADAL" clId="{B76BE869-635B-4DC9-A437-AFDC8BC5A345}" dt="2026-05-06T16:44:49.916" v="35" actId="21"/>
-          <ac:spMkLst>
-            <pc:docMk/>
-            <pc:sldMk cId="2852815459" sldId="256"/>
-            <ac:spMk id="201" creationId="{38B8859F-BD93-5AEC-E795-33937128723A}"/>
-          </ac:spMkLst>
-        </pc:spChg>
-        <pc:spChg chg="mod">
-          <ac:chgData name="Alexis MARTIN" userId="ec32c3d9-5957-42d0-8757-996fd533d25b" providerId="ADAL" clId="{B76BE869-635B-4DC9-A437-AFDC8BC5A345}" dt="2026-05-06T16:45:03.129" v="39" actId="1076"/>
-          <ac:spMkLst>
-            <pc:docMk/>
-            <pc:sldMk cId="2852815459" sldId="256"/>
-            <ac:spMk id="204" creationId="{063F4711-0F90-0B03-6068-3289B78FF552}"/>
-          </ac:spMkLst>
-        </pc:spChg>
-        <pc:spChg chg="del">
-          <ac:chgData name="Alexis MARTIN" userId="ec32c3d9-5957-42d0-8757-996fd533d25b" providerId="ADAL" clId="{B76BE869-635B-4DC9-A437-AFDC8BC5A345}" dt="2026-05-06T16:45:04.026" v="40" actId="21"/>
-          <ac:spMkLst>
-            <pc:docMk/>
-            <pc:sldMk cId="2852815459" sldId="256"/>
-            <ac:spMk id="211" creationId="{A7645714-4406-A97B-4429-DF4F637F85F9}"/>
-          </ac:spMkLst>
-        </pc:spChg>
-        <pc:spChg chg="add del mod">
-          <ac:chgData name="Alexis MARTIN" userId="ec32c3d9-5957-42d0-8757-996fd533d25b" providerId="ADAL" clId="{B76BE869-635B-4DC9-A437-AFDC8BC5A345}" dt="2026-05-06T16:45:04.026" v="40" actId="21"/>
-          <ac:spMkLst>
-            <pc:docMk/>
-            <pc:sldMk cId="2852815459" sldId="256"/>
-            <ac:spMk id="212" creationId="{A72BA46F-110B-9BDD-E67A-7CECB53B1802}"/>
-          </ac:spMkLst>
-        </pc:spChg>
-        <pc:spChg chg="del">
-          <ac:chgData name="Alexis MARTIN" userId="ec32c3d9-5957-42d0-8757-996fd533d25b" providerId="ADAL" clId="{B76BE869-635B-4DC9-A437-AFDC8BC5A345}" dt="2026-05-06T16:45:04.026" v="40" actId="21"/>
-          <ac:spMkLst>
-            <pc:docMk/>
-            <pc:sldMk cId="2852815459" sldId="256"/>
-            <ac:spMk id="215" creationId="{100B32AC-EA90-8192-2648-16EC1DB088FB}"/>
-          </ac:spMkLst>
-        </pc:spChg>
-        <pc:spChg chg="add del mod">
-          <ac:chgData name="Alexis MARTIN" userId="ec32c3d9-5957-42d0-8757-996fd533d25b" providerId="ADAL" clId="{B76BE869-635B-4DC9-A437-AFDC8BC5A345}" dt="2026-05-06T16:45:04.026" v="40" actId="21"/>
-          <ac:spMkLst>
-            <pc:docMk/>
-            <pc:sldMk cId="2852815459" sldId="256"/>
-            <ac:spMk id="216" creationId="{1B12671F-F141-3C65-FFCA-04DEDEFFE121}"/>
-          </ac:spMkLst>
-        </pc:spChg>
-        <pc:spChg chg="mod">
-          <ac:chgData name="Alexis MARTIN" userId="ec32c3d9-5957-42d0-8757-996fd533d25b" providerId="ADAL" clId="{B76BE869-635B-4DC9-A437-AFDC8BC5A345}" dt="2026-05-06T16:45:03.129" v="39" actId="1076"/>
-          <ac:spMkLst>
-            <pc:docMk/>
-            <pc:sldMk cId="2852815459" sldId="256"/>
-            <ac:spMk id="219" creationId="{1B295DB6-3CF1-4FB8-84B0-5CD0188D8A23}"/>
-          </ac:spMkLst>
-        </pc:spChg>
-        <pc:spChg chg="mod">
-          <ac:chgData name="Alexis MARTIN" userId="ec32c3d9-5957-42d0-8757-996fd533d25b" providerId="ADAL" clId="{B76BE869-635B-4DC9-A437-AFDC8BC5A345}" dt="2026-05-06T16:45:03.129" v="39" actId="1076"/>
-          <ac:spMkLst>
-            <pc:docMk/>
-            <pc:sldMk cId="2852815459" sldId="256"/>
-            <ac:spMk id="220" creationId="{89DE7338-51F0-E915-23E2-01F472CE4DA8}"/>
-          </ac:spMkLst>
-        </pc:spChg>
-        <pc:spChg chg="add del mod">
-          <ac:chgData name="Alexis MARTIN" userId="ec32c3d9-5957-42d0-8757-996fd533d25b" providerId="ADAL" clId="{B76BE869-635B-4DC9-A437-AFDC8BC5A345}" dt="2026-05-06T16:45:04.026" v="40" actId="21"/>
-          <ac:spMkLst>
-            <pc:docMk/>
-            <pc:sldMk cId="2852815459" sldId="256"/>
-            <ac:spMk id="225" creationId="{0BF764AA-9B2A-481A-B1B1-E96CA4A36EC9}"/>
-          </ac:spMkLst>
-        </pc:spChg>
-        <pc:spChg chg="del">
-          <ac:chgData name="Alexis MARTIN" userId="ec32c3d9-5957-42d0-8757-996fd533d25b" providerId="ADAL" clId="{B76BE869-635B-4DC9-A437-AFDC8BC5A345}" dt="2026-05-06T16:45:04.026" v="40" actId="21"/>
-          <ac:spMkLst>
-            <pc:docMk/>
-            <pc:sldMk cId="2852815459" sldId="256"/>
-            <ac:spMk id="227" creationId="{289F237C-39D4-0871-6251-6D2C7C711642}"/>
-          </ac:spMkLst>
-        </pc:spChg>
-        <pc:spChg chg="add del mod">
-          <ac:chgData name="Alexis MARTIN" userId="ec32c3d9-5957-42d0-8757-996fd533d25b" providerId="ADAL" clId="{B76BE869-635B-4DC9-A437-AFDC8BC5A345}" dt="2026-05-06T16:45:04.026" v="40" actId="21"/>
-          <ac:spMkLst>
-            <pc:docMk/>
-            <pc:sldMk cId="2852815459" sldId="256"/>
-            <ac:spMk id="228" creationId="{FD7666C7-2745-211B-3994-C648209D5817}"/>
-          </ac:spMkLst>
-        </pc:spChg>
-        <pc:spChg chg="add del mod">
-          <ac:chgData name="Alexis MARTIN" userId="ec32c3d9-5957-42d0-8757-996fd533d25b" providerId="ADAL" clId="{B76BE869-635B-4DC9-A437-AFDC8BC5A345}" dt="2026-05-06T16:45:04.026" v="40" actId="21"/>
-          <ac:spMkLst>
-            <pc:docMk/>
-            <pc:sldMk cId="2852815459" sldId="256"/>
-            <ac:spMk id="229" creationId="{87109C51-B306-C398-B372-74EF37D9A6D8}"/>
-          </ac:spMkLst>
-        </pc:spChg>
-        <pc:spChg chg="add del mod">
-          <ac:chgData name="Alexis MARTIN" userId="ec32c3d9-5957-42d0-8757-996fd533d25b" providerId="ADAL" clId="{B76BE869-635B-4DC9-A437-AFDC8BC5A345}" dt="2026-05-06T16:45:04.026" v="40" actId="21"/>
-          <ac:spMkLst>
-            <pc:docMk/>
-            <pc:sldMk cId="2852815459" sldId="256"/>
-            <ac:spMk id="231" creationId="{4002D190-7C04-A263-8657-C79A00F57FDE}"/>
-          </ac:spMkLst>
-        </pc:spChg>
-        <pc:spChg chg="add del mod">
-          <ac:chgData name="Alexis MARTIN" userId="ec32c3d9-5957-42d0-8757-996fd533d25b" providerId="ADAL" clId="{B76BE869-635B-4DC9-A437-AFDC8BC5A345}" dt="2026-05-06T16:45:04.026" v="40" actId="21"/>
-          <ac:spMkLst>
-            <pc:docMk/>
-            <pc:sldMk cId="2852815459" sldId="256"/>
-            <ac:spMk id="233" creationId="{A4AB0D1C-4DA5-5E21-4C3D-D4F90452D456}"/>
-          </ac:spMkLst>
-        </pc:spChg>
-        <pc:spChg chg="add mod">
-          <ac:chgData name="Alexis MARTIN" userId="ec32c3d9-5957-42d0-8757-996fd533d25b" providerId="ADAL" clId="{B76BE869-635B-4DC9-A437-AFDC8BC5A345}" dt="2026-05-06T16:55:52.411" v="171" actId="1035"/>
-          <ac:spMkLst>
-            <pc:docMk/>
-            <pc:sldMk cId="2852815459" sldId="256"/>
-            <ac:spMk id="235" creationId="{3108FF70-38F3-161D-4C0C-725995F9F872}"/>
-          </ac:spMkLst>
-        </pc:spChg>
-        <pc:spChg chg="add mod">
-          <ac:chgData name="Alexis MARTIN" userId="ec32c3d9-5957-42d0-8757-996fd533d25b" providerId="ADAL" clId="{B76BE869-635B-4DC9-A437-AFDC8BC5A345}" dt="2026-05-06T16:56:51.491" v="187" actId="1076"/>
-          <ac:spMkLst>
-            <pc:docMk/>
-            <pc:sldMk cId="2852815459" sldId="256"/>
-            <ac:spMk id="236" creationId="{2C00D534-A28A-5A43-6713-0493BEBEEAAD}"/>
-          </ac:spMkLst>
-        </pc:spChg>
-        <pc:spChg chg="mod">
-          <ac:chgData name="Alexis MARTIN" userId="ec32c3d9-5957-42d0-8757-996fd533d25b" providerId="ADAL" clId="{B76BE869-635B-4DC9-A437-AFDC8BC5A345}" dt="2026-05-06T16:51:20.167" v="138" actId="14100"/>
-          <ac:spMkLst>
-            <pc:docMk/>
-            <pc:sldMk cId="2852815459" sldId="256"/>
-            <ac:spMk id="240" creationId="{EBC1B3FA-6F3C-C271-7A1A-45A925944524}"/>
-          </ac:spMkLst>
-        </pc:spChg>
-        <pc:spChg chg="mod">
-          <ac:chgData name="Alexis MARTIN" userId="ec32c3d9-5957-42d0-8757-996fd533d25b" providerId="ADAL" clId="{B76BE869-635B-4DC9-A437-AFDC8BC5A345}" dt="2026-05-06T16:51:20.167" v="138" actId="14100"/>
-          <ac:spMkLst>
-            <pc:docMk/>
-            <pc:sldMk cId="2852815459" sldId="256"/>
-            <ac:spMk id="241" creationId="{408B8D55-422B-F841-1845-F609EACC9402}"/>
-          </ac:spMkLst>
-        </pc:spChg>
-        <pc:spChg chg="mod">
-          <ac:chgData name="Alexis MARTIN" userId="ec32c3d9-5957-42d0-8757-996fd533d25b" providerId="ADAL" clId="{B76BE869-635B-4DC9-A437-AFDC8BC5A345}" dt="2026-05-06T16:47:52.792" v="80" actId="1076"/>
-          <ac:spMkLst>
-            <pc:docMk/>
-            <pc:sldMk cId="2852815459" sldId="256"/>
-            <ac:spMk id="243" creationId="{700FC624-3C90-F97A-C43B-34BAFB6B0124}"/>
-          </ac:spMkLst>
-        </pc:spChg>
-        <pc:spChg chg="mod">
-          <ac:chgData name="Alexis MARTIN" userId="ec32c3d9-5957-42d0-8757-996fd533d25b" providerId="ADAL" clId="{B76BE869-635B-4DC9-A437-AFDC8BC5A345}" dt="2026-05-06T16:47:57.574" v="81" actId="14100"/>
-          <ac:spMkLst>
-            <pc:docMk/>
-            <pc:sldMk cId="2852815459" sldId="256"/>
-            <ac:spMk id="244" creationId="{594AC16C-1F74-BF81-F1B8-02A4D5C0C680}"/>
-          </ac:spMkLst>
-        </pc:spChg>
-        <pc:spChg chg="add mod">
-          <ac:chgData name="Alexis MARTIN" userId="ec32c3d9-5957-42d0-8757-996fd533d25b" providerId="ADAL" clId="{B76BE869-635B-4DC9-A437-AFDC8BC5A345}" dt="2026-05-06T16:47:31.752" v="77" actId="1076"/>
-          <ac:spMkLst>
-            <pc:docMk/>
-            <pc:sldMk cId="2852815459" sldId="256"/>
-            <ac:spMk id="246" creationId="{EA916ABB-D2A1-7216-0422-313F6BDC9AE8}"/>
-          </ac:spMkLst>
-        </pc:spChg>
-        <pc:spChg chg="add mod">
-          <ac:chgData name="Alexis MARTIN" userId="ec32c3d9-5957-42d0-8757-996fd533d25b" providerId="ADAL" clId="{B76BE869-635B-4DC9-A437-AFDC8BC5A345}" dt="2026-05-06T16:51:22.967" v="139" actId="1076"/>
-          <ac:spMkLst>
-            <pc:docMk/>
-            <pc:sldMk cId="2852815459" sldId="256"/>
-            <ac:spMk id="247" creationId="{AB08929E-E3F3-955C-F41F-29906838DE8E}"/>
-          </ac:spMkLst>
-        </pc:spChg>
-        <pc:spChg chg="mod">
-          <ac:chgData name="Alexis MARTIN" userId="ec32c3d9-5957-42d0-8757-996fd533d25b" providerId="ADAL" clId="{B76BE869-635B-4DC9-A437-AFDC8BC5A345}" dt="2026-05-06T16:49:41.138" v="112" actId="255"/>
-          <ac:spMkLst>
-            <pc:docMk/>
-            <pc:sldMk cId="2852815459" sldId="256"/>
-            <ac:spMk id="248" creationId="{3BCDA85A-82AA-6F1B-2804-0655BCF511B1}"/>
-          </ac:spMkLst>
-        </pc:spChg>
-        <pc:spChg chg="add mod">
-          <ac:chgData name="Alexis MARTIN" userId="ec32c3d9-5957-42d0-8757-996fd533d25b" providerId="ADAL" clId="{B76BE869-635B-4DC9-A437-AFDC8BC5A345}" dt="2026-05-06T16:54:43.245" v="159" actId="1036"/>
-          <ac:spMkLst>
-            <pc:docMk/>
-            <pc:sldMk cId="2852815459" sldId="256"/>
-            <ac:spMk id="249" creationId="{0054BF5C-A2D5-0061-105E-75DAD0A74ECA}"/>
-          </ac:spMkLst>
-        </pc:spChg>
-        <pc:spChg chg="add del mod">
-          <ac:chgData name="Alexis MARTIN" userId="ec32c3d9-5957-42d0-8757-996fd533d25b" providerId="ADAL" clId="{B76BE869-635B-4DC9-A437-AFDC8BC5A345}" dt="2026-05-06T16:49:36.612" v="111" actId="478"/>
-          <ac:spMkLst>
-            <pc:docMk/>
-            <pc:sldMk cId="2852815459" sldId="256"/>
-            <ac:spMk id="250" creationId="{AD583DEA-A0F2-724B-135E-ED9E5136B70E}"/>
-          </ac:spMkLst>
-        </pc:spChg>
-        <pc:spChg chg="mod">
-          <ac:chgData name="Alexis MARTIN" userId="ec32c3d9-5957-42d0-8757-996fd533d25b" providerId="ADAL" clId="{B76BE869-635B-4DC9-A437-AFDC8BC5A345}" dt="2026-05-06T16:49:19.344" v="109" actId="1035"/>
-          <ac:spMkLst>
-            <pc:docMk/>
-            <pc:sldMk cId="2852815459" sldId="256"/>
-            <ac:spMk id="251" creationId="{C8A650DD-8E0C-1E4B-1CAB-F306BF91FE8D}"/>
-          </ac:spMkLst>
-        </pc:spChg>
-        <pc:spChg chg="mod">
-          <ac:chgData name="Alexis MARTIN" userId="ec32c3d9-5957-42d0-8757-996fd533d25b" providerId="ADAL" clId="{B76BE869-635B-4DC9-A437-AFDC8BC5A345}" dt="2026-05-06T16:50:09.713" v="119" actId="1037"/>
-          <ac:spMkLst>
-            <pc:docMk/>
-            <pc:sldMk cId="2852815459" sldId="256"/>
-            <ac:spMk id="252" creationId="{A2F8F108-F2D9-369E-42E0-A410255784D5}"/>
-          </ac:spMkLst>
-        </pc:spChg>
-        <pc:spChg chg="add mod">
-          <ac:chgData name="Alexis MARTIN" userId="ec32c3d9-5957-42d0-8757-996fd533d25b" providerId="ADAL" clId="{B76BE869-635B-4DC9-A437-AFDC8BC5A345}" dt="2026-05-06T16:47:31.752" v="77" actId="1076"/>
-          <ac:spMkLst>
-            <pc:docMk/>
-            <pc:sldMk cId="2852815459" sldId="256"/>
-            <ac:spMk id="253" creationId="{1700DE18-CDE7-F8A3-62F9-0AF7B606FE4C}"/>
-          </ac:spMkLst>
-        </pc:spChg>
-        <pc:spChg chg="add del mod">
-          <ac:chgData name="Alexis MARTIN" userId="ec32c3d9-5957-42d0-8757-996fd533d25b" providerId="ADAL" clId="{B76BE869-635B-4DC9-A437-AFDC8BC5A345}" dt="2026-05-06T16:47:45.251" v="79" actId="478"/>
-          <ac:spMkLst>
-            <pc:docMk/>
-            <pc:sldMk cId="2852815459" sldId="256"/>
-            <ac:spMk id="254" creationId="{66090633-28C5-688E-63F6-43893CAD6E37}"/>
-          </ac:spMkLst>
-        </pc:spChg>
-        <pc:spChg chg="mod">
-          <ac:chgData name="Alexis MARTIN" userId="ec32c3d9-5957-42d0-8757-996fd533d25b" providerId="ADAL" clId="{B76BE869-635B-4DC9-A437-AFDC8BC5A345}" dt="2026-05-06T16:50:45.821" v="135" actId="207"/>
-          <ac:spMkLst>
-            <pc:docMk/>
-            <pc:sldMk cId="2852815459" sldId="256"/>
-            <ac:spMk id="261" creationId="{7C4F5A29-C7A2-7AB8-D8C5-423EBBBCC4C7}"/>
-          </ac:spMkLst>
-        </pc:spChg>
-        <pc:spChg chg="del">
-          <ac:chgData name="Alexis MARTIN" userId="ec32c3d9-5957-42d0-8757-996fd533d25b" providerId="ADAL" clId="{B76BE869-635B-4DC9-A437-AFDC8BC5A345}" dt="2026-05-06T16:49:56.538" v="114" actId="478"/>
-          <ac:spMkLst>
-            <pc:docMk/>
-            <pc:sldMk cId="2852815459" sldId="256"/>
-            <ac:spMk id="262" creationId="{D4B860A2-3FD9-ACC3-F80B-2782BFB8F288}"/>
-          </ac:spMkLst>
-        </pc:spChg>
-        <pc:spChg chg="mod">
-          <ac:chgData name="Alexis MARTIN" userId="ec32c3d9-5957-42d0-8757-996fd533d25b" providerId="ADAL" clId="{B76BE869-635B-4DC9-A437-AFDC8BC5A345}" dt="2026-05-06T16:54:45.641" v="163" actId="1036"/>
-          <ac:spMkLst>
-            <pc:docMk/>
-            <pc:sldMk cId="2852815459" sldId="256"/>
-            <ac:spMk id="263" creationId="{9B37AC98-F082-1EB7-E3E9-685511DB730C}"/>
-          </ac:spMkLst>
-        </pc:spChg>
-        <pc:spChg chg="del">
-          <ac:chgData name="Alexis MARTIN" userId="ec32c3d9-5957-42d0-8757-996fd533d25b" providerId="ADAL" clId="{B76BE869-635B-4DC9-A437-AFDC8BC5A345}" dt="2026-05-06T16:49:56.538" v="114" actId="478"/>
-          <ac:spMkLst>
-            <pc:docMk/>
-            <pc:sldMk cId="2852815459" sldId="256"/>
-            <ac:spMk id="264" creationId="{AF16F8CF-9496-5AA1-88AA-7E58BFCE788B}"/>
-          </ac:spMkLst>
-        </pc:spChg>
-        <pc:spChg chg="add mod">
-          <ac:chgData name="Alexis MARTIN" userId="ec32c3d9-5957-42d0-8757-996fd533d25b" providerId="ADAL" clId="{B76BE869-635B-4DC9-A437-AFDC8BC5A345}" dt="2026-05-06T16:49:13.121" v="100" actId="1035"/>
-          <ac:spMkLst>
-            <pc:docMk/>
-            <pc:sldMk cId="2852815459" sldId="256"/>
-            <ac:spMk id="265" creationId="{24F522E3-1196-B816-42AE-ADB5E45BFADE}"/>
-          </ac:spMkLst>
-        </pc:spChg>
-        <pc:spChg chg="mod">
-          <ac:chgData name="Alexis MARTIN" userId="ec32c3d9-5957-42d0-8757-996fd533d25b" providerId="ADAL" clId="{B76BE869-635B-4DC9-A437-AFDC8BC5A345}" dt="2026-05-06T16:50:09.713" v="119" actId="1037"/>
-          <ac:spMkLst>
-            <pc:docMk/>
-            <pc:sldMk cId="2852815459" sldId="256"/>
-            <ac:spMk id="266" creationId="{16A90199-4F79-E030-57CD-7B7BBA838AFA}"/>
-          </ac:spMkLst>
-        </pc:spChg>
-        <pc:spChg chg="add mod">
-          <ac:chgData name="Alexis MARTIN" userId="ec32c3d9-5957-42d0-8757-996fd533d25b" providerId="ADAL" clId="{B76BE869-635B-4DC9-A437-AFDC8BC5A345}" dt="2026-05-06T16:47:31.752" v="77" actId="1076"/>
-          <ac:spMkLst>
-            <pc:docMk/>
-            <pc:sldMk cId="2852815459" sldId="256"/>
-            <ac:spMk id="269" creationId="{31CE9676-FE3D-DB01-2B31-79F0424EDDA5}"/>
-          </ac:spMkLst>
-        </pc:spChg>
-        <pc:spChg chg="add mod">
-          <ac:chgData name="Alexis MARTIN" userId="ec32c3d9-5957-42d0-8757-996fd533d25b" providerId="ADAL" clId="{B76BE869-635B-4DC9-A437-AFDC8BC5A345}" dt="2026-05-06T16:47:31.752" v="77" actId="1076"/>
-          <ac:spMkLst>
-            <pc:docMk/>
-            <pc:sldMk cId="2852815459" sldId="256"/>
-            <ac:spMk id="270" creationId="{DC6E9BBF-C09F-1C4F-C83B-B808B2E27CB9}"/>
-          </ac:spMkLst>
-        </pc:spChg>
-        <pc:spChg chg="mod">
-          <ac:chgData name="Alexis MARTIN" userId="ec32c3d9-5957-42d0-8757-996fd533d25b" providerId="ADAL" clId="{B76BE869-635B-4DC9-A437-AFDC8BC5A345}" dt="2026-05-06T16:50:18.915" v="131" actId="1038"/>
-          <ac:spMkLst>
-            <pc:docMk/>
-            <pc:sldMk cId="2852815459" sldId="256"/>
-            <ac:spMk id="273" creationId="{A8032D76-A7F6-83A1-6769-AF88F4D0568D}"/>
-          </ac:spMkLst>
-        </pc:spChg>
-        <pc:spChg chg="mod">
-          <ac:chgData name="Alexis MARTIN" userId="ec32c3d9-5957-42d0-8757-996fd533d25b" providerId="ADAL" clId="{B76BE869-635B-4DC9-A437-AFDC8BC5A345}" dt="2026-05-06T16:50:18.915" v="131" actId="1038"/>
-          <ac:spMkLst>
-            <pc:docMk/>
-            <pc:sldMk cId="2852815459" sldId="256"/>
-            <ac:spMk id="274" creationId="{44E49F2B-8EC3-C173-A2D7-62E8379718C7}"/>
-          </ac:spMkLst>
-        </pc:spChg>
-        <pc:spChg chg="add mod">
-          <ac:chgData name="Alexis MARTIN" userId="ec32c3d9-5957-42d0-8757-996fd533d25b" providerId="ADAL" clId="{B76BE869-635B-4DC9-A437-AFDC8BC5A345}" dt="2026-05-06T16:48:31.684" v="89" actId="571"/>
-          <ac:spMkLst>
-            <pc:docMk/>
-            <pc:sldMk cId="2852815459" sldId="256"/>
-            <ac:spMk id="275" creationId="{8D5BED42-387E-3441-C89E-3742055D0234}"/>
-          </ac:spMkLst>
-        </pc:spChg>
-        <pc:spChg chg="mod">
-          <ac:chgData name="Alexis MARTIN" userId="ec32c3d9-5957-42d0-8757-996fd533d25b" providerId="ADAL" clId="{B76BE869-635B-4DC9-A437-AFDC8BC5A345}" dt="2026-05-06T16:48:31.684" v="89" actId="571"/>
-          <ac:spMkLst>
-            <pc:docMk/>
-            <pc:sldMk cId="2852815459" sldId="256"/>
-            <ac:spMk id="277" creationId="{E55A59B1-F0A2-8C2A-3370-BC6CE049EA62}"/>
-          </ac:spMkLst>
-        </pc:spChg>
-        <pc:spChg chg="mod">
-          <ac:chgData name="Alexis MARTIN" userId="ec32c3d9-5957-42d0-8757-996fd533d25b" providerId="ADAL" clId="{B76BE869-635B-4DC9-A437-AFDC8BC5A345}" dt="2026-05-06T16:48:31.684" v="89" actId="571"/>
-          <ac:spMkLst>
-            <pc:docMk/>
-            <pc:sldMk cId="2852815459" sldId="256"/>
-            <ac:spMk id="278" creationId="{99C6F13D-2C98-EDFD-E505-36E82BAF48AA}"/>
-          </ac:spMkLst>
-        </pc:spChg>
-        <pc:spChg chg="add mod">
-          <ac:chgData name="Alexis MARTIN" userId="ec32c3d9-5957-42d0-8757-996fd533d25b" providerId="ADAL" clId="{B76BE869-635B-4DC9-A437-AFDC8BC5A345}" dt="2026-05-06T16:49:59.830" v="115" actId="1076"/>
-          <ac:spMkLst>
-            <pc:docMk/>
-            <pc:sldMk cId="2852815459" sldId="256"/>
-            <ac:spMk id="279" creationId="{7826E3F2-6950-44DC-B4F4-BFEDFDA8FD28}"/>
-          </ac:spMkLst>
-        </pc:spChg>
-        <pc:spChg chg="add mod">
-          <ac:chgData name="Alexis MARTIN" userId="ec32c3d9-5957-42d0-8757-996fd533d25b" providerId="ADAL" clId="{B76BE869-635B-4DC9-A437-AFDC8BC5A345}" dt="2026-05-06T16:54:35.679" v="156" actId="1035"/>
-          <ac:spMkLst>
-            <pc:docMk/>
-            <pc:sldMk cId="2852815459" sldId="256"/>
-            <ac:spMk id="280" creationId="{0092C05E-6D1C-BE3C-BA4E-58E4A3E6B551}"/>
-          </ac:spMkLst>
-        </pc:spChg>
-        <pc:spChg chg="add mod">
-          <ac:chgData name="Alexis MARTIN" userId="ec32c3d9-5957-42d0-8757-996fd533d25b" providerId="ADAL" clId="{B76BE869-635B-4DC9-A437-AFDC8BC5A345}" dt="2026-05-06T16:54:19.536" v="144" actId="1076"/>
-          <ac:spMkLst>
-            <pc:docMk/>
-            <pc:sldMk cId="2852815459" sldId="256"/>
-            <ac:spMk id="281" creationId="{D74E72E5-875C-3B07-14C2-9203B3F07FC6}"/>
-          </ac:spMkLst>
-        </pc:spChg>
-        <pc:spChg chg="add mod">
-          <ac:chgData name="Alexis MARTIN" userId="ec32c3d9-5957-42d0-8757-996fd533d25b" providerId="ADAL" clId="{B76BE869-635B-4DC9-A437-AFDC8BC5A345}" dt="2026-05-06T16:54:32.006" v="151" actId="1035"/>
-          <ac:spMkLst>
-            <pc:docMk/>
-            <pc:sldMk cId="2852815459" sldId="256"/>
-            <ac:spMk id="282" creationId="{9AFF5BB9-36BA-496A-862E-66C67B7667BF}"/>
-          </ac:spMkLst>
-        </pc:spChg>
-        <pc:spChg chg="add mod">
-          <ac:chgData name="Alexis MARTIN" userId="ec32c3d9-5957-42d0-8757-996fd533d25b" providerId="ADAL" clId="{B76BE869-635B-4DC9-A437-AFDC8BC5A345}" dt="2026-05-06T16:54:26.101" v="146" actId="1076"/>
-          <ac:spMkLst>
-            <pc:docMk/>
-            <pc:sldMk cId="2852815459" sldId="256"/>
-            <ac:spMk id="283" creationId="{D1BFFF10-663F-9FA0-5961-F3855C7DEE45}"/>
-          </ac:spMkLst>
-        </pc:spChg>
-        <pc:grpChg chg="mod">
-          <ac:chgData name="Alexis MARTIN" userId="ec32c3d9-5957-42d0-8757-996fd533d25b" providerId="ADAL" clId="{B76BE869-635B-4DC9-A437-AFDC8BC5A345}" dt="2026-05-06T16:56:19.260" v="175" actId="14100"/>
-          <ac:grpSpMkLst>
-            <pc:docMk/>
-            <pc:sldMk cId="2852815459" sldId="256"/>
-            <ac:grpSpMk id="5" creationId="{2F8C378B-AE99-3101-14A1-3EBEF41AC630}"/>
-          </ac:grpSpMkLst>
-        </pc:grpChg>
-        <pc:grpChg chg="del">
-          <ac:chgData name="Alexis MARTIN" userId="ec32c3d9-5957-42d0-8757-996fd533d25b" providerId="ADAL" clId="{B76BE869-635B-4DC9-A437-AFDC8BC5A345}" dt="2026-05-06T16:45:14.442" v="43" actId="478"/>
-          <ac:grpSpMkLst>
-            <pc:docMk/>
-            <pc:sldMk cId="2852815459" sldId="256"/>
-            <ac:grpSpMk id="19" creationId="{D1CD3C43-B20F-1B2B-39DA-BF4277366642}"/>
-          </ac:grpSpMkLst>
-        </pc:grpChg>
-        <pc:grpChg chg="del">
-          <ac:chgData name="Alexis MARTIN" userId="ec32c3d9-5957-42d0-8757-996fd533d25b" providerId="ADAL" clId="{B76BE869-635B-4DC9-A437-AFDC8BC5A345}" dt="2026-05-06T16:45:14.442" v="43" actId="478"/>
-          <ac:grpSpMkLst>
-            <pc:docMk/>
-            <pc:sldMk cId="2852815459" sldId="256"/>
-            <ac:grpSpMk id="71" creationId="{4063938A-1539-A00D-CB5A-922FB9DEE681}"/>
-          </ac:grpSpMkLst>
-        </pc:grpChg>
-        <pc:grpChg chg="del">
-          <ac:chgData name="Alexis MARTIN" userId="ec32c3d9-5957-42d0-8757-996fd533d25b" providerId="ADAL" clId="{B76BE869-635B-4DC9-A437-AFDC8BC5A345}" dt="2026-05-06T16:43:08.678" v="12" actId="478"/>
-          <ac:grpSpMkLst>
-            <pc:docMk/>
-            <pc:sldMk cId="2852815459" sldId="256"/>
-            <ac:grpSpMk id="175" creationId="{3A511174-92D7-3A6B-B820-2C940AE09D8B}"/>
-          </ac:grpSpMkLst>
-        </pc:grpChg>
-        <pc:grpChg chg="del">
-          <ac:chgData name="Alexis MARTIN" userId="ec32c3d9-5957-42d0-8757-996fd533d25b" providerId="ADAL" clId="{B76BE869-635B-4DC9-A437-AFDC8BC5A345}" dt="2026-05-06T16:43:06.278" v="11" actId="478"/>
-          <ac:grpSpMkLst>
-            <pc:docMk/>
-            <pc:sldMk cId="2852815459" sldId="256"/>
-            <ac:grpSpMk id="178" creationId="{8D4449F0-ED5B-9F9D-1556-B9AEB03F942F}"/>
-          </ac:grpSpMkLst>
-        </pc:grpChg>
-        <pc:grpChg chg="mod">
-          <ac:chgData name="Alexis MARTIN" userId="ec32c3d9-5957-42d0-8757-996fd533d25b" providerId="ADAL" clId="{B76BE869-635B-4DC9-A437-AFDC8BC5A345}" dt="2026-05-06T16:51:20.167" v="138" actId="14100"/>
-          <ac:grpSpMkLst>
-            <pc:docMk/>
-            <pc:sldMk cId="2852815459" sldId="256"/>
-            <ac:grpSpMk id="239" creationId="{A1533C08-A6ED-C204-E964-AA080F347B20}"/>
-          </ac:grpSpMkLst>
-        </pc:grpChg>
-        <pc:grpChg chg="mod">
-          <ac:chgData name="Alexis MARTIN" userId="ec32c3d9-5957-42d0-8757-996fd533d25b" providerId="ADAL" clId="{B76BE869-635B-4DC9-A437-AFDC8BC5A345}" dt="2026-05-06T16:47:52.792" v="80" actId="1076"/>
-          <ac:grpSpMkLst>
-            <pc:docMk/>
-            <pc:sldMk cId="2852815459" sldId="256"/>
-            <ac:grpSpMk id="242" creationId="{EC2F1958-BA4C-7EA7-CBA7-C487C3DFB743}"/>
-          </ac:grpSpMkLst>
-        </pc:grpChg>
-        <pc:grpChg chg="del">
-          <ac:chgData name="Alexis MARTIN" userId="ec32c3d9-5957-42d0-8757-996fd533d25b" providerId="ADAL" clId="{B76BE869-635B-4DC9-A437-AFDC8BC5A345}" dt="2026-05-06T16:48:10.288" v="83" actId="478"/>
-          <ac:grpSpMkLst>
-            <pc:docMk/>
-            <pc:sldMk cId="2852815459" sldId="256"/>
-            <ac:grpSpMk id="258" creationId="{A1D6B92A-2BAD-03F0-1145-F5FD4C648C84}"/>
-          </ac:grpSpMkLst>
-        </pc:grpChg>
-        <pc:grpChg chg="add mod">
-          <ac:chgData name="Alexis MARTIN" userId="ec32c3d9-5957-42d0-8757-996fd533d25b" providerId="ADAL" clId="{B76BE869-635B-4DC9-A437-AFDC8BC5A345}" dt="2026-05-06T16:50:18.915" v="131" actId="1038"/>
-          <ac:grpSpMkLst>
-            <pc:docMk/>
-            <pc:sldMk cId="2852815459" sldId="256"/>
-            <ac:grpSpMk id="272" creationId="{12FE6F76-270E-2E55-9708-005C6EB1F9E5}"/>
-          </ac:grpSpMkLst>
-        </pc:grpChg>
-        <pc:grpChg chg="add mod">
-          <ac:chgData name="Alexis MARTIN" userId="ec32c3d9-5957-42d0-8757-996fd533d25b" providerId="ADAL" clId="{B76BE869-635B-4DC9-A437-AFDC8BC5A345}" dt="2026-05-06T16:48:31.684" v="89" actId="571"/>
-          <ac:grpSpMkLst>
-            <pc:docMk/>
-            <pc:sldMk cId="2852815459" sldId="256"/>
-            <ac:grpSpMk id="276" creationId="{12189378-DA2C-B8A5-26B5-A3BE3771952A}"/>
-          </ac:grpSpMkLst>
-        </pc:grpChg>
-        <pc:graphicFrameChg chg="add del mod replId">
-          <ac:chgData name="Alexis MARTIN" userId="ec32c3d9-5957-42d0-8757-996fd533d25b" providerId="ADAL" clId="{B76BE869-635B-4DC9-A437-AFDC8BC5A345}" dt="2026-05-06T16:46:54.179" v="63"/>
-          <ac:graphicFrameMkLst>
-            <pc:docMk/>
-            <pc:sldMk cId="2852815459" sldId="256"/>
-            <ac:graphicFrameMk id="237" creationId="{2C00D534-A28A-5A43-6713-0493BEBEEAAD}"/>
-          </ac:graphicFrameMkLst>
-        </pc:graphicFrameChg>
-        <pc:graphicFrameChg chg="del mod replId">
-          <ac:chgData name="Alexis MARTIN" userId="ec32c3d9-5957-42d0-8757-996fd533d25b" providerId="ADAL" clId="{B76BE869-635B-4DC9-A437-AFDC8BC5A345}" dt="2026-05-06T16:56:56.695" v="189"/>
-          <ac:graphicFrameMkLst>
-            <pc:docMk/>
-            <pc:sldMk cId="2852815459" sldId="256"/>
-            <ac:graphicFrameMk id="284" creationId="{1AAA4467-DAEA-DDA9-2B4D-4975F423F538}"/>
-          </ac:graphicFrameMkLst>
-        </pc:graphicFrameChg>
-      </pc:sldChg>
       <pc:sldChg chg="addSp delSp modSp new mod">
-        <pc:chgData name="Alexis MARTIN" userId="ec32c3d9-5957-42d0-8757-996fd533d25b" providerId="ADAL" clId="{B76BE869-635B-4DC9-A437-AFDC8BC5A345}" dt="2026-05-06T16:45:04.859" v="41"/>
+        <pc:chgData name="Alexis MARTIN" userId="ec32c3d9-5957-42d0-8757-996fd533d25b" providerId="ADAL" clId="{B76BE869-635B-4DC9-A437-AFDC8BC5A345}" dt="2026-06-22T13:20:29.068" v="268" actId="1076"/>
         <pc:sldMkLst>
           <pc:docMk/>
           <pc:sldMk cId="77626767" sldId="257"/>
         </pc:sldMkLst>
-        <pc:spChg chg="del">
-          <ac:chgData name="Alexis MARTIN" userId="ec32c3d9-5957-42d0-8757-996fd533d25b" providerId="ADAL" clId="{B76BE869-635B-4DC9-A437-AFDC8BC5A345}" dt="2026-05-06T16:44:56.145" v="37" actId="478"/>
+        <pc:spChg chg="add del mod">
+          <ac:chgData name="Alexis MARTIN" userId="ec32c3d9-5957-42d0-8757-996fd533d25b" providerId="ADAL" clId="{B76BE869-635B-4DC9-A437-AFDC8BC5A345}" dt="2026-06-22T13:20:05.069" v="258" actId="478"/>
           <ac:spMkLst>
             <pc:docMk/>
             <pc:sldMk cId="77626767" sldId="257"/>
-            <ac:spMk id="2" creationId="{B128078B-416D-624F-C396-53E5DA18A12A}"/>
+            <ac:spMk id="2" creationId="{7F682B42-671E-7BC0-4010-B4CAC15D2608}"/>
           </ac:spMkLst>
         </pc:spChg>
-        <pc:spChg chg="del">
-          <ac:chgData name="Alexis MARTIN" userId="ec32c3d9-5957-42d0-8757-996fd533d25b" providerId="ADAL" clId="{B76BE869-635B-4DC9-A437-AFDC8BC5A345}" dt="2026-05-06T16:44:56.145" v="37" actId="478"/>
+        <pc:spChg chg="add del mod">
+          <ac:chgData name="Alexis MARTIN" userId="ec32c3d9-5957-42d0-8757-996fd533d25b" providerId="ADAL" clId="{B76BE869-635B-4DC9-A437-AFDC8BC5A345}" dt="2026-06-22T13:20:05.069" v="258" actId="478"/>
           <ac:spMkLst>
             <pc:docMk/>
             <pc:sldMk cId="77626767" sldId="257"/>
-            <ac:spMk id="3" creationId="{ABE1322F-3311-2A99-7649-E235A582481E}"/>
+            <ac:spMk id="3" creationId="{35D6195D-1596-F49B-4801-6C5AC78B2307}"/>
+          </ac:spMkLst>
+        </pc:spChg>
+        <pc:spChg chg="add del mod">
+          <ac:chgData name="Alexis MARTIN" userId="ec32c3d9-5957-42d0-8757-996fd533d25b" providerId="ADAL" clId="{B76BE869-635B-4DC9-A437-AFDC8BC5A345}" dt="2026-06-22T13:20:05.069" v="258" actId="478"/>
+          <ac:spMkLst>
+            <pc:docMk/>
+            <pc:sldMk cId="77626767" sldId="257"/>
+            <ac:spMk id="4" creationId="{8689C375-B1F7-7396-9334-1B7FB17D327A}"/>
+          </ac:spMkLst>
+        </pc:spChg>
+        <pc:spChg chg="add del mod">
+          <ac:chgData name="Alexis MARTIN" userId="ec32c3d9-5957-42d0-8757-996fd533d25b" providerId="ADAL" clId="{B76BE869-635B-4DC9-A437-AFDC8BC5A345}" dt="2026-06-22T13:20:06.841" v="259" actId="478"/>
+          <ac:spMkLst>
+            <pc:docMk/>
+            <pc:sldMk cId="77626767" sldId="257"/>
+            <ac:spMk id="5" creationId="{377B4DB8-16C0-1C11-9704-A97D3C8FD5E2}"/>
+          </ac:spMkLst>
+        </pc:spChg>
+        <pc:spChg chg="mod">
+          <ac:chgData name="Alexis MARTIN" userId="ec32c3d9-5957-42d0-8757-996fd533d25b" providerId="ADAL" clId="{B76BE869-635B-4DC9-A437-AFDC8BC5A345}" dt="2026-06-22T13:15:08.493" v="220"/>
+          <ac:spMkLst>
+            <pc:docMk/>
+            <pc:sldMk cId="77626767" sldId="257"/>
+            <ac:spMk id="10" creationId="{97159B68-C540-DC8B-4557-8857886EEC1A}"/>
           </ac:spMkLst>
         </pc:spChg>
         <pc:spChg chg="add mod">
-          <ac:chgData name="Alexis MARTIN" userId="ec32c3d9-5957-42d0-8757-996fd533d25b" providerId="ADAL" clId="{B76BE869-635B-4DC9-A437-AFDC8BC5A345}" dt="2026-05-06T16:45:04.859" v="41"/>
+          <ac:chgData name="Alexis MARTIN" userId="ec32c3d9-5957-42d0-8757-996fd533d25b" providerId="ADAL" clId="{B76BE869-635B-4DC9-A437-AFDC8BC5A345}" dt="2026-06-22T13:16:52.377" v="221" actId="14100"/>
           <ac:spMkLst>
             <pc:docMk/>
             <pc:sldMk cId="77626767" sldId="257"/>
-            <ac:spMk id="209" creationId="{2F104041-3CF3-2C77-33CE-20579DACF7FB}"/>
+            <ac:spMk id="13" creationId="{9605BBC9-A3DB-87DE-9DEB-1B157369F146}"/>
+          </ac:spMkLst>
+        </pc:spChg>
+        <pc:spChg chg="mod">
+          <ac:chgData name="Alexis MARTIN" userId="ec32c3d9-5957-42d0-8757-996fd533d25b" providerId="ADAL" clId="{B76BE869-635B-4DC9-A437-AFDC8BC5A345}" dt="2026-06-22T13:15:08.493" v="220"/>
+          <ac:spMkLst>
+            <pc:docMk/>
+            <pc:sldMk cId="77626767" sldId="257"/>
+            <ac:spMk id="19" creationId="{9B8B0557-1A2B-DD84-13FE-6A63E6082020}"/>
+          </ac:spMkLst>
+        </pc:spChg>
+        <pc:spChg chg="mod">
+          <ac:chgData name="Alexis MARTIN" userId="ec32c3d9-5957-42d0-8757-996fd533d25b" providerId="ADAL" clId="{B76BE869-635B-4DC9-A437-AFDC8BC5A345}" dt="2026-06-22T13:15:08.493" v="220"/>
+          <ac:spMkLst>
+            <pc:docMk/>
+            <pc:sldMk cId="77626767" sldId="257"/>
+            <ac:spMk id="21" creationId="{56C07240-FDF0-93D9-075B-09D9BB9AC3BD}"/>
           </ac:spMkLst>
         </pc:spChg>
         <pc:spChg chg="add mod">
-          <ac:chgData name="Alexis MARTIN" userId="ec32c3d9-5957-42d0-8757-996fd533d25b" providerId="ADAL" clId="{B76BE869-635B-4DC9-A437-AFDC8BC5A345}" dt="2026-05-06T16:45:04.859" v="41"/>
+          <ac:chgData name="Alexis MARTIN" userId="ec32c3d9-5957-42d0-8757-996fd533d25b" providerId="ADAL" clId="{B76BE869-635B-4DC9-A437-AFDC8BC5A345}" dt="2026-06-22T13:15:08.493" v="220"/>
           <ac:spMkLst>
             <pc:docMk/>
             <pc:sldMk cId="77626767" sldId="257"/>
-            <ac:spMk id="212" creationId="{A72BA46F-110B-9BDD-E67A-7CECB53B1802}"/>
+            <ac:spMk id="24" creationId="{50F61ECC-282D-CA70-86D8-54475279AFD4}"/>
+          </ac:spMkLst>
+        </pc:spChg>
+        <pc:spChg chg="mod">
+          <ac:chgData name="Alexis MARTIN" userId="ec32c3d9-5957-42d0-8757-996fd533d25b" providerId="ADAL" clId="{B76BE869-635B-4DC9-A437-AFDC8BC5A345}" dt="2026-06-22T13:18:36.407" v="246" actId="14100"/>
+          <ac:spMkLst>
+            <pc:docMk/>
+            <pc:sldMk cId="77626767" sldId="257"/>
+            <ac:spMk id="27" creationId="{354EF437-228A-B5E9-9C32-BC36BA8BB1C4}"/>
+          </ac:spMkLst>
+        </pc:spChg>
+        <pc:spChg chg="mod">
+          <ac:chgData name="Alexis MARTIN" userId="ec32c3d9-5957-42d0-8757-996fd533d25b" providerId="ADAL" clId="{B76BE869-635B-4DC9-A437-AFDC8BC5A345}" dt="2026-06-22T13:18:17.698" v="239" actId="14100"/>
+          <ac:spMkLst>
+            <pc:docMk/>
+            <pc:sldMk cId="77626767" sldId="257"/>
+            <ac:spMk id="28" creationId="{009B7E43-C06C-182B-A54C-716796492854}"/>
           </ac:spMkLst>
         </pc:spChg>
         <pc:spChg chg="add mod">
-          <ac:chgData name="Alexis MARTIN" userId="ec32c3d9-5957-42d0-8757-996fd533d25b" providerId="ADAL" clId="{B76BE869-635B-4DC9-A437-AFDC8BC5A345}" dt="2026-05-06T16:45:04.859" v="41"/>
+          <ac:chgData name="Alexis MARTIN" userId="ec32c3d9-5957-42d0-8757-996fd533d25b" providerId="ADAL" clId="{B76BE869-635B-4DC9-A437-AFDC8BC5A345}" dt="2026-06-22T13:15:08.493" v="220"/>
           <ac:spMkLst>
             <pc:docMk/>
             <pc:sldMk cId="77626767" sldId="257"/>
-            <ac:spMk id="215" creationId="{100B32AC-EA90-8192-2648-16EC1DB088FB}"/>
+            <ac:spMk id="31" creationId="{F06AC753-A3FB-6F7A-527B-B18C20E8E65C}"/>
+          </ac:spMkLst>
+        </pc:spChg>
+        <pc:spChg chg="mod">
+          <ac:chgData name="Alexis MARTIN" userId="ec32c3d9-5957-42d0-8757-996fd533d25b" providerId="ADAL" clId="{B76BE869-635B-4DC9-A437-AFDC8BC5A345}" dt="2026-06-22T13:17:45.663" v="229" actId="14100"/>
+          <ac:spMkLst>
+            <pc:docMk/>
+            <pc:sldMk cId="77626767" sldId="257"/>
+            <ac:spMk id="32" creationId="{842E0D5C-75E4-6D86-B879-6B22B58EFD25}"/>
           </ac:spMkLst>
         </pc:spChg>
         <pc:spChg chg="add mod">
-          <ac:chgData name="Alexis MARTIN" userId="ec32c3d9-5957-42d0-8757-996fd533d25b" providerId="ADAL" clId="{B76BE869-635B-4DC9-A437-AFDC8BC5A345}" dt="2026-05-06T16:45:04.859" v="41"/>
+          <ac:chgData name="Alexis MARTIN" userId="ec32c3d9-5957-42d0-8757-996fd533d25b" providerId="ADAL" clId="{B76BE869-635B-4DC9-A437-AFDC8BC5A345}" dt="2026-06-22T13:15:08.493" v="220"/>
           <ac:spMkLst>
             <pc:docMk/>
             <pc:sldMk cId="77626767" sldId="257"/>
-            <ac:spMk id="216" creationId="{1B12671F-F141-3C65-FFCA-04DEDEFFE121}"/>
+            <ac:spMk id="34" creationId="{314AFD15-73AF-2E84-8055-656E8D27DD8F}"/>
+          </ac:spMkLst>
+        </pc:spChg>
+        <pc:spChg chg="add mod">
+          <ac:chgData name="Alexis MARTIN" userId="ec32c3d9-5957-42d0-8757-996fd533d25b" providerId="ADAL" clId="{B76BE869-635B-4DC9-A437-AFDC8BC5A345}" dt="2026-06-22T13:15:08.493" v="220"/>
+          <ac:spMkLst>
+            <pc:docMk/>
+            <pc:sldMk cId="77626767" sldId="257"/>
+            <ac:spMk id="37" creationId="{6240CD20-EE44-915D-3566-1D33313E19D1}"/>
           </ac:spMkLst>
         </pc:spChg>
         <pc:spChg chg="mod">
-          <ac:chgData name="Alexis MARTIN" userId="ec32c3d9-5957-42d0-8757-996fd533d25b" providerId="ADAL" clId="{B76BE869-635B-4DC9-A437-AFDC8BC5A345}" dt="2026-05-06T16:45:04.859" v="41"/>
+          <ac:chgData name="Alexis MARTIN" userId="ec32c3d9-5957-42d0-8757-996fd533d25b" providerId="ADAL" clId="{B76BE869-635B-4DC9-A437-AFDC8BC5A345}" dt="2026-06-22T13:17:42.310" v="228" actId="14100"/>
           <ac:spMkLst>
             <pc:docMk/>
             <pc:sldMk cId="77626767" sldId="257"/>
-            <ac:spMk id="222" creationId="{8FD679E3-3CF6-1538-E627-5D8103DB888C}"/>
+            <ac:spMk id="38" creationId="{08CCD34A-26EF-0FE5-E5E2-E286D5245792}"/>
           </ac:spMkLst>
         </pc:spChg>
         <pc:spChg chg="add mod">
-          <ac:chgData name="Alexis MARTIN" userId="ec32c3d9-5957-42d0-8757-996fd533d25b" providerId="ADAL" clId="{B76BE869-635B-4DC9-A437-AFDC8BC5A345}" dt="2026-05-06T16:45:04.859" v="41"/>
+          <ac:chgData name="Alexis MARTIN" userId="ec32c3d9-5957-42d0-8757-996fd533d25b" providerId="ADAL" clId="{B76BE869-635B-4DC9-A437-AFDC8BC5A345}" dt="2026-06-22T13:15:08.493" v="220"/>
+          <ac:spMkLst>
+            <pc:docMk/>
+            <pc:sldMk cId="77626767" sldId="257"/>
+            <ac:spMk id="40" creationId="{7E0BFF2D-FB4A-E05D-76D0-2C46AA8C48F7}"/>
+          </ac:spMkLst>
+        </pc:spChg>
+        <pc:spChg chg="add mod">
+          <ac:chgData name="Alexis MARTIN" userId="ec32c3d9-5957-42d0-8757-996fd533d25b" providerId="ADAL" clId="{B76BE869-635B-4DC9-A437-AFDC8BC5A345}" dt="2026-06-22T13:15:08.493" v="220"/>
+          <ac:spMkLst>
+            <pc:docMk/>
+            <pc:sldMk cId="77626767" sldId="257"/>
+            <ac:spMk id="43" creationId="{476BD92F-F87B-1B02-09EE-EA569FBAA0DE}"/>
+          </ac:spMkLst>
+        </pc:spChg>
+        <pc:spChg chg="add mod">
+          <ac:chgData name="Alexis MARTIN" userId="ec32c3d9-5957-42d0-8757-996fd533d25b" providerId="ADAL" clId="{B76BE869-635B-4DC9-A437-AFDC8BC5A345}" dt="2026-06-22T13:16:59.036" v="224" actId="14100"/>
+          <ac:spMkLst>
+            <pc:docMk/>
+            <pc:sldMk cId="77626767" sldId="257"/>
+            <ac:spMk id="45" creationId="{4F6D61F7-654D-B602-AE71-916E26E6F945}"/>
+          </ac:spMkLst>
+        </pc:spChg>
+        <pc:spChg chg="add mod">
+          <ac:chgData name="Alexis MARTIN" userId="ec32c3d9-5957-42d0-8757-996fd533d25b" providerId="ADAL" clId="{B76BE869-635B-4DC9-A437-AFDC8BC5A345}" dt="2026-06-22T13:17:54.021" v="232" actId="14100"/>
+          <ac:spMkLst>
+            <pc:docMk/>
+            <pc:sldMk cId="77626767" sldId="257"/>
+            <ac:spMk id="46" creationId="{FA2E2196-39B3-FE47-BEA8-373D2912C43B}"/>
+          </ac:spMkLst>
+        </pc:spChg>
+        <pc:spChg chg="add mod">
+          <ac:chgData name="Alexis MARTIN" userId="ec32c3d9-5957-42d0-8757-996fd533d25b" providerId="ADAL" clId="{B76BE869-635B-4DC9-A437-AFDC8BC5A345}" dt="2026-06-22T13:18:04.106" v="236" actId="1038"/>
+          <ac:spMkLst>
+            <pc:docMk/>
+            <pc:sldMk cId="77626767" sldId="257"/>
+            <ac:spMk id="47" creationId="{341D7EE8-99EE-E185-ECD4-1D0953DA7BEC}"/>
+          </ac:spMkLst>
+        </pc:spChg>
+        <pc:spChg chg="add mod">
+          <ac:chgData name="Alexis MARTIN" userId="ec32c3d9-5957-42d0-8757-996fd533d25b" providerId="ADAL" clId="{B76BE869-635B-4DC9-A437-AFDC8BC5A345}" dt="2026-06-22T13:18:27.349" v="242" actId="14100"/>
+          <ac:spMkLst>
+            <pc:docMk/>
+            <pc:sldMk cId="77626767" sldId="257"/>
+            <ac:spMk id="48" creationId="{0CBA74D6-3ECD-1C2E-36F2-AA352FBBF39B}"/>
+          </ac:spMkLst>
+        </pc:spChg>
+        <pc:spChg chg="add mod">
+          <ac:chgData name="Alexis MARTIN" userId="ec32c3d9-5957-42d0-8757-996fd533d25b" providerId="ADAL" clId="{B76BE869-635B-4DC9-A437-AFDC8BC5A345}" dt="2026-06-22T13:18:49.801" v="256" actId="14100"/>
+          <ac:spMkLst>
+            <pc:docMk/>
+            <pc:sldMk cId="77626767" sldId="257"/>
+            <ac:spMk id="49" creationId="{1B6BDBCF-6B7C-C856-8BF5-6EDC6C88FC8D}"/>
+          </ac:spMkLst>
+        </pc:spChg>
+        <pc:spChg chg="mod">
+          <ac:chgData name="Alexis MARTIN" userId="ec32c3d9-5957-42d0-8757-996fd533d25b" providerId="ADAL" clId="{B76BE869-635B-4DC9-A437-AFDC8BC5A345}" dt="2026-06-22T13:20:19.740" v="265" actId="20577"/>
+          <ac:spMkLst>
+            <pc:docMk/>
+            <pc:sldMk cId="77626767" sldId="257"/>
+            <ac:spMk id="210" creationId="{76459D52-72BE-7A01-2747-E3B86F4584C6}"/>
+          </ac:spMkLst>
+        </pc:spChg>
+        <pc:spChg chg="mod">
+          <ac:chgData name="Alexis MARTIN" userId="ec32c3d9-5957-42d0-8757-996fd533d25b" providerId="ADAL" clId="{B76BE869-635B-4DC9-A437-AFDC8BC5A345}" dt="2026-06-22T13:20:29.068" v="268" actId="1076"/>
           <ac:spMkLst>
             <pc:docMk/>
             <pc:sldMk cId="77626767" sldId="257"/>
             <ac:spMk id="224" creationId="{555B3637-5864-0E17-CCA2-295BC5BCE0EA}"/>
           </ac:spMkLst>
         </pc:spChg>
-        <pc:spChg chg="add mod">
-          <ac:chgData name="Alexis MARTIN" userId="ec32c3d9-5957-42d0-8757-996fd533d25b" providerId="ADAL" clId="{B76BE869-635B-4DC9-A437-AFDC8BC5A345}" dt="2026-05-06T16:45:04.859" v="41"/>
+        <pc:spChg chg="mod">
+          <ac:chgData name="Alexis MARTIN" userId="ec32c3d9-5957-42d0-8757-996fd533d25b" providerId="ADAL" clId="{B76BE869-635B-4DC9-A437-AFDC8BC5A345}" dt="2026-06-22T13:20:12.500" v="260" actId="14100"/>
           <ac:spMkLst>
             <pc:docMk/>
             <pc:sldMk cId="77626767" sldId="257"/>
-            <ac:spMk id="228" creationId="{FD7666C7-2745-211B-3994-C648209D5817}"/>
+            <ac:spMk id="230" creationId="{DEF8F0FA-AA18-0538-A038-2D6444047804}"/>
           </ac:spMkLst>
         </pc:spChg>
-        <pc:spChg chg="add mod">
-          <ac:chgData name="Alexis MARTIN" userId="ec32c3d9-5957-42d0-8757-996fd533d25b" providerId="ADAL" clId="{B76BE869-635B-4DC9-A437-AFDC8BC5A345}" dt="2026-05-06T16:45:04.859" v="41"/>
+        <pc:spChg chg="mod">
+          <ac:chgData name="Alexis MARTIN" userId="ec32c3d9-5957-42d0-8757-996fd533d25b" providerId="ADAL" clId="{B76BE869-635B-4DC9-A437-AFDC8BC5A345}" dt="2026-06-22T13:20:14.975" v="261" actId="14100"/>
           <ac:spMkLst>
             <pc:docMk/>
             <pc:sldMk cId="77626767" sldId="257"/>
-            <ac:spMk id="229" creationId="{87109C51-B306-C398-B372-74EF37D9A6D8}"/>
-          </ac:spMkLst>
-        </pc:spChg>
-        <pc:spChg chg="add mod">
-          <ac:chgData name="Alexis MARTIN" userId="ec32c3d9-5957-42d0-8757-996fd533d25b" providerId="ADAL" clId="{B76BE869-635B-4DC9-A437-AFDC8BC5A345}" dt="2026-05-06T16:45:04.859" v="41"/>
-          <ac:spMkLst>
-            <pc:docMk/>
-            <pc:sldMk cId="77626767" sldId="257"/>
-            <ac:spMk id="231" creationId="{4002D190-7C04-A263-8657-C79A00F57FDE}"/>
-          </ac:spMkLst>
-        </pc:spChg>
-        <pc:spChg chg="add mod">
-          <ac:chgData name="Alexis MARTIN" userId="ec32c3d9-5957-42d0-8757-996fd533d25b" providerId="ADAL" clId="{B76BE869-635B-4DC9-A437-AFDC8BC5A345}" dt="2026-05-06T16:45:04.859" v="41"/>
-          <ac:spMkLst>
-            <pc:docMk/>
-            <pc:sldMk cId="77626767" sldId="257"/>
-            <ac:spMk id="232" creationId="{78E92997-CA48-C093-E4C4-E4034182BB16}"/>
+            <ac:spMk id="234" creationId="{38B8859F-BD93-5AEC-E795-33937128723A}"/>
           </ac:spMkLst>
         </pc:spChg>
       </pc:sldChg>
@@ -1387,7 +505,7 @@
           <a:p>
             <a:fld id="{083BE8BC-B46D-4F73-8784-8E1ECAD8BDC7}" type="datetimeFigureOut">
               <a:rPr lang="fr-FR" smtClean="0"/>
-              <a:t>06/05/2026</a:t>
+              <a:t>22/06/2026</a:t>
             </a:fld>
             <a:endParaRPr lang="fr-FR"/>
           </a:p>
@@ -1585,7 +703,7 @@
           <a:p>
             <a:fld id="{083BE8BC-B46D-4F73-8784-8E1ECAD8BDC7}" type="datetimeFigureOut">
               <a:rPr lang="fr-FR" smtClean="0"/>
-              <a:t>06/05/2026</a:t>
+              <a:t>22/06/2026</a:t>
             </a:fld>
             <a:endParaRPr lang="fr-FR"/>
           </a:p>
@@ -1793,7 +911,7 @@
           <a:p>
             <a:fld id="{083BE8BC-B46D-4F73-8784-8E1ECAD8BDC7}" type="datetimeFigureOut">
               <a:rPr lang="fr-FR" smtClean="0"/>
-              <a:t>06/05/2026</a:t>
+              <a:t>22/06/2026</a:t>
             </a:fld>
             <a:endParaRPr lang="fr-FR"/>
           </a:p>
@@ -1991,7 +1109,7 @@
           <a:p>
             <a:fld id="{083BE8BC-B46D-4F73-8784-8E1ECAD8BDC7}" type="datetimeFigureOut">
               <a:rPr lang="fr-FR" smtClean="0"/>
-              <a:t>06/05/2026</a:t>
+              <a:t>22/06/2026</a:t>
             </a:fld>
             <a:endParaRPr lang="fr-FR"/>
           </a:p>
@@ -2266,7 +1384,7 @@
           <a:p>
             <a:fld id="{083BE8BC-B46D-4F73-8784-8E1ECAD8BDC7}" type="datetimeFigureOut">
               <a:rPr lang="fr-FR" smtClean="0"/>
-              <a:t>06/05/2026</a:t>
+              <a:t>22/06/2026</a:t>
             </a:fld>
             <a:endParaRPr lang="fr-FR"/>
           </a:p>
@@ -2531,7 +1649,7 @@
           <a:p>
             <a:fld id="{083BE8BC-B46D-4F73-8784-8E1ECAD8BDC7}" type="datetimeFigureOut">
               <a:rPr lang="fr-FR" smtClean="0"/>
-              <a:t>06/05/2026</a:t>
+              <a:t>22/06/2026</a:t>
             </a:fld>
             <a:endParaRPr lang="fr-FR"/>
           </a:p>
@@ -2943,7 +2061,7 @@
           <a:p>
             <a:fld id="{083BE8BC-B46D-4F73-8784-8E1ECAD8BDC7}" type="datetimeFigureOut">
               <a:rPr lang="fr-FR" smtClean="0"/>
-              <a:t>06/05/2026</a:t>
+              <a:t>22/06/2026</a:t>
             </a:fld>
             <a:endParaRPr lang="fr-FR"/>
           </a:p>
@@ -3084,7 +2202,7 @@
           <a:p>
             <a:fld id="{083BE8BC-B46D-4F73-8784-8E1ECAD8BDC7}" type="datetimeFigureOut">
               <a:rPr lang="fr-FR" smtClean="0"/>
-              <a:t>06/05/2026</a:t>
+              <a:t>22/06/2026</a:t>
             </a:fld>
             <a:endParaRPr lang="fr-FR"/>
           </a:p>
@@ -3197,7 +2315,7 @@
           <a:p>
             <a:fld id="{083BE8BC-B46D-4F73-8784-8E1ECAD8BDC7}" type="datetimeFigureOut">
               <a:rPr lang="fr-FR" smtClean="0"/>
-              <a:t>06/05/2026</a:t>
+              <a:t>22/06/2026</a:t>
             </a:fld>
             <a:endParaRPr lang="fr-FR"/>
           </a:p>
@@ -3508,7 +2626,7 @@
           <a:p>
             <a:fld id="{083BE8BC-B46D-4F73-8784-8E1ECAD8BDC7}" type="datetimeFigureOut">
               <a:rPr lang="fr-FR" smtClean="0"/>
-              <a:t>06/05/2026</a:t>
+              <a:t>22/06/2026</a:t>
             </a:fld>
             <a:endParaRPr lang="fr-FR"/>
           </a:p>
@@ -3796,7 +2914,7 @@
           <a:p>
             <a:fld id="{083BE8BC-B46D-4F73-8784-8E1ECAD8BDC7}" type="datetimeFigureOut">
               <a:rPr lang="fr-FR" smtClean="0"/>
-              <a:t>06/05/2026</a:t>
+              <a:t>22/06/2026</a:t>
             </a:fld>
             <a:endParaRPr lang="fr-FR"/>
           </a:p>
@@ -4037,7 +3155,7 @@
           <a:p>
             <a:fld id="{083BE8BC-B46D-4F73-8784-8E1ECAD8BDC7}" type="datetimeFigureOut">
               <a:rPr lang="fr-FR" smtClean="0"/>
-              <a:t>06/05/2026</a:t>
+              <a:t>22/06/2026</a:t>
             </a:fld>
             <a:endParaRPr lang="fr-FR"/>
           </a:p>
@@ -7323,8 +6441,8 @@
           </a:p>
         </p:txBody>
       </p:sp>
-      <mc:AlternateContent xmlns:mc="http://schemas.openxmlformats.org/markup-compatibility/2006">
-        <mc:Choice xmlns:a14="http://schemas.microsoft.com/office/drawing/2010/main" Requires="a14">
+      <mc:AlternateContent xmlns:mc="http://schemas.openxmlformats.org/markup-compatibility/2006" xmlns:a14="http://schemas.microsoft.com/office/drawing/2010/main">
+        <mc:Choice Requires="a14">
           <p:sp>
             <p:nvSpPr>
               <p:cNvPr id="189" name="Object 292">
@@ -7439,7 +6557,7 @@
             </p:txBody>
           </p:sp>
         </mc:Choice>
-        <mc:Fallback>
+        <mc:Fallback xmlns="">
           <p:sp>
             <p:nvSpPr>
               <p:cNvPr id="189" name="Object 292">
@@ -7660,8 +6778,8 @@
           </a:p>
         </p:txBody>
       </p:sp>
-      <mc:AlternateContent xmlns:mc="http://schemas.openxmlformats.org/markup-compatibility/2006">
-        <mc:Choice xmlns:a14="http://schemas.microsoft.com/office/drawing/2010/main" Requires="a14">
+      <mc:AlternateContent xmlns:mc="http://schemas.openxmlformats.org/markup-compatibility/2006" xmlns:a14="http://schemas.microsoft.com/office/drawing/2010/main">
+        <mc:Choice Requires="a14">
           <p:sp>
             <p:nvSpPr>
               <p:cNvPr id="236" name="Object 292">
@@ -7785,7 +6903,7 @@
             </p:txBody>
           </p:sp>
         </mc:Choice>
-        <mc:Fallback>
+        <mc:Fallback xmlns="">
           <p:sp>
             <p:nvSpPr>
               <p:cNvPr id="236" name="Object 292">
@@ -12189,8 +11307,8 @@
         </p:nvSpPr>
         <p:spPr bwMode="auto">
           <a:xfrm>
-            <a:off x="738706" y="1482933"/>
-            <a:ext cx="203200" cy="184666"/>
+            <a:off x="1036362" y="1560721"/>
+            <a:ext cx="537368" cy="184666"/>
           </a:xfrm>
           <a:prstGeom prst="rect">
             <a:avLst/>
@@ -12354,24 +11472,33 @@
               <a:buNone/>
             </a:pPr>
             <a:r>
-              <a:rPr lang="fr-FR" altLang="fr-FR" sz="1200" dirty="0">
-                <a:solidFill>
-                  <a:srgbClr val="000000"/>
+              <a:rPr lang="fr-FR" altLang="fr-FR" sz="1200" b="1" dirty="0">
+                <a:solidFill>
+                  <a:schemeClr val="tx2">
+                    <a:lumMod val="75000"/>
+                    <a:lumOff val="25000"/>
+                  </a:schemeClr>
                 </a:solidFill>
                 <a:latin typeface="Times" panose="02020603050405020304" pitchFamily="18" charset="0"/>
               </a:rPr>
               <a:t>i</a:t>
             </a:r>
             <a:r>
-              <a:rPr lang="fr-FR" altLang="fr-FR" sz="1200" baseline="-25000" dirty="0">
-                <a:solidFill>
-                  <a:srgbClr val="000000"/>
+              <a:rPr lang="fr-FR" altLang="fr-FR" sz="1200" b="1" baseline="-25000" dirty="0">
+                <a:solidFill>
+                  <a:schemeClr val="tx2">
+                    <a:lumMod val="75000"/>
+                    <a:lumOff val="25000"/>
+                  </a:schemeClr>
                 </a:solidFill>
                 <a:latin typeface="Times" panose="02020603050405020304" pitchFamily="18" charset="0"/>
               </a:rPr>
               <a:t>1</a:t>
             </a:r>
-            <a:endParaRPr lang="fr-FR" altLang="fr-FR" sz="1800" baseline="-25000" dirty="0">
+            <a:endParaRPr lang="fr-FR" altLang="fr-FR" sz="1800" b="1" baseline="-25000" dirty="0">
+              <a:solidFill>
+                <a:srgbClr val="FF0000"/>
+              </a:solidFill>
               <a:latin typeface="Times New Roman" panose="02020603050405020304" pitchFamily="18" charset="0"/>
             </a:endParaRPr>
           </a:p>
@@ -13812,7 +12939,7 @@
         </p:nvSpPr>
         <p:spPr bwMode="auto">
           <a:xfrm>
-            <a:off x="791612" y="3006625"/>
+            <a:off x="1080019" y="3005304"/>
             <a:ext cx="123825" cy="184666"/>
           </a:xfrm>
           <a:prstGeom prst="rect">
@@ -13977,24 +13104,27 @@
               <a:buNone/>
             </a:pPr>
             <a:r>
-              <a:rPr lang="fr-FR" altLang="fr-FR" sz="1200" dirty="0">
-                <a:solidFill>
-                  <a:srgbClr val="000000"/>
+              <a:rPr lang="fr-FR" altLang="fr-FR" sz="1200" b="1" dirty="0">
+                <a:solidFill>
+                  <a:srgbClr val="FF0000"/>
                 </a:solidFill>
                 <a:latin typeface="Times" panose="02020603050405020304" pitchFamily="18" charset="0"/>
               </a:rPr>
               <a:t>i</a:t>
             </a:r>
             <a:r>
-              <a:rPr lang="fr-FR" altLang="fr-FR" sz="1200" baseline="-25000" dirty="0">
-                <a:solidFill>
-                  <a:srgbClr val="000000"/>
+              <a:rPr lang="fr-FR" altLang="fr-FR" sz="1200" b="1" baseline="-25000" dirty="0">
+                <a:solidFill>
+                  <a:srgbClr val="FF0000"/>
                 </a:solidFill>
                 <a:latin typeface="Times" panose="02020603050405020304" pitchFamily="18" charset="0"/>
               </a:rPr>
               <a:t>2</a:t>
             </a:r>
-            <a:endParaRPr lang="fr-FR" altLang="fr-FR" sz="1800" baseline="-25000" dirty="0">
+            <a:endParaRPr lang="fr-FR" altLang="fr-FR" sz="1800" b="1" baseline="-25000" dirty="0">
+              <a:solidFill>
+                <a:srgbClr val="FF0000"/>
+              </a:solidFill>
               <a:latin typeface="Times New Roman" panose="02020603050405020304" pitchFamily="18" charset="0"/>
             </a:endParaRPr>
           </a:p>
@@ -14992,7 +14122,7 @@
         <p:spPr bwMode="auto">
           <a:xfrm>
             <a:off x="1680093" y="3368883"/>
-            <a:ext cx="1444625" cy="760413"/>
+            <a:ext cx="851075" cy="739775"/>
           </a:xfrm>
           <a:prstGeom prst="line">
             <a:avLst/>
@@ -15179,8 +14309,8 @@
         </p:nvSpPr>
         <p:spPr bwMode="auto">
           <a:xfrm flipV="1">
-            <a:off x="3115192" y="4126120"/>
-            <a:ext cx="715963" cy="3175"/>
+            <a:off x="2531168" y="4126120"/>
+            <a:ext cx="1299987" cy="0"/>
           </a:xfrm>
           <a:prstGeom prst="line">
             <a:avLst/>
@@ -15189,6 +14319,4384 @@
           <a:ln w="38100">
             <a:solidFill>
               <a:srgbClr val="FF3300"/>
+            </a:solidFill>
+            <a:round/>
+            <a:headEnd/>
+            <a:tailEnd/>
+          </a:ln>
+          <a:extLst>
+            <a:ext uri="{909E8E84-426E-40DD-AFC4-6F175D3DCCD1}">
+              <a14:hiddenFill xmlns:a14="http://schemas.microsoft.com/office/drawing/2010/main">
+                <a:noFill/>
+              </a14:hiddenFill>
+            </a:ext>
+          </a:extLst>
+        </p:spPr>
+        <p:txBody>
+          <a:bodyPr/>
+          <a:lstStyle/>
+          <a:p>
+            <a:endParaRPr lang="fr-FR"/>
+          </a:p>
+        </p:txBody>
+      </p:sp>
+      <p:grpSp>
+        <p:nvGrpSpPr>
+          <p:cNvPr id="6" name="Group 5">
+            <a:extLst>
+              <a:ext uri="{FF2B5EF4-FFF2-40B4-BE49-F238E27FC236}">
+                <a16:creationId xmlns:a16="http://schemas.microsoft.com/office/drawing/2014/main" id="{417510F9-39A6-8912-5829-A2A7253B7B65}"/>
+              </a:ext>
+            </a:extLst>
+          </p:cNvPr>
+          <p:cNvGrpSpPr>
+            <a:grpSpLocks/>
+          </p:cNvGrpSpPr>
+          <p:nvPr/>
+        </p:nvGrpSpPr>
+        <p:grpSpPr bwMode="auto">
+          <a:xfrm>
+            <a:off x="7271268" y="1077326"/>
+            <a:ext cx="104818" cy="901699"/>
+            <a:chOff x="226" y="136"/>
+            <a:chExt cx="48" cy="768"/>
+          </a:xfrm>
+        </p:grpSpPr>
+        <p:sp>
+          <p:nvSpPr>
+            <p:cNvPr id="7" name="Freeform 6">
+              <a:extLst>
+                <a:ext uri="{FF2B5EF4-FFF2-40B4-BE49-F238E27FC236}">
+                  <a16:creationId xmlns:a16="http://schemas.microsoft.com/office/drawing/2014/main" id="{908CA96F-556A-3724-D6E4-3DC4765199F2}"/>
+                </a:ext>
+              </a:extLst>
+            </p:cNvPr>
+            <p:cNvSpPr>
+              <a:spLocks/>
+            </p:cNvSpPr>
+            <p:nvPr/>
+          </p:nvSpPr>
+          <p:spPr bwMode="auto">
+            <a:xfrm>
+              <a:off x="226" y="136"/>
+              <a:ext cx="48" cy="88"/>
+            </a:xfrm>
+            <a:custGeom>
+              <a:avLst/>
+              <a:gdLst>
+                <a:gd name="T0" fmla="*/ 24 w 48"/>
+                <a:gd name="T1" fmla="*/ 0 h 88"/>
+                <a:gd name="T2" fmla="*/ 48 w 48"/>
+                <a:gd name="T3" fmla="*/ 88 h 88"/>
+                <a:gd name="T4" fmla="*/ 24 w 48"/>
+                <a:gd name="T5" fmla="*/ 88 h 88"/>
+                <a:gd name="T6" fmla="*/ 0 w 48"/>
+                <a:gd name="T7" fmla="*/ 88 h 88"/>
+                <a:gd name="T8" fmla="*/ 24 w 48"/>
+                <a:gd name="T9" fmla="*/ 0 h 88"/>
+                <a:gd name="T10" fmla="*/ 0 60000 65536"/>
+                <a:gd name="T11" fmla="*/ 0 60000 65536"/>
+                <a:gd name="T12" fmla="*/ 0 60000 65536"/>
+                <a:gd name="T13" fmla="*/ 0 60000 65536"/>
+                <a:gd name="T14" fmla="*/ 0 60000 65536"/>
+              </a:gdLst>
+              <a:ahLst/>
+              <a:cxnLst>
+                <a:cxn ang="T10">
+                  <a:pos x="T0" y="T1"/>
+                </a:cxn>
+                <a:cxn ang="T11">
+                  <a:pos x="T2" y="T3"/>
+                </a:cxn>
+                <a:cxn ang="T12">
+                  <a:pos x="T4" y="T5"/>
+                </a:cxn>
+                <a:cxn ang="T13">
+                  <a:pos x="T6" y="T7"/>
+                </a:cxn>
+                <a:cxn ang="T14">
+                  <a:pos x="T8" y="T9"/>
+                </a:cxn>
+              </a:cxnLst>
+              <a:rect l="0" t="0" r="r" b="b"/>
+              <a:pathLst>
+                <a:path w="48" h="88">
+                  <a:moveTo>
+                    <a:pt x="24" y="0"/>
+                  </a:moveTo>
+                  <a:lnTo>
+                    <a:pt x="48" y="88"/>
+                  </a:lnTo>
+                  <a:lnTo>
+                    <a:pt x="24" y="88"/>
+                  </a:lnTo>
+                  <a:lnTo>
+                    <a:pt x="0" y="88"/>
+                  </a:lnTo>
+                  <a:lnTo>
+                    <a:pt x="24" y="0"/>
+                  </a:lnTo>
+                  <a:close/>
+                </a:path>
+              </a:pathLst>
+            </a:custGeom>
+            <a:solidFill>
+              <a:srgbClr val="000000"/>
+            </a:solidFill>
+            <a:ln>
+              <a:noFill/>
+            </a:ln>
+            <a:extLst>
+              <a:ext uri="{91240B29-F687-4F45-9708-019B960494DF}">
+                <a14:hiddenLine xmlns:a14="http://schemas.microsoft.com/office/drawing/2010/main" w="9525">
+                  <a:solidFill>
+                    <a:srgbClr val="000000"/>
+                  </a:solidFill>
+                  <a:round/>
+                  <a:headEnd/>
+                  <a:tailEnd/>
+                </a14:hiddenLine>
+              </a:ext>
+            </a:extLst>
+          </p:spPr>
+          <p:txBody>
+            <a:bodyPr/>
+            <a:lstStyle/>
+            <a:p>
+              <a:endParaRPr lang="fr-FR"/>
+            </a:p>
+          </p:txBody>
+        </p:sp>
+        <p:sp>
+          <p:nvSpPr>
+            <p:cNvPr id="8" name="Line 7">
+              <a:extLst>
+                <a:ext uri="{FF2B5EF4-FFF2-40B4-BE49-F238E27FC236}">
+                  <a16:creationId xmlns:a16="http://schemas.microsoft.com/office/drawing/2014/main" id="{6797A2F8-5004-8F7F-E461-5CFA47327B00}"/>
+                </a:ext>
+              </a:extLst>
+            </p:cNvPr>
+            <p:cNvSpPr>
+              <a:spLocks noChangeShapeType="1"/>
+            </p:cNvSpPr>
+            <p:nvPr/>
+          </p:nvSpPr>
+          <p:spPr bwMode="auto">
+            <a:xfrm>
+              <a:off x="250" y="224"/>
+              <a:ext cx="1" cy="680"/>
+            </a:xfrm>
+            <a:prstGeom prst="line">
+              <a:avLst/>
+            </a:prstGeom>
+            <a:noFill/>
+            <a:ln w="12700">
+              <a:solidFill>
+                <a:srgbClr val="000000"/>
+              </a:solidFill>
+              <a:round/>
+              <a:headEnd/>
+              <a:tailEnd/>
+            </a:ln>
+            <a:extLst>
+              <a:ext uri="{909E8E84-426E-40DD-AFC4-6F175D3DCCD1}">
+                <a14:hiddenFill xmlns:a14="http://schemas.microsoft.com/office/drawing/2010/main">
+                  <a:noFill/>
+                </a14:hiddenFill>
+              </a:ext>
+            </a:extLst>
+          </p:spPr>
+          <p:txBody>
+            <a:bodyPr/>
+            <a:lstStyle/>
+            <a:p>
+              <a:endParaRPr lang="fr-FR"/>
+            </a:p>
+          </p:txBody>
+        </p:sp>
+      </p:grpSp>
+      <p:grpSp>
+        <p:nvGrpSpPr>
+          <p:cNvPr id="9" name="Group 8">
+            <a:extLst>
+              <a:ext uri="{FF2B5EF4-FFF2-40B4-BE49-F238E27FC236}">
+                <a16:creationId xmlns:a16="http://schemas.microsoft.com/office/drawing/2014/main" id="{C2B40566-A46A-E4AF-1029-3CE015FE0ADF}"/>
+              </a:ext>
+            </a:extLst>
+          </p:cNvPr>
+          <p:cNvGrpSpPr>
+            <a:grpSpLocks/>
+          </p:cNvGrpSpPr>
+          <p:nvPr/>
+        </p:nvGrpSpPr>
+        <p:grpSpPr bwMode="auto">
+          <a:xfrm>
+            <a:off x="7245868" y="1864726"/>
+            <a:ext cx="3883025" cy="76200"/>
+            <a:chOff x="210" y="832"/>
+            <a:chExt cx="2446" cy="48"/>
+          </a:xfrm>
+        </p:grpSpPr>
+        <p:sp>
+          <p:nvSpPr>
+            <p:cNvPr id="10" name="Freeform 9">
+              <a:extLst>
+                <a:ext uri="{FF2B5EF4-FFF2-40B4-BE49-F238E27FC236}">
+                  <a16:creationId xmlns:a16="http://schemas.microsoft.com/office/drawing/2014/main" id="{97159B68-C540-DC8B-4557-8857886EEC1A}"/>
+                </a:ext>
+              </a:extLst>
+            </p:cNvPr>
+            <p:cNvSpPr>
+              <a:spLocks/>
+            </p:cNvSpPr>
+            <p:nvPr/>
+          </p:nvSpPr>
+          <p:spPr bwMode="auto">
+            <a:xfrm>
+              <a:off x="2568" y="832"/>
+              <a:ext cx="88" cy="48"/>
+            </a:xfrm>
+            <a:custGeom>
+              <a:avLst/>
+              <a:gdLst>
+                <a:gd name="T0" fmla="*/ 88 w 88"/>
+                <a:gd name="T1" fmla="*/ 24 h 48"/>
+                <a:gd name="T2" fmla="*/ 0 w 88"/>
+                <a:gd name="T3" fmla="*/ 48 h 48"/>
+                <a:gd name="T4" fmla="*/ 0 w 88"/>
+                <a:gd name="T5" fmla="*/ 24 h 48"/>
+                <a:gd name="T6" fmla="*/ 0 w 88"/>
+                <a:gd name="T7" fmla="*/ 0 h 48"/>
+                <a:gd name="T8" fmla="*/ 88 w 88"/>
+                <a:gd name="T9" fmla="*/ 24 h 48"/>
+                <a:gd name="T10" fmla="*/ 0 60000 65536"/>
+                <a:gd name="T11" fmla="*/ 0 60000 65536"/>
+                <a:gd name="T12" fmla="*/ 0 60000 65536"/>
+                <a:gd name="T13" fmla="*/ 0 60000 65536"/>
+                <a:gd name="T14" fmla="*/ 0 60000 65536"/>
+              </a:gdLst>
+              <a:ahLst/>
+              <a:cxnLst>
+                <a:cxn ang="T10">
+                  <a:pos x="T0" y="T1"/>
+                </a:cxn>
+                <a:cxn ang="T11">
+                  <a:pos x="T2" y="T3"/>
+                </a:cxn>
+                <a:cxn ang="T12">
+                  <a:pos x="T4" y="T5"/>
+                </a:cxn>
+                <a:cxn ang="T13">
+                  <a:pos x="T6" y="T7"/>
+                </a:cxn>
+                <a:cxn ang="T14">
+                  <a:pos x="T8" y="T9"/>
+                </a:cxn>
+              </a:cxnLst>
+              <a:rect l="0" t="0" r="r" b="b"/>
+              <a:pathLst>
+                <a:path w="88" h="48">
+                  <a:moveTo>
+                    <a:pt x="88" y="24"/>
+                  </a:moveTo>
+                  <a:lnTo>
+                    <a:pt x="0" y="48"/>
+                  </a:lnTo>
+                  <a:lnTo>
+                    <a:pt x="0" y="24"/>
+                  </a:lnTo>
+                  <a:lnTo>
+                    <a:pt x="0" y="0"/>
+                  </a:lnTo>
+                  <a:lnTo>
+                    <a:pt x="88" y="24"/>
+                  </a:lnTo>
+                  <a:close/>
+                </a:path>
+              </a:pathLst>
+            </a:custGeom>
+            <a:solidFill>
+              <a:srgbClr val="000000"/>
+            </a:solidFill>
+            <a:ln>
+              <a:noFill/>
+            </a:ln>
+            <a:extLst>
+              <a:ext uri="{91240B29-F687-4F45-9708-019B960494DF}">
+                <a14:hiddenLine xmlns:a14="http://schemas.microsoft.com/office/drawing/2010/main" w="9525">
+                  <a:solidFill>
+                    <a:srgbClr val="000000"/>
+                  </a:solidFill>
+                  <a:round/>
+                  <a:headEnd/>
+                  <a:tailEnd/>
+                </a14:hiddenLine>
+              </a:ext>
+            </a:extLst>
+          </p:spPr>
+          <p:txBody>
+            <a:bodyPr/>
+            <a:lstStyle/>
+            <a:p>
+              <a:endParaRPr lang="fr-FR"/>
+            </a:p>
+          </p:txBody>
+        </p:sp>
+        <p:sp>
+          <p:nvSpPr>
+            <p:cNvPr id="11" name="Line 10">
+              <a:extLst>
+                <a:ext uri="{FF2B5EF4-FFF2-40B4-BE49-F238E27FC236}">
+                  <a16:creationId xmlns:a16="http://schemas.microsoft.com/office/drawing/2014/main" id="{5214A1BC-6766-97F4-C277-DEF01A4FA39C}"/>
+                </a:ext>
+              </a:extLst>
+            </p:cNvPr>
+            <p:cNvSpPr>
+              <a:spLocks noChangeShapeType="1"/>
+            </p:cNvSpPr>
+            <p:nvPr/>
+          </p:nvSpPr>
+          <p:spPr bwMode="auto">
+            <a:xfrm>
+              <a:off x="210" y="856"/>
+              <a:ext cx="2358" cy="1"/>
+            </a:xfrm>
+            <a:prstGeom prst="line">
+              <a:avLst/>
+            </a:prstGeom>
+            <a:noFill/>
+            <a:ln w="12700">
+              <a:solidFill>
+                <a:srgbClr val="000000"/>
+              </a:solidFill>
+              <a:round/>
+              <a:headEnd/>
+              <a:tailEnd/>
+            </a:ln>
+            <a:extLst>
+              <a:ext uri="{909E8E84-426E-40DD-AFC4-6F175D3DCCD1}">
+                <a14:hiddenFill xmlns:a14="http://schemas.microsoft.com/office/drawing/2010/main">
+                  <a:noFill/>
+                </a14:hiddenFill>
+              </a:ext>
+            </a:extLst>
+          </p:spPr>
+          <p:txBody>
+            <a:bodyPr/>
+            <a:lstStyle/>
+            <a:p>
+              <a:endParaRPr lang="fr-FR"/>
+            </a:p>
+          </p:txBody>
+        </p:sp>
+      </p:grpSp>
+      <p:sp>
+        <p:nvSpPr>
+          <p:cNvPr id="12" name="Line 11">
+            <a:extLst>
+              <a:ext uri="{FF2B5EF4-FFF2-40B4-BE49-F238E27FC236}">
+                <a16:creationId xmlns:a16="http://schemas.microsoft.com/office/drawing/2014/main" id="{C7501001-32F2-A036-D1D4-AA251B7C4A7C}"/>
+              </a:ext>
+            </a:extLst>
+          </p:cNvPr>
+          <p:cNvSpPr>
+            <a:spLocks noChangeShapeType="1"/>
+          </p:cNvSpPr>
+          <p:nvPr/>
+        </p:nvSpPr>
+        <p:spPr bwMode="auto">
+          <a:xfrm flipV="1">
+            <a:off x="7309368" y="1401176"/>
+            <a:ext cx="722313" cy="495300"/>
+          </a:xfrm>
+          <a:prstGeom prst="line">
+            <a:avLst/>
+          </a:prstGeom>
+          <a:noFill/>
+          <a:ln w="28575">
+            <a:solidFill>
+              <a:srgbClr val="009900"/>
+            </a:solidFill>
+            <a:round/>
+            <a:headEnd/>
+            <a:tailEnd/>
+          </a:ln>
+          <a:extLst>
+            <a:ext uri="{909E8E84-426E-40DD-AFC4-6F175D3DCCD1}">
+              <a14:hiddenFill xmlns:a14="http://schemas.microsoft.com/office/drawing/2010/main">
+                <a:noFill/>
+              </a14:hiddenFill>
+            </a:ext>
+          </a:extLst>
+        </p:spPr>
+        <p:txBody>
+          <a:bodyPr/>
+          <a:lstStyle/>
+          <a:p>
+            <a:endParaRPr lang="fr-FR"/>
+          </a:p>
+        </p:txBody>
+      </p:sp>
+      <p:sp>
+        <p:nvSpPr>
+          <p:cNvPr id="13" name="Line 12">
+            <a:extLst>
+              <a:ext uri="{FF2B5EF4-FFF2-40B4-BE49-F238E27FC236}">
+                <a16:creationId xmlns:a16="http://schemas.microsoft.com/office/drawing/2014/main" id="{9605BBC9-A3DB-87DE-9DEB-1B157369F146}"/>
+              </a:ext>
+            </a:extLst>
+          </p:cNvPr>
+          <p:cNvSpPr>
+            <a:spLocks noChangeShapeType="1"/>
+          </p:cNvSpPr>
+          <p:nvPr/>
+        </p:nvSpPr>
+        <p:spPr bwMode="auto">
+          <a:xfrm>
+            <a:off x="8031681" y="1391651"/>
+            <a:ext cx="941434" cy="511175"/>
+          </a:xfrm>
+          <a:prstGeom prst="line">
+            <a:avLst/>
+          </a:prstGeom>
+          <a:noFill/>
+          <a:ln w="28575">
+            <a:solidFill>
+              <a:srgbClr val="009900"/>
+            </a:solidFill>
+            <a:round/>
+            <a:headEnd/>
+            <a:tailEnd/>
+          </a:ln>
+          <a:extLst>
+            <a:ext uri="{909E8E84-426E-40DD-AFC4-6F175D3DCCD1}">
+              <a14:hiddenFill xmlns:a14="http://schemas.microsoft.com/office/drawing/2010/main">
+                <a:noFill/>
+              </a14:hiddenFill>
+            </a:ext>
+          </a:extLst>
+        </p:spPr>
+        <p:txBody>
+          <a:bodyPr/>
+          <a:lstStyle/>
+          <a:p>
+            <a:endParaRPr lang="fr-FR"/>
+          </a:p>
+        </p:txBody>
+      </p:sp>
+      <p:sp>
+        <p:nvSpPr>
+          <p:cNvPr id="14" name="Line 13">
+            <a:extLst>
+              <a:ext uri="{FF2B5EF4-FFF2-40B4-BE49-F238E27FC236}">
+                <a16:creationId xmlns:a16="http://schemas.microsoft.com/office/drawing/2014/main" id="{8BAD41FB-58E1-9779-9209-77B8B7CB4D2B}"/>
+              </a:ext>
+            </a:extLst>
+          </p:cNvPr>
+          <p:cNvSpPr>
+            <a:spLocks noChangeShapeType="1"/>
+          </p:cNvSpPr>
+          <p:nvPr/>
+        </p:nvSpPr>
+        <p:spPr bwMode="auto">
+          <a:xfrm flipV="1">
+            <a:off x="9466781" y="1401176"/>
+            <a:ext cx="722312" cy="495300"/>
+          </a:xfrm>
+          <a:prstGeom prst="line">
+            <a:avLst/>
+          </a:prstGeom>
+          <a:noFill/>
+          <a:ln w="28575">
+            <a:solidFill>
+              <a:srgbClr val="009900"/>
+            </a:solidFill>
+            <a:round/>
+            <a:headEnd/>
+            <a:tailEnd/>
+          </a:ln>
+          <a:extLst>
+            <a:ext uri="{909E8E84-426E-40DD-AFC4-6F175D3DCCD1}">
+              <a14:hiddenFill xmlns:a14="http://schemas.microsoft.com/office/drawing/2010/main">
+                <a:noFill/>
+              </a14:hiddenFill>
+            </a:ext>
+          </a:extLst>
+        </p:spPr>
+        <p:txBody>
+          <a:bodyPr/>
+          <a:lstStyle/>
+          <a:p>
+            <a:endParaRPr lang="fr-FR"/>
+          </a:p>
+        </p:txBody>
+      </p:sp>
+      <p:sp>
+        <p:nvSpPr>
+          <p:cNvPr id="15" name="Rectangle 123">
+            <a:extLst>
+              <a:ext uri="{FF2B5EF4-FFF2-40B4-BE49-F238E27FC236}">
+                <a16:creationId xmlns:a16="http://schemas.microsoft.com/office/drawing/2014/main" id="{D67A1BB5-6E76-A55A-7459-33A5C9865718}"/>
+              </a:ext>
+            </a:extLst>
+          </p:cNvPr>
+          <p:cNvSpPr>
+            <a:spLocks noChangeArrowheads="1"/>
+          </p:cNvSpPr>
+          <p:nvPr/>
+        </p:nvSpPr>
+        <p:spPr bwMode="auto">
+          <a:xfrm>
+            <a:off x="10963793" y="1625966"/>
+            <a:ext cx="57708" cy="246221"/>
+          </a:xfrm>
+          <a:prstGeom prst="rect">
+            <a:avLst/>
+          </a:prstGeom>
+          <a:noFill/>
+          <a:ln>
+            <a:noFill/>
+          </a:ln>
+          <a:extLst>
+            <a:ext uri="{909E8E84-426E-40DD-AFC4-6F175D3DCCD1}">
+              <a14:hiddenFill xmlns:a14="http://schemas.microsoft.com/office/drawing/2010/main">
+                <a:solidFill>
+                  <a:srgbClr val="FFFFFF"/>
+                </a:solidFill>
+              </a14:hiddenFill>
+            </a:ext>
+            <a:ext uri="{91240B29-F687-4F45-9708-019B960494DF}">
+              <a14:hiddenLine xmlns:a14="http://schemas.microsoft.com/office/drawing/2010/main" w="9525">
+                <a:solidFill>
+                  <a:srgbClr val="000000"/>
+                </a:solidFill>
+                <a:miter lim="800000"/>
+                <a:headEnd/>
+                <a:tailEnd/>
+              </a14:hiddenLine>
+            </a:ext>
+          </a:extLst>
+        </p:spPr>
+        <p:txBody>
+          <a:bodyPr wrap="none" lIns="0" tIns="0" rIns="0" bIns="0">
+            <a:spAutoFit/>
+          </a:bodyPr>
+          <a:lstStyle>
+            <a:lvl1pPr>
+              <a:spcBef>
+                <a:spcPct val="20000"/>
+              </a:spcBef>
+              <a:buChar char="•"/>
+              <a:defRPr sz="3200">
+                <a:solidFill>
+                  <a:schemeClr val="tx1"/>
+                </a:solidFill>
+                <a:latin typeface="Arial" panose="020B0604020202020204" pitchFamily="34" charset="0"/>
+              </a:defRPr>
+            </a:lvl1pPr>
+            <a:lvl2pPr marL="742950" indent="-285750">
+              <a:spcBef>
+                <a:spcPct val="20000"/>
+              </a:spcBef>
+              <a:buChar char="–"/>
+              <a:defRPr sz="2800">
+                <a:solidFill>
+                  <a:schemeClr val="tx1"/>
+                </a:solidFill>
+                <a:latin typeface="Arial" panose="020B0604020202020204" pitchFamily="34" charset="0"/>
+              </a:defRPr>
+            </a:lvl2pPr>
+            <a:lvl3pPr marL="1143000" indent="-228600">
+              <a:spcBef>
+                <a:spcPct val="20000"/>
+              </a:spcBef>
+              <a:buChar char="•"/>
+              <a:defRPr sz="2400">
+                <a:solidFill>
+                  <a:schemeClr val="tx1"/>
+                </a:solidFill>
+                <a:latin typeface="Arial" panose="020B0604020202020204" pitchFamily="34" charset="0"/>
+              </a:defRPr>
+            </a:lvl3pPr>
+            <a:lvl4pPr marL="1600200" indent="-228600">
+              <a:spcBef>
+                <a:spcPct val="20000"/>
+              </a:spcBef>
+              <a:buChar char="–"/>
+              <a:defRPr sz="2000">
+                <a:solidFill>
+                  <a:schemeClr val="tx1"/>
+                </a:solidFill>
+                <a:latin typeface="Arial" panose="020B0604020202020204" pitchFamily="34" charset="0"/>
+              </a:defRPr>
+            </a:lvl4pPr>
+            <a:lvl5pPr marL="2057400" indent="-228600">
+              <a:spcBef>
+                <a:spcPct val="20000"/>
+              </a:spcBef>
+              <a:buChar char="»"/>
+              <a:defRPr sz="2000">
+                <a:solidFill>
+                  <a:schemeClr val="tx1"/>
+                </a:solidFill>
+                <a:latin typeface="Arial" panose="020B0604020202020204" pitchFamily="34" charset="0"/>
+              </a:defRPr>
+            </a:lvl5pPr>
+            <a:lvl6pPr marL="2514600" indent="-228600" eaLnBrk="0" fontAlgn="base" hangingPunct="0">
+              <a:spcBef>
+                <a:spcPct val="20000"/>
+              </a:spcBef>
+              <a:spcAft>
+                <a:spcPct val="0"/>
+              </a:spcAft>
+              <a:buChar char="»"/>
+              <a:defRPr sz="2000">
+                <a:solidFill>
+                  <a:schemeClr val="tx1"/>
+                </a:solidFill>
+                <a:latin typeface="Arial" panose="020B0604020202020204" pitchFamily="34" charset="0"/>
+              </a:defRPr>
+            </a:lvl6pPr>
+            <a:lvl7pPr marL="2971800" indent="-228600" eaLnBrk="0" fontAlgn="base" hangingPunct="0">
+              <a:spcBef>
+                <a:spcPct val="20000"/>
+              </a:spcBef>
+              <a:spcAft>
+                <a:spcPct val="0"/>
+              </a:spcAft>
+              <a:buChar char="»"/>
+              <a:defRPr sz="2000">
+                <a:solidFill>
+                  <a:schemeClr val="tx1"/>
+                </a:solidFill>
+                <a:latin typeface="Arial" panose="020B0604020202020204" pitchFamily="34" charset="0"/>
+              </a:defRPr>
+            </a:lvl7pPr>
+            <a:lvl8pPr marL="3429000" indent="-228600" eaLnBrk="0" fontAlgn="base" hangingPunct="0">
+              <a:spcBef>
+                <a:spcPct val="20000"/>
+              </a:spcBef>
+              <a:spcAft>
+                <a:spcPct val="0"/>
+              </a:spcAft>
+              <a:buChar char="»"/>
+              <a:defRPr sz="2000">
+                <a:solidFill>
+                  <a:schemeClr val="tx1"/>
+                </a:solidFill>
+                <a:latin typeface="Arial" panose="020B0604020202020204" pitchFamily="34" charset="0"/>
+              </a:defRPr>
+            </a:lvl8pPr>
+            <a:lvl9pPr marL="3886200" indent="-228600" eaLnBrk="0" fontAlgn="base" hangingPunct="0">
+              <a:spcBef>
+                <a:spcPct val="20000"/>
+              </a:spcBef>
+              <a:spcAft>
+                <a:spcPct val="0"/>
+              </a:spcAft>
+              <a:buChar char="»"/>
+              <a:defRPr sz="2000">
+                <a:solidFill>
+                  <a:schemeClr val="tx1"/>
+                </a:solidFill>
+                <a:latin typeface="Arial" panose="020B0604020202020204" pitchFamily="34" charset="0"/>
+              </a:defRPr>
+            </a:lvl9pPr>
+          </a:lstStyle>
+          <a:p>
+            <a:pPr eaLnBrk="1" hangingPunct="1">
+              <a:spcBef>
+                <a:spcPct val="0"/>
+              </a:spcBef>
+              <a:buFontTx/>
+              <a:buNone/>
+            </a:pPr>
+            <a:r>
+              <a:rPr lang="fr-FR" altLang="fr-FR" sz="1600" dirty="0">
+                <a:solidFill>
+                  <a:srgbClr val="000000"/>
+                </a:solidFill>
+                <a:latin typeface="Times" panose="02020603050405020304" pitchFamily="18" charset="0"/>
+              </a:rPr>
+              <a:t>t</a:t>
+            </a:r>
+            <a:endParaRPr lang="fr-FR" altLang="fr-FR" sz="1600" dirty="0">
+              <a:latin typeface="Times New Roman" panose="02020603050405020304" pitchFamily="18" charset="0"/>
+            </a:endParaRPr>
+          </a:p>
+        </p:txBody>
+      </p:sp>
+      <p:sp>
+        <p:nvSpPr>
+          <p:cNvPr id="16" name="Rectangle 124">
+            <a:extLst>
+              <a:ext uri="{FF2B5EF4-FFF2-40B4-BE49-F238E27FC236}">
+                <a16:creationId xmlns:a16="http://schemas.microsoft.com/office/drawing/2014/main" id="{988DC1BA-5D57-40A1-CB32-382A1CBAE84E}"/>
+              </a:ext>
+            </a:extLst>
+          </p:cNvPr>
+          <p:cNvSpPr>
+            <a:spLocks noChangeArrowheads="1"/>
+          </p:cNvSpPr>
+          <p:nvPr/>
+        </p:nvSpPr>
+        <p:spPr bwMode="auto">
+          <a:xfrm>
+            <a:off x="7207768" y="1940926"/>
+            <a:ext cx="76200" cy="182563"/>
+          </a:xfrm>
+          <a:prstGeom prst="rect">
+            <a:avLst/>
+          </a:prstGeom>
+          <a:noFill/>
+          <a:ln>
+            <a:noFill/>
+          </a:ln>
+          <a:extLst>
+            <a:ext uri="{909E8E84-426E-40DD-AFC4-6F175D3DCCD1}">
+              <a14:hiddenFill xmlns:a14="http://schemas.microsoft.com/office/drawing/2010/main">
+                <a:solidFill>
+                  <a:srgbClr val="FFFFFF"/>
+                </a:solidFill>
+              </a14:hiddenFill>
+            </a:ext>
+            <a:ext uri="{91240B29-F687-4F45-9708-019B960494DF}">
+              <a14:hiddenLine xmlns:a14="http://schemas.microsoft.com/office/drawing/2010/main" w="9525">
+                <a:solidFill>
+                  <a:srgbClr val="000000"/>
+                </a:solidFill>
+                <a:miter lim="800000"/>
+                <a:headEnd/>
+                <a:tailEnd/>
+              </a14:hiddenLine>
+            </a:ext>
+          </a:extLst>
+        </p:spPr>
+        <p:txBody>
+          <a:bodyPr wrap="none" lIns="0" tIns="0" rIns="0" bIns="0">
+            <a:spAutoFit/>
+          </a:bodyPr>
+          <a:lstStyle>
+            <a:lvl1pPr>
+              <a:spcBef>
+                <a:spcPct val="20000"/>
+              </a:spcBef>
+              <a:buChar char="•"/>
+              <a:defRPr sz="3200">
+                <a:solidFill>
+                  <a:schemeClr val="tx1"/>
+                </a:solidFill>
+                <a:latin typeface="Arial" panose="020B0604020202020204" pitchFamily="34" charset="0"/>
+              </a:defRPr>
+            </a:lvl1pPr>
+            <a:lvl2pPr marL="742950" indent="-285750">
+              <a:spcBef>
+                <a:spcPct val="20000"/>
+              </a:spcBef>
+              <a:buChar char="–"/>
+              <a:defRPr sz="2800">
+                <a:solidFill>
+                  <a:schemeClr val="tx1"/>
+                </a:solidFill>
+                <a:latin typeface="Arial" panose="020B0604020202020204" pitchFamily="34" charset="0"/>
+              </a:defRPr>
+            </a:lvl2pPr>
+            <a:lvl3pPr marL="1143000" indent="-228600">
+              <a:spcBef>
+                <a:spcPct val="20000"/>
+              </a:spcBef>
+              <a:buChar char="•"/>
+              <a:defRPr sz="2400">
+                <a:solidFill>
+                  <a:schemeClr val="tx1"/>
+                </a:solidFill>
+                <a:latin typeface="Arial" panose="020B0604020202020204" pitchFamily="34" charset="0"/>
+              </a:defRPr>
+            </a:lvl3pPr>
+            <a:lvl4pPr marL="1600200" indent="-228600">
+              <a:spcBef>
+                <a:spcPct val="20000"/>
+              </a:spcBef>
+              <a:buChar char="–"/>
+              <a:defRPr sz="2000">
+                <a:solidFill>
+                  <a:schemeClr val="tx1"/>
+                </a:solidFill>
+                <a:latin typeface="Arial" panose="020B0604020202020204" pitchFamily="34" charset="0"/>
+              </a:defRPr>
+            </a:lvl4pPr>
+            <a:lvl5pPr marL="2057400" indent="-228600">
+              <a:spcBef>
+                <a:spcPct val="20000"/>
+              </a:spcBef>
+              <a:buChar char="»"/>
+              <a:defRPr sz="2000">
+                <a:solidFill>
+                  <a:schemeClr val="tx1"/>
+                </a:solidFill>
+                <a:latin typeface="Arial" panose="020B0604020202020204" pitchFamily="34" charset="0"/>
+              </a:defRPr>
+            </a:lvl5pPr>
+            <a:lvl6pPr marL="2514600" indent="-228600" eaLnBrk="0" fontAlgn="base" hangingPunct="0">
+              <a:spcBef>
+                <a:spcPct val="20000"/>
+              </a:spcBef>
+              <a:spcAft>
+                <a:spcPct val="0"/>
+              </a:spcAft>
+              <a:buChar char="»"/>
+              <a:defRPr sz="2000">
+                <a:solidFill>
+                  <a:schemeClr val="tx1"/>
+                </a:solidFill>
+                <a:latin typeface="Arial" panose="020B0604020202020204" pitchFamily="34" charset="0"/>
+              </a:defRPr>
+            </a:lvl6pPr>
+            <a:lvl7pPr marL="2971800" indent="-228600" eaLnBrk="0" fontAlgn="base" hangingPunct="0">
+              <a:spcBef>
+                <a:spcPct val="20000"/>
+              </a:spcBef>
+              <a:spcAft>
+                <a:spcPct val="0"/>
+              </a:spcAft>
+              <a:buChar char="»"/>
+              <a:defRPr sz="2000">
+                <a:solidFill>
+                  <a:schemeClr val="tx1"/>
+                </a:solidFill>
+                <a:latin typeface="Arial" panose="020B0604020202020204" pitchFamily="34" charset="0"/>
+              </a:defRPr>
+            </a:lvl7pPr>
+            <a:lvl8pPr marL="3429000" indent="-228600" eaLnBrk="0" fontAlgn="base" hangingPunct="0">
+              <a:spcBef>
+                <a:spcPct val="20000"/>
+              </a:spcBef>
+              <a:spcAft>
+                <a:spcPct val="0"/>
+              </a:spcAft>
+              <a:buChar char="»"/>
+              <a:defRPr sz="2000">
+                <a:solidFill>
+                  <a:schemeClr val="tx1"/>
+                </a:solidFill>
+                <a:latin typeface="Arial" panose="020B0604020202020204" pitchFamily="34" charset="0"/>
+              </a:defRPr>
+            </a:lvl8pPr>
+            <a:lvl9pPr marL="3886200" indent="-228600" eaLnBrk="0" fontAlgn="base" hangingPunct="0">
+              <a:spcBef>
+                <a:spcPct val="20000"/>
+              </a:spcBef>
+              <a:spcAft>
+                <a:spcPct val="0"/>
+              </a:spcAft>
+              <a:buChar char="»"/>
+              <a:defRPr sz="2000">
+                <a:solidFill>
+                  <a:schemeClr val="tx1"/>
+                </a:solidFill>
+                <a:latin typeface="Arial" panose="020B0604020202020204" pitchFamily="34" charset="0"/>
+              </a:defRPr>
+            </a:lvl9pPr>
+          </a:lstStyle>
+          <a:p>
+            <a:pPr eaLnBrk="1" hangingPunct="1">
+              <a:spcBef>
+                <a:spcPct val="0"/>
+              </a:spcBef>
+              <a:buFontTx/>
+              <a:buNone/>
+            </a:pPr>
+            <a:r>
+              <a:rPr lang="fr-FR" altLang="fr-FR" sz="1200">
+                <a:solidFill>
+                  <a:srgbClr val="000000"/>
+                </a:solidFill>
+                <a:latin typeface="Times" panose="02020603050405020304" pitchFamily="18" charset="0"/>
+              </a:rPr>
+              <a:t>0</a:t>
+            </a:r>
+            <a:endParaRPr lang="fr-FR" altLang="fr-FR" sz="1800">
+              <a:latin typeface="Times New Roman" panose="02020603050405020304" pitchFamily="18" charset="0"/>
+            </a:endParaRPr>
+          </a:p>
+        </p:txBody>
+      </p:sp>
+      <p:grpSp>
+        <p:nvGrpSpPr>
+          <p:cNvPr id="17" name="Group 155">
+            <a:extLst>
+              <a:ext uri="{FF2B5EF4-FFF2-40B4-BE49-F238E27FC236}">
+                <a16:creationId xmlns:a16="http://schemas.microsoft.com/office/drawing/2014/main" id="{569781D7-5B03-AB05-C3B5-E985BD4D3AA0}"/>
+              </a:ext>
+            </a:extLst>
+          </p:cNvPr>
+          <p:cNvGrpSpPr>
+            <a:grpSpLocks/>
+          </p:cNvGrpSpPr>
+          <p:nvPr/>
+        </p:nvGrpSpPr>
+        <p:grpSpPr bwMode="auto">
+          <a:xfrm>
+            <a:off x="7298256" y="2337007"/>
+            <a:ext cx="98425" cy="1584325"/>
+            <a:chOff x="226" y="3082"/>
+            <a:chExt cx="48" cy="776"/>
+          </a:xfrm>
+        </p:grpSpPr>
+        <p:sp>
+          <p:nvSpPr>
+            <p:cNvPr id="18" name="Freeform 156">
+              <a:extLst>
+                <a:ext uri="{FF2B5EF4-FFF2-40B4-BE49-F238E27FC236}">
+                  <a16:creationId xmlns:a16="http://schemas.microsoft.com/office/drawing/2014/main" id="{1DAC5440-7281-18EE-307B-E58937E95F68}"/>
+                </a:ext>
+              </a:extLst>
+            </p:cNvPr>
+            <p:cNvSpPr>
+              <a:spLocks/>
+            </p:cNvSpPr>
+            <p:nvPr/>
+          </p:nvSpPr>
+          <p:spPr bwMode="auto">
+            <a:xfrm>
+              <a:off x="226" y="3082"/>
+              <a:ext cx="48" cy="88"/>
+            </a:xfrm>
+            <a:custGeom>
+              <a:avLst/>
+              <a:gdLst>
+                <a:gd name="T0" fmla="*/ 24 w 48"/>
+                <a:gd name="T1" fmla="*/ 0 h 88"/>
+                <a:gd name="T2" fmla="*/ 48 w 48"/>
+                <a:gd name="T3" fmla="*/ 88 h 88"/>
+                <a:gd name="T4" fmla="*/ 24 w 48"/>
+                <a:gd name="T5" fmla="*/ 88 h 88"/>
+                <a:gd name="T6" fmla="*/ 0 w 48"/>
+                <a:gd name="T7" fmla="*/ 88 h 88"/>
+                <a:gd name="T8" fmla="*/ 24 w 48"/>
+                <a:gd name="T9" fmla="*/ 0 h 88"/>
+                <a:gd name="T10" fmla="*/ 0 60000 65536"/>
+                <a:gd name="T11" fmla="*/ 0 60000 65536"/>
+                <a:gd name="T12" fmla="*/ 0 60000 65536"/>
+                <a:gd name="T13" fmla="*/ 0 60000 65536"/>
+                <a:gd name="T14" fmla="*/ 0 60000 65536"/>
+              </a:gdLst>
+              <a:ahLst/>
+              <a:cxnLst>
+                <a:cxn ang="T10">
+                  <a:pos x="T0" y="T1"/>
+                </a:cxn>
+                <a:cxn ang="T11">
+                  <a:pos x="T2" y="T3"/>
+                </a:cxn>
+                <a:cxn ang="T12">
+                  <a:pos x="T4" y="T5"/>
+                </a:cxn>
+                <a:cxn ang="T13">
+                  <a:pos x="T6" y="T7"/>
+                </a:cxn>
+                <a:cxn ang="T14">
+                  <a:pos x="T8" y="T9"/>
+                </a:cxn>
+              </a:cxnLst>
+              <a:rect l="0" t="0" r="r" b="b"/>
+              <a:pathLst>
+                <a:path w="48" h="88">
+                  <a:moveTo>
+                    <a:pt x="24" y="0"/>
+                  </a:moveTo>
+                  <a:lnTo>
+                    <a:pt x="48" y="88"/>
+                  </a:lnTo>
+                  <a:lnTo>
+                    <a:pt x="24" y="88"/>
+                  </a:lnTo>
+                  <a:lnTo>
+                    <a:pt x="0" y="88"/>
+                  </a:lnTo>
+                  <a:lnTo>
+                    <a:pt x="24" y="0"/>
+                  </a:lnTo>
+                  <a:close/>
+                </a:path>
+              </a:pathLst>
+            </a:custGeom>
+            <a:solidFill>
+              <a:srgbClr val="000000"/>
+            </a:solidFill>
+            <a:ln>
+              <a:noFill/>
+            </a:ln>
+            <a:extLst>
+              <a:ext uri="{91240B29-F687-4F45-9708-019B960494DF}">
+                <a14:hiddenLine xmlns:a14="http://schemas.microsoft.com/office/drawing/2010/main" w="9525">
+                  <a:solidFill>
+                    <a:srgbClr val="000000"/>
+                  </a:solidFill>
+                  <a:round/>
+                  <a:headEnd/>
+                  <a:tailEnd/>
+                </a14:hiddenLine>
+              </a:ext>
+            </a:extLst>
+          </p:spPr>
+          <p:txBody>
+            <a:bodyPr/>
+            <a:lstStyle/>
+            <a:p>
+              <a:endParaRPr lang="fr-FR"/>
+            </a:p>
+          </p:txBody>
+        </p:sp>
+        <p:sp>
+          <p:nvSpPr>
+            <p:cNvPr id="19" name="Line 157">
+              <a:extLst>
+                <a:ext uri="{FF2B5EF4-FFF2-40B4-BE49-F238E27FC236}">
+                  <a16:creationId xmlns:a16="http://schemas.microsoft.com/office/drawing/2014/main" id="{9B8B0557-1A2B-DD84-13FE-6A63E6082020}"/>
+                </a:ext>
+              </a:extLst>
+            </p:cNvPr>
+            <p:cNvSpPr>
+              <a:spLocks noChangeShapeType="1"/>
+            </p:cNvSpPr>
+            <p:nvPr/>
+          </p:nvSpPr>
+          <p:spPr bwMode="auto">
+            <a:xfrm>
+              <a:off x="250" y="3170"/>
+              <a:ext cx="1" cy="688"/>
+            </a:xfrm>
+            <a:prstGeom prst="line">
+              <a:avLst/>
+            </a:prstGeom>
+            <a:noFill/>
+            <a:ln w="12700">
+              <a:solidFill>
+                <a:srgbClr val="000000"/>
+              </a:solidFill>
+              <a:round/>
+              <a:headEnd/>
+              <a:tailEnd/>
+            </a:ln>
+            <a:extLst>
+              <a:ext uri="{909E8E84-426E-40DD-AFC4-6F175D3DCCD1}">
+                <a14:hiddenFill xmlns:a14="http://schemas.microsoft.com/office/drawing/2010/main">
+                  <a:noFill/>
+                </a14:hiddenFill>
+              </a:ext>
+            </a:extLst>
+          </p:spPr>
+          <p:txBody>
+            <a:bodyPr/>
+            <a:lstStyle/>
+            <a:p>
+              <a:endParaRPr lang="fr-FR"/>
+            </a:p>
+          </p:txBody>
+        </p:sp>
+      </p:grpSp>
+      <p:grpSp>
+        <p:nvGrpSpPr>
+          <p:cNvPr id="20" name="Group 158">
+            <a:extLst>
+              <a:ext uri="{FF2B5EF4-FFF2-40B4-BE49-F238E27FC236}">
+                <a16:creationId xmlns:a16="http://schemas.microsoft.com/office/drawing/2014/main" id="{EEB9EF64-5AFC-0E7F-B76E-0BD4D51F3E0A}"/>
+              </a:ext>
+            </a:extLst>
+          </p:cNvPr>
+          <p:cNvGrpSpPr>
+            <a:grpSpLocks/>
+          </p:cNvGrpSpPr>
+          <p:nvPr/>
+        </p:nvGrpSpPr>
+        <p:grpSpPr bwMode="auto">
+          <a:xfrm>
+            <a:off x="7272856" y="3454607"/>
+            <a:ext cx="3883025" cy="76200"/>
+            <a:chOff x="210" y="3786"/>
+            <a:chExt cx="2446" cy="48"/>
+          </a:xfrm>
+        </p:grpSpPr>
+        <p:sp>
+          <p:nvSpPr>
+            <p:cNvPr id="21" name="Freeform 159">
+              <a:extLst>
+                <a:ext uri="{FF2B5EF4-FFF2-40B4-BE49-F238E27FC236}">
+                  <a16:creationId xmlns:a16="http://schemas.microsoft.com/office/drawing/2014/main" id="{56C07240-FDF0-93D9-075B-09D9BB9AC3BD}"/>
+                </a:ext>
+              </a:extLst>
+            </p:cNvPr>
+            <p:cNvSpPr>
+              <a:spLocks/>
+            </p:cNvSpPr>
+            <p:nvPr/>
+          </p:nvSpPr>
+          <p:spPr bwMode="auto">
+            <a:xfrm>
+              <a:off x="2568" y="3786"/>
+              <a:ext cx="88" cy="48"/>
+            </a:xfrm>
+            <a:custGeom>
+              <a:avLst/>
+              <a:gdLst>
+                <a:gd name="T0" fmla="*/ 88 w 88"/>
+                <a:gd name="T1" fmla="*/ 24 h 48"/>
+                <a:gd name="T2" fmla="*/ 0 w 88"/>
+                <a:gd name="T3" fmla="*/ 48 h 48"/>
+                <a:gd name="T4" fmla="*/ 0 w 88"/>
+                <a:gd name="T5" fmla="*/ 24 h 48"/>
+                <a:gd name="T6" fmla="*/ 0 w 88"/>
+                <a:gd name="T7" fmla="*/ 0 h 48"/>
+                <a:gd name="T8" fmla="*/ 88 w 88"/>
+                <a:gd name="T9" fmla="*/ 24 h 48"/>
+                <a:gd name="T10" fmla="*/ 0 60000 65536"/>
+                <a:gd name="T11" fmla="*/ 0 60000 65536"/>
+                <a:gd name="T12" fmla="*/ 0 60000 65536"/>
+                <a:gd name="T13" fmla="*/ 0 60000 65536"/>
+                <a:gd name="T14" fmla="*/ 0 60000 65536"/>
+              </a:gdLst>
+              <a:ahLst/>
+              <a:cxnLst>
+                <a:cxn ang="T10">
+                  <a:pos x="T0" y="T1"/>
+                </a:cxn>
+                <a:cxn ang="T11">
+                  <a:pos x="T2" y="T3"/>
+                </a:cxn>
+                <a:cxn ang="T12">
+                  <a:pos x="T4" y="T5"/>
+                </a:cxn>
+                <a:cxn ang="T13">
+                  <a:pos x="T6" y="T7"/>
+                </a:cxn>
+                <a:cxn ang="T14">
+                  <a:pos x="T8" y="T9"/>
+                </a:cxn>
+              </a:cxnLst>
+              <a:rect l="0" t="0" r="r" b="b"/>
+              <a:pathLst>
+                <a:path w="88" h="48">
+                  <a:moveTo>
+                    <a:pt x="88" y="24"/>
+                  </a:moveTo>
+                  <a:lnTo>
+                    <a:pt x="0" y="48"/>
+                  </a:lnTo>
+                  <a:lnTo>
+                    <a:pt x="0" y="24"/>
+                  </a:lnTo>
+                  <a:lnTo>
+                    <a:pt x="0" y="0"/>
+                  </a:lnTo>
+                  <a:lnTo>
+                    <a:pt x="88" y="24"/>
+                  </a:lnTo>
+                  <a:close/>
+                </a:path>
+              </a:pathLst>
+            </a:custGeom>
+            <a:solidFill>
+              <a:srgbClr val="000000"/>
+            </a:solidFill>
+            <a:ln>
+              <a:noFill/>
+            </a:ln>
+            <a:extLst>
+              <a:ext uri="{91240B29-F687-4F45-9708-019B960494DF}">
+                <a14:hiddenLine xmlns:a14="http://schemas.microsoft.com/office/drawing/2010/main" w="9525">
+                  <a:solidFill>
+                    <a:srgbClr val="000000"/>
+                  </a:solidFill>
+                  <a:round/>
+                  <a:headEnd/>
+                  <a:tailEnd/>
+                </a14:hiddenLine>
+              </a:ext>
+            </a:extLst>
+          </p:spPr>
+          <p:txBody>
+            <a:bodyPr/>
+            <a:lstStyle/>
+            <a:p>
+              <a:endParaRPr lang="fr-FR"/>
+            </a:p>
+          </p:txBody>
+        </p:sp>
+        <p:sp>
+          <p:nvSpPr>
+            <p:cNvPr id="22" name="Line 160">
+              <a:extLst>
+                <a:ext uri="{FF2B5EF4-FFF2-40B4-BE49-F238E27FC236}">
+                  <a16:creationId xmlns:a16="http://schemas.microsoft.com/office/drawing/2014/main" id="{982D8BE4-52B2-B274-9F72-4FC97F630A2E}"/>
+                </a:ext>
+              </a:extLst>
+            </p:cNvPr>
+            <p:cNvSpPr>
+              <a:spLocks noChangeShapeType="1"/>
+            </p:cNvSpPr>
+            <p:nvPr/>
+          </p:nvSpPr>
+          <p:spPr bwMode="auto">
+            <a:xfrm>
+              <a:off x="210" y="3810"/>
+              <a:ext cx="2358" cy="1"/>
+            </a:xfrm>
+            <a:prstGeom prst="line">
+              <a:avLst/>
+            </a:prstGeom>
+            <a:noFill/>
+            <a:ln w="12700">
+              <a:solidFill>
+                <a:srgbClr val="000000"/>
+              </a:solidFill>
+              <a:round/>
+              <a:headEnd/>
+              <a:tailEnd/>
+            </a:ln>
+            <a:extLst>
+              <a:ext uri="{909E8E84-426E-40DD-AFC4-6F175D3DCCD1}">
+                <a14:hiddenFill xmlns:a14="http://schemas.microsoft.com/office/drawing/2010/main">
+                  <a:noFill/>
+                </a14:hiddenFill>
+              </a:ext>
+            </a:extLst>
+          </p:spPr>
+          <p:txBody>
+            <a:bodyPr/>
+            <a:lstStyle/>
+            <a:p>
+              <a:endParaRPr lang="fr-FR"/>
+            </a:p>
+          </p:txBody>
+        </p:sp>
+      </p:grpSp>
+      <p:sp>
+        <p:nvSpPr>
+          <p:cNvPr id="23" name="Rectangle 164">
+            <a:extLst>
+              <a:ext uri="{FF2B5EF4-FFF2-40B4-BE49-F238E27FC236}">
+                <a16:creationId xmlns:a16="http://schemas.microsoft.com/office/drawing/2014/main" id="{AC776233-262D-F84B-D2E7-D9217ED9A444}"/>
+              </a:ext>
+            </a:extLst>
+          </p:cNvPr>
+          <p:cNvSpPr>
+            <a:spLocks noChangeArrowheads="1"/>
+          </p:cNvSpPr>
+          <p:nvPr/>
+        </p:nvSpPr>
+        <p:spPr bwMode="auto">
+          <a:xfrm>
+            <a:off x="7687193" y="2248200"/>
+            <a:ext cx="193964" cy="246221"/>
+          </a:xfrm>
+          <a:prstGeom prst="rect">
+            <a:avLst/>
+          </a:prstGeom>
+          <a:noFill/>
+          <a:ln>
+            <a:noFill/>
+          </a:ln>
+          <a:extLst>
+            <a:ext uri="{909E8E84-426E-40DD-AFC4-6F175D3DCCD1}">
+              <a14:hiddenFill xmlns:a14="http://schemas.microsoft.com/office/drawing/2010/main">
+                <a:solidFill>
+                  <a:srgbClr val="FFFFFF"/>
+                </a:solidFill>
+              </a14:hiddenFill>
+            </a:ext>
+            <a:ext uri="{91240B29-F687-4F45-9708-019B960494DF}">
+              <a14:hiddenLine xmlns:a14="http://schemas.microsoft.com/office/drawing/2010/main" w="9525">
+                <a:solidFill>
+                  <a:srgbClr val="000000"/>
+                </a:solidFill>
+                <a:miter lim="800000"/>
+                <a:headEnd/>
+                <a:tailEnd/>
+              </a14:hiddenLine>
+            </a:ext>
+          </a:extLst>
+        </p:spPr>
+        <p:txBody>
+          <a:bodyPr wrap="none" lIns="0" tIns="0" rIns="0" bIns="0">
+            <a:spAutoFit/>
+          </a:bodyPr>
+          <a:lstStyle>
+            <a:lvl1pPr>
+              <a:spcBef>
+                <a:spcPct val="20000"/>
+              </a:spcBef>
+              <a:buChar char="•"/>
+              <a:defRPr sz="3200">
+                <a:solidFill>
+                  <a:schemeClr val="tx1"/>
+                </a:solidFill>
+                <a:latin typeface="Arial" panose="020B0604020202020204" pitchFamily="34" charset="0"/>
+              </a:defRPr>
+            </a:lvl1pPr>
+            <a:lvl2pPr marL="742950" indent="-285750">
+              <a:spcBef>
+                <a:spcPct val="20000"/>
+              </a:spcBef>
+              <a:buChar char="–"/>
+              <a:defRPr sz="2800">
+                <a:solidFill>
+                  <a:schemeClr val="tx1"/>
+                </a:solidFill>
+                <a:latin typeface="Arial" panose="020B0604020202020204" pitchFamily="34" charset="0"/>
+              </a:defRPr>
+            </a:lvl2pPr>
+            <a:lvl3pPr marL="1143000" indent="-228600">
+              <a:spcBef>
+                <a:spcPct val="20000"/>
+              </a:spcBef>
+              <a:buChar char="•"/>
+              <a:defRPr sz="2400">
+                <a:solidFill>
+                  <a:schemeClr val="tx1"/>
+                </a:solidFill>
+                <a:latin typeface="Arial" panose="020B0604020202020204" pitchFamily="34" charset="0"/>
+              </a:defRPr>
+            </a:lvl3pPr>
+            <a:lvl4pPr marL="1600200" indent="-228600">
+              <a:spcBef>
+                <a:spcPct val="20000"/>
+              </a:spcBef>
+              <a:buChar char="–"/>
+              <a:defRPr sz="2000">
+                <a:solidFill>
+                  <a:schemeClr val="tx1"/>
+                </a:solidFill>
+                <a:latin typeface="Arial" panose="020B0604020202020204" pitchFamily="34" charset="0"/>
+              </a:defRPr>
+            </a:lvl4pPr>
+            <a:lvl5pPr marL="2057400" indent="-228600">
+              <a:spcBef>
+                <a:spcPct val="20000"/>
+              </a:spcBef>
+              <a:buChar char="»"/>
+              <a:defRPr sz="2000">
+                <a:solidFill>
+                  <a:schemeClr val="tx1"/>
+                </a:solidFill>
+                <a:latin typeface="Arial" panose="020B0604020202020204" pitchFamily="34" charset="0"/>
+              </a:defRPr>
+            </a:lvl5pPr>
+            <a:lvl6pPr marL="2514600" indent="-228600" eaLnBrk="0" fontAlgn="base" hangingPunct="0">
+              <a:spcBef>
+                <a:spcPct val="20000"/>
+              </a:spcBef>
+              <a:spcAft>
+                <a:spcPct val="0"/>
+              </a:spcAft>
+              <a:buChar char="»"/>
+              <a:defRPr sz="2000">
+                <a:solidFill>
+                  <a:schemeClr val="tx1"/>
+                </a:solidFill>
+                <a:latin typeface="Arial" panose="020B0604020202020204" pitchFamily="34" charset="0"/>
+              </a:defRPr>
+            </a:lvl6pPr>
+            <a:lvl7pPr marL="2971800" indent="-228600" eaLnBrk="0" fontAlgn="base" hangingPunct="0">
+              <a:spcBef>
+                <a:spcPct val="20000"/>
+              </a:spcBef>
+              <a:spcAft>
+                <a:spcPct val="0"/>
+              </a:spcAft>
+              <a:buChar char="»"/>
+              <a:defRPr sz="2000">
+                <a:solidFill>
+                  <a:schemeClr val="tx1"/>
+                </a:solidFill>
+                <a:latin typeface="Arial" panose="020B0604020202020204" pitchFamily="34" charset="0"/>
+              </a:defRPr>
+            </a:lvl7pPr>
+            <a:lvl8pPr marL="3429000" indent="-228600" eaLnBrk="0" fontAlgn="base" hangingPunct="0">
+              <a:spcBef>
+                <a:spcPct val="20000"/>
+              </a:spcBef>
+              <a:spcAft>
+                <a:spcPct val="0"/>
+              </a:spcAft>
+              <a:buChar char="»"/>
+              <a:defRPr sz="2000">
+                <a:solidFill>
+                  <a:schemeClr val="tx1"/>
+                </a:solidFill>
+                <a:latin typeface="Arial" panose="020B0604020202020204" pitchFamily="34" charset="0"/>
+              </a:defRPr>
+            </a:lvl8pPr>
+            <a:lvl9pPr marL="3886200" indent="-228600" eaLnBrk="0" fontAlgn="base" hangingPunct="0">
+              <a:spcBef>
+                <a:spcPct val="20000"/>
+              </a:spcBef>
+              <a:spcAft>
+                <a:spcPct val="0"/>
+              </a:spcAft>
+              <a:buChar char="»"/>
+              <a:defRPr sz="2000">
+                <a:solidFill>
+                  <a:schemeClr val="tx1"/>
+                </a:solidFill>
+                <a:latin typeface="Arial" panose="020B0604020202020204" pitchFamily="34" charset="0"/>
+              </a:defRPr>
+            </a:lvl9pPr>
+          </a:lstStyle>
+          <a:p>
+            <a:pPr eaLnBrk="1" hangingPunct="1">
+              <a:spcBef>
+                <a:spcPct val="0"/>
+              </a:spcBef>
+              <a:buFontTx/>
+              <a:buNone/>
+            </a:pPr>
+            <a:r>
+              <a:rPr lang="fr-FR" altLang="fr-FR" sz="1600" b="1" dirty="0" err="1">
+                <a:solidFill>
+                  <a:srgbClr val="000000"/>
+                </a:solidFill>
+                <a:latin typeface="Times" panose="02020603050405020304" pitchFamily="18" charset="0"/>
+              </a:rPr>
+              <a:t>v</a:t>
+            </a:r>
+            <a:r>
+              <a:rPr lang="fr-FR" altLang="fr-FR" sz="1600" b="1" baseline="-25000" dirty="0" err="1">
+                <a:solidFill>
+                  <a:srgbClr val="000000"/>
+                </a:solidFill>
+                <a:latin typeface="Times" panose="02020603050405020304" pitchFamily="18" charset="0"/>
+              </a:rPr>
+              <a:t>T</a:t>
+            </a:r>
+            <a:endParaRPr lang="fr-FR" altLang="fr-FR" sz="1600" b="1" baseline="-25000" dirty="0">
+              <a:latin typeface="Times New Roman" panose="02020603050405020304" pitchFamily="18" charset="0"/>
+            </a:endParaRPr>
+          </a:p>
+        </p:txBody>
+      </p:sp>
+      <p:sp>
+        <p:nvSpPr>
+          <p:cNvPr id="24" name="Rectangle 169">
+            <a:extLst>
+              <a:ext uri="{FF2B5EF4-FFF2-40B4-BE49-F238E27FC236}">
+                <a16:creationId xmlns:a16="http://schemas.microsoft.com/office/drawing/2014/main" id="{50F61ECC-282D-CA70-86D8-54475279AFD4}"/>
+              </a:ext>
+            </a:extLst>
+          </p:cNvPr>
+          <p:cNvSpPr>
+            <a:spLocks noChangeArrowheads="1"/>
+          </p:cNvSpPr>
+          <p:nvPr/>
+        </p:nvSpPr>
+        <p:spPr bwMode="auto">
+          <a:xfrm>
+            <a:off x="10990781" y="3215847"/>
+            <a:ext cx="57708" cy="246221"/>
+          </a:xfrm>
+          <a:prstGeom prst="rect">
+            <a:avLst/>
+          </a:prstGeom>
+          <a:noFill/>
+          <a:ln>
+            <a:noFill/>
+          </a:ln>
+          <a:extLst>
+            <a:ext uri="{909E8E84-426E-40DD-AFC4-6F175D3DCCD1}">
+              <a14:hiddenFill xmlns:a14="http://schemas.microsoft.com/office/drawing/2010/main">
+                <a:solidFill>
+                  <a:srgbClr val="FFFFFF"/>
+                </a:solidFill>
+              </a14:hiddenFill>
+            </a:ext>
+            <a:ext uri="{91240B29-F687-4F45-9708-019B960494DF}">
+              <a14:hiddenLine xmlns:a14="http://schemas.microsoft.com/office/drawing/2010/main" w="9525">
+                <a:solidFill>
+                  <a:srgbClr val="000000"/>
+                </a:solidFill>
+                <a:miter lim="800000"/>
+                <a:headEnd/>
+                <a:tailEnd/>
+              </a14:hiddenLine>
+            </a:ext>
+          </a:extLst>
+        </p:spPr>
+        <p:txBody>
+          <a:bodyPr wrap="none" lIns="0" tIns="0" rIns="0" bIns="0">
+            <a:spAutoFit/>
+          </a:bodyPr>
+          <a:lstStyle>
+            <a:lvl1pPr>
+              <a:spcBef>
+                <a:spcPct val="20000"/>
+              </a:spcBef>
+              <a:buChar char="•"/>
+              <a:defRPr sz="3200">
+                <a:solidFill>
+                  <a:schemeClr val="tx1"/>
+                </a:solidFill>
+                <a:latin typeface="Arial" panose="020B0604020202020204" pitchFamily="34" charset="0"/>
+              </a:defRPr>
+            </a:lvl1pPr>
+            <a:lvl2pPr marL="742950" indent="-285750">
+              <a:spcBef>
+                <a:spcPct val="20000"/>
+              </a:spcBef>
+              <a:buChar char="–"/>
+              <a:defRPr sz="2800">
+                <a:solidFill>
+                  <a:schemeClr val="tx1"/>
+                </a:solidFill>
+                <a:latin typeface="Arial" panose="020B0604020202020204" pitchFamily="34" charset="0"/>
+              </a:defRPr>
+            </a:lvl2pPr>
+            <a:lvl3pPr marL="1143000" indent="-228600">
+              <a:spcBef>
+                <a:spcPct val="20000"/>
+              </a:spcBef>
+              <a:buChar char="•"/>
+              <a:defRPr sz="2400">
+                <a:solidFill>
+                  <a:schemeClr val="tx1"/>
+                </a:solidFill>
+                <a:latin typeface="Arial" panose="020B0604020202020204" pitchFamily="34" charset="0"/>
+              </a:defRPr>
+            </a:lvl3pPr>
+            <a:lvl4pPr marL="1600200" indent="-228600">
+              <a:spcBef>
+                <a:spcPct val="20000"/>
+              </a:spcBef>
+              <a:buChar char="–"/>
+              <a:defRPr sz="2000">
+                <a:solidFill>
+                  <a:schemeClr val="tx1"/>
+                </a:solidFill>
+                <a:latin typeface="Arial" panose="020B0604020202020204" pitchFamily="34" charset="0"/>
+              </a:defRPr>
+            </a:lvl4pPr>
+            <a:lvl5pPr marL="2057400" indent="-228600">
+              <a:spcBef>
+                <a:spcPct val="20000"/>
+              </a:spcBef>
+              <a:buChar char="»"/>
+              <a:defRPr sz="2000">
+                <a:solidFill>
+                  <a:schemeClr val="tx1"/>
+                </a:solidFill>
+                <a:latin typeface="Arial" panose="020B0604020202020204" pitchFamily="34" charset="0"/>
+              </a:defRPr>
+            </a:lvl5pPr>
+            <a:lvl6pPr marL="2514600" indent="-228600" eaLnBrk="0" fontAlgn="base" hangingPunct="0">
+              <a:spcBef>
+                <a:spcPct val="20000"/>
+              </a:spcBef>
+              <a:spcAft>
+                <a:spcPct val="0"/>
+              </a:spcAft>
+              <a:buChar char="»"/>
+              <a:defRPr sz="2000">
+                <a:solidFill>
+                  <a:schemeClr val="tx1"/>
+                </a:solidFill>
+                <a:latin typeface="Arial" panose="020B0604020202020204" pitchFamily="34" charset="0"/>
+              </a:defRPr>
+            </a:lvl6pPr>
+            <a:lvl7pPr marL="2971800" indent="-228600" eaLnBrk="0" fontAlgn="base" hangingPunct="0">
+              <a:spcBef>
+                <a:spcPct val="20000"/>
+              </a:spcBef>
+              <a:spcAft>
+                <a:spcPct val="0"/>
+              </a:spcAft>
+              <a:buChar char="»"/>
+              <a:defRPr sz="2000">
+                <a:solidFill>
+                  <a:schemeClr val="tx1"/>
+                </a:solidFill>
+                <a:latin typeface="Arial" panose="020B0604020202020204" pitchFamily="34" charset="0"/>
+              </a:defRPr>
+            </a:lvl7pPr>
+            <a:lvl8pPr marL="3429000" indent="-228600" eaLnBrk="0" fontAlgn="base" hangingPunct="0">
+              <a:spcBef>
+                <a:spcPct val="20000"/>
+              </a:spcBef>
+              <a:spcAft>
+                <a:spcPct val="0"/>
+              </a:spcAft>
+              <a:buChar char="»"/>
+              <a:defRPr sz="2000">
+                <a:solidFill>
+                  <a:schemeClr val="tx1"/>
+                </a:solidFill>
+                <a:latin typeface="Arial" panose="020B0604020202020204" pitchFamily="34" charset="0"/>
+              </a:defRPr>
+            </a:lvl8pPr>
+            <a:lvl9pPr marL="3886200" indent="-228600" eaLnBrk="0" fontAlgn="base" hangingPunct="0">
+              <a:spcBef>
+                <a:spcPct val="20000"/>
+              </a:spcBef>
+              <a:spcAft>
+                <a:spcPct val="0"/>
+              </a:spcAft>
+              <a:buChar char="»"/>
+              <a:defRPr sz="2000">
+                <a:solidFill>
+                  <a:schemeClr val="tx1"/>
+                </a:solidFill>
+                <a:latin typeface="Arial" panose="020B0604020202020204" pitchFamily="34" charset="0"/>
+              </a:defRPr>
+            </a:lvl9pPr>
+          </a:lstStyle>
+          <a:p>
+            <a:pPr eaLnBrk="1" hangingPunct="1">
+              <a:spcBef>
+                <a:spcPct val="0"/>
+              </a:spcBef>
+              <a:buFontTx/>
+              <a:buNone/>
+            </a:pPr>
+            <a:r>
+              <a:rPr lang="fr-FR" altLang="fr-FR" sz="1600">
+                <a:solidFill>
+                  <a:srgbClr val="000000"/>
+                </a:solidFill>
+                <a:latin typeface="Times" panose="02020603050405020304" pitchFamily="18" charset="0"/>
+              </a:rPr>
+              <a:t>t</a:t>
+            </a:r>
+            <a:endParaRPr lang="fr-FR" altLang="fr-FR" sz="1600">
+              <a:latin typeface="Times New Roman" panose="02020603050405020304" pitchFamily="18" charset="0"/>
+            </a:endParaRPr>
+          </a:p>
+        </p:txBody>
+      </p:sp>
+      <p:sp>
+        <p:nvSpPr>
+          <p:cNvPr id="25" name="Rectangle 170">
+            <a:extLst>
+              <a:ext uri="{FF2B5EF4-FFF2-40B4-BE49-F238E27FC236}">
+                <a16:creationId xmlns:a16="http://schemas.microsoft.com/office/drawing/2014/main" id="{53E59A92-7B9B-965C-4661-418041AC0644}"/>
+              </a:ext>
+            </a:extLst>
+          </p:cNvPr>
+          <p:cNvSpPr>
+            <a:spLocks noChangeArrowheads="1"/>
+          </p:cNvSpPr>
+          <p:nvPr/>
+        </p:nvSpPr>
+        <p:spPr bwMode="auto">
+          <a:xfrm>
+            <a:off x="7234756" y="3518107"/>
+            <a:ext cx="76200" cy="182563"/>
+          </a:xfrm>
+          <a:prstGeom prst="rect">
+            <a:avLst/>
+          </a:prstGeom>
+          <a:noFill/>
+          <a:ln>
+            <a:noFill/>
+          </a:ln>
+          <a:extLst>
+            <a:ext uri="{909E8E84-426E-40DD-AFC4-6F175D3DCCD1}">
+              <a14:hiddenFill xmlns:a14="http://schemas.microsoft.com/office/drawing/2010/main">
+                <a:solidFill>
+                  <a:srgbClr val="FFFFFF"/>
+                </a:solidFill>
+              </a14:hiddenFill>
+            </a:ext>
+            <a:ext uri="{91240B29-F687-4F45-9708-019B960494DF}">
+              <a14:hiddenLine xmlns:a14="http://schemas.microsoft.com/office/drawing/2010/main" w="9525">
+                <a:solidFill>
+                  <a:srgbClr val="000000"/>
+                </a:solidFill>
+                <a:miter lim="800000"/>
+                <a:headEnd/>
+                <a:tailEnd/>
+              </a14:hiddenLine>
+            </a:ext>
+          </a:extLst>
+        </p:spPr>
+        <p:txBody>
+          <a:bodyPr wrap="none" lIns="0" tIns="0" rIns="0" bIns="0">
+            <a:spAutoFit/>
+          </a:bodyPr>
+          <a:lstStyle>
+            <a:lvl1pPr>
+              <a:spcBef>
+                <a:spcPct val="20000"/>
+              </a:spcBef>
+              <a:buChar char="•"/>
+              <a:defRPr sz="3200">
+                <a:solidFill>
+                  <a:schemeClr val="tx1"/>
+                </a:solidFill>
+                <a:latin typeface="Arial" panose="020B0604020202020204" pitchFamily="34" charset="0"/>
+              </a:defRPr>
+            </a:lvl1pPr>
+            <a:lvl2pPr marL="742950" indent="-285750">
+              <a:spcBef>
+                <a:spcPct val="20000"/>
+              </a:spcBef>
+              <a:buChar char="–"/>
+              <a:defRPr sz="2800">
+                <a:solidFill>
+                  <a:schemeClr val="tx1"/>
+                </a:solidFill>
+                <a:latin typeface="Arial" panose="020B0604020202020204" pitchFamily="34" charset="0"/>
+              </a:defRPr>
+            </a:lvl2pPr>
+            <a:lvl3pPr marL="1143000" indent="-228600">
+              <a:spcBef>
+                <a:spcPct val="20000"/>
+              </a:spcBef>
+              <a:buChar char="•"/>
+              <a:defRPr sz="2400">
+                <a:solidFill>
+                  <a:schemeClr val="tx1"/>
+                </a:solidFill>
+                <a:latin typeface="Arial" panose="020B0604020202020204" pitchFamily="34" charset="0"/>
+              </a:defRPr>
+            </a:lvl3pPr>
+            <a:lvl4pPr marL="1600200" indent="-228600">
+              <a:spcBef>
+                <a:spcPct val="20000"/>
+              </a:spcBef>
+              <a:buChar char="–"/>
+              <a:defRPr sz="2000">
+                <a:solidFill>
+                  <a:schemeClr val="tx1"/>
+                </a:solidFill>
+                <a:latin typeface="Arial" panose="020B0604020202020204" pitchFamily="34" charset="0"/>
+              </a:defRPr>
+            </a:lvl4pPr>
+            <a:lvl5pPr marL="2057400" indent="-228600">
+              <a:spcBef>
+                <a:spcPct val="20000"/>
+              </a:spcBef>
+              <a:buChar char="»"/>
+              <a:defRPr sz="2000">
+                <a:solidFill>
+                  <a:schemeClr val="tx1"/>
+                </a:solidFill>
+                <a:latin typeface="Arial" panose="020B0604020202020204" pitchFamily="34" charset="0"/>
+              </a:defRPr>
+            </a:lvl5pPr>
+            <a:lvl6pPr marL="2514600" indent="-228600" eaLnBrk="0" fontAlgn="base" hangingPunct="0">
+              <a:spcBef>
+                <a:spcPct val="20000"/>
+              </a:spcBef>
+              <a:spcAft>
+                <a:spcPct val="0"/>
+              </a:spcAft>
+              <a:buChar char="»"/>
+              <a:defRPr sz="2000">
+                <a:solidFill>
+                  <a:schemeClr val="tx1"/>
+                </a:solidFill>
+                <a:latin typeface="Arial" panose="020B0604020202020204" pitchFamily="34" charset="0"/>
+              </a:defRPr>
+            </a:lvl6pPr>
+            <a:lvl7pPr marL="2971800" indent="-228600" eaLnBrk="0" fontAlgn="base" hangingPunct="0">
+              <a:spcBef>
+                <a:spcPct val="20000"/>
+              </a:spcBef>
+              <a:spcAft>
+                <a:spcPct val="0"/>
+              </a:spcAft>
+              <a:buChar char="»"/>
+              <a:defRPr sz="2000">
+                <a:solidFill>
+                  <a:schemeClr val="tx1"/>
+                </a:solidFill>
+                <a:latin typeface="Arial" panose="020B0604020202020204" pitchFamily="34" charset="0"/>
+              </a:defRPr>
+            </a:lvl7pPr>
+            <a:lvl8pPr marL="3429000" indent="-228600" eaLnBrk="0" fontAlgn="base" hangingPunct="0">
+              <a:spcBef>
+                <a:spcPct val="20000"/>
+              </a:spcBef>
+              <a:spcAft>
+                <a:spcPct val="0"/>
+              </a:spcAft>
+              <a:buChar char="»"/>
+              <a:defRPr sz="2000">
+                <a:solidFill>
+                  <a:schemeClr val="tx1"/>
+                </a:solidFill>
+                <a:latin typeface="Arial" panose="020B0604020202020204" pitchFamily="34" charset="0"/>
+              </a:defRPr>
+            </a:lvl8pPr>
+            <a:lvl9pPr marL="3886200" indent="-228600" eaLnBrk="0" fontAlgn="base" hangingPunct="0">
+              <a:spcBef>
+                <a:spcPct val="20000"/>
+              </a:spcBef>
+              <a:spcAft>
+                <a:spcPct val="0"/>
+              </a:spcAft>
+              <a:buChar char="»"/>
+              <a:defRPr sz="2000">
+                <a:solidFill>
+                  <a:schemeClr val="tx1"/>
+                </a:solidFill>
+                <a:latin typeface="Arial" panose="020B0604020202020204" pitchFamily="34" charset="0"/>
+              </a:defRPr>
+            </a:lvl9pPr>
+          </a:lstStyle>
+          <a:p>
+            <a:pPr eaLnBrk="1" hangingPunct="1">
+              <a:spcBef>
+                <a:spcPct val="0"/>
+              </a:spcBef>
+              <a:buFontTx/>
+              <a:buNone/>
+            </a:pPr>
+            <a:r>
+              <a:rPr lang="fr-FR" altLang="fr-FR" sz="1200">
+                <a:solidFill>
+                  <a:srgbClr val="000000"/>
+                </a:solidFill>
+                <a:latin typeface="Times" panose="02020603050405020304" pitchFamily="18" charset="0"/>
+              </a:rPr>
+              <a:t>0</a:t>
+            </a:r>
+            <a:endParaRPr lang="fr-FR" altLang="fr-FR" sz="1800">
+              <a:latin typeface="Times New Roman" panose="02020603050405020304" pitchFamily="18" charset="0"/>
+            </a:endParaRPr>
+          </a:p>
+        </p:txBody>
+      </p:sp>
+      <p:sp>
+        <p:nvSpPr>
+          <p:cNvPr id="26" name="Line 171">
+            <a:extLst>
+              <a:ext uri="{FF2B5EF4-FFF2-40B4-BE49-F238E27FC236}">
+                <a16:creationId xmlns:a16="http://schemas.microsoft.com/office/drawing/2014/main" id="{51851A40-DF63-9640-802B-C40B14D94C2D}"/>
+              </a:ext>
+            </a:extLst>
+          </p:cNvPr>
+          <p:cNvSpPr>
+            <a:spLocks noChangeShapeType="1"/>
+          </p:cNvSpPr>
+          <p:nvPr/>
+        </p:nvSpPr>
+        <p:spPr bwMode="auto">
+          <a:xfrm>
+            <a:off x="8058669" y="2629107"/>
+            <a:ext cx="1587" cy="863600"/>
+          </a:xfrm>
+          <a:prstGeom prst="line">
+            <a:avLst/>
+          </a:prstGeom>
+          <a:noFill/>
+          <a:ln w="28575">
+            <a:solidFill>
+              <a:srgbClr val="000000"/>
+            </a:solidFill>
+            <a:round/>
+            <a:headEnd/>
+            <a:tailEnd/>
+          </a:ln>
+          <a:extLst>
+            <a:ext uri="{909E8E84-426E-40DD-AFC4-6F175D3DCCD1}">
+              <a14:hiddenFill xmlns:a14="http://schemas.microsoft.com/office/drawing/2010/main">
+                <a:noFill/>
+              </a14:hiddenFill>
+            </a:ext>
+          </a:extLst>
+        </p:spPr>
+        <p:txBody>
+          <a:bodyPr/>
+          <a:lstStyle/>
+          <a:p>
+            <a:endParaRPr lang="fr-FR"/>
+          </a:p>
+        </p:txBody>
+      </p:sp>
+      <p:sp>
+        <p:nvSpPr>
+          <p:cNvPr id="27" name="Line 172">
+            <a:extLst>
+              <a:ext uri="{FF2B5EF4-FFF2-40B4-BE49-F238E27FC236}">
+                <a16:creationId xmlns:a16="http://schemas.microsoft.com/office/drawing/2014/main" id="{354EF437-228A-B5E9-9C32-BC36BA8BB1C4}"/>
+              </a:ext>
+            </a:extLst>
+          </p:cNvPr>
+          <p:cNvSpPr>
+            <a:spLocks noChangeShapeType="1"/>
+          </p:cNvSpPr>
+          <p:nvPr/>
+        </p:nvSpPr>
+        <p:spPr bwMode="auto">
+          <a:xfrm>
+            <a:off x="8967266" y="2613867"/>
+            <a:ext cx="0" cy="258017"/>
+          </a:xfrm>
+          <a:prstGeom prst="line">
+            <a:avLst/>
+          </a:prstGeom>
+          <a:noFill/>
+          <a:ln w="28575">
+            <a:solidFill>
+              <a:srgbClr val="000000"/>
+            </a:solidFill>
+            <a:round/>
+            <a:headEnd/>
+            <a:tailEnd/>
+          </a:ln>
+          <a:extLst>
+            <a:ext uri="{909E8E84-426E-40DD-AFC4-6F175D3DCCD1}">
+              <a14:hiddenFill xmlns:a14="http://schemas.microsoft.com/office/drawing/2010/main">
+                <a:noFill/>
+              </a14:hiddenFill>
+            </a:ext>
+          </a:extLst>
+        </p:spPr>
+        <p:txBody>
+          <a:bodyPr/>
+          <a:lstStyle/>
+          <a:p>
+            <a:endParaRPr lang="fr-FR"/>
+          </a:p>
+        </p:txBody>
+      </p:sp>
+      <p:sp>
+        <p:nvSpPr>
+          <p:cNvPr id="28" name="Line 173">
+            <a:extLst>
+              <a:ext uri="{FF2B5EF4-FFF2-40B4-BE49-F238E27FC236}">
+                <a16:creationId xmlns:a16="http://schemas.microsoft.com/office/drawing/2014/main" id="{009B7E43-C06C-182B-A54C-716796492854}"/>
+              </a:ext>
+            </a:extLst>
+          </p:cNvPr>
+          <p:cNvSpPr>
+            <a:spLocks noChangeShapeType="1"/>
+          </p:cNvSpPr>
+          <p:nvPr/>
+        </p:nvSpPr>
+        <p:spPr bwMode="auto">
+          <a:xfrm>
+            <a:off x="8058668" y="2629107"/>
+            <a:ext cx="897575" cy="0"/>
+          </a:xfrm>
+          <a:prstGeom prst="line">
+            <a:avLst/>
+          </a:prstGeom>
+          <a:noFill/>
+          <a:ln w="28575">
+            <a:solidFill>
+              <a:srgbClr val="000000"/>
+            </a:solidFill>
+            <a:round/>
+            <a:headEnd/>
+            <a:tailEnd/>
+          </a:ln>
+          <a:extLst>
+            <a:ext uri="{909E8E84-426E-40DD-AFC4-6F175D3DCCD1}">
+              <a14:hiddenFill xmlns:a14="http://schemas.microsoft.com/office/drawing/2010/main">
+                <a:noFill/>
+              </a14:hiddenFill>
+            </a:ext>
+          </a:extLst>
+        </p:spPr>
+        <p:txBody>
+          <a:bodyPr/>
+          <a:lstStyle/>
+          <a:p>
+            <a:endParaRPr lang="fr-FR"/>
+          </a:p>
+        </p:txBody>
+      </p:sp>
+      <p:sp>
+        <p:nvSpPr>
+          <p:cNvPr id="29" name="Text Box 174">
+            <a:extLst>
+              <a:ext uri="{FF2B5EF4-FFF2-40B4-BE49-F238E27FC236}">
+                <a16:creationId xmlns:a16="http://schemas.microsoft.com/office/drawing/2014/main" id="{43B2D9B4-61BF-8771-AEC1-B2AE0973B1A0}"/>
+              </a:ext>
+            </a:extLst>
+          </p:cNvPr>
+          <p:cNvSpPr txBox="1">
+            <a:spLocks noChangeArrowheads="1"/>
+          </p:cNvSpPr>
+          <p:nvPr/>
+        </p:nvSpPr>
+        <p:spPr bwMode="auto">
+          <a:xfrm>
+            <a:off x="7356442" y="917574"/>
+            <a:ext cx="308098" cy="338554"/>
+          </a:xfrm>
+          <a:prstGeom prst="rect">
+            <a:avLst/>
+          </a:prstGeom>
+          <a:noFill/>
+          <a:ln>
+            <a:noFill/>
+          </a:ln>
+          <a:effectLst/>
+          <a:extLst>
+            <a:ext uri="{909E8E84-426E-40DD-AFC4-6F175D3DCCD1}">
+              <a14:hiddenFill xmlns:a14="http://schemas.microsoft.com/office/drawing/2010/main">
+                <a:solidFill>
+                  <a:schemeClr val="accent1"/>
+                </a:solidFill>
+              </a14:hiddenFill>
+            </a:ext>
+            <a:ext uri="{91240B29-F687-4F45-9708-019B960494DF}">
+              <a14:hiddenLine xmlns:a14="http://schemas.microsoft.com/office/drawing/2010/main" w="9525">
+                <a:solidFill>
+                  <a:schemeClr val="tx1"/>
+                </a:solidFill>
+                <a:miter lim="800000"/>
+                <a:headEnd/>
+                <a:tailEnd/>
+              </a14:hiddenLine>
+            </a:ext>
+            <a:ext uri="{AF507438-7753-43E0-B8FC-AC1667EBCBE1}">
+              <a14:hiddenEffects xmlns:a14="http://schemas.microsoft.com/office/drawing/2010/main">
+                <a:effectLst>
+                  <a:outerShdw dist="35921" dir="2700000" algn="ctr" rotWithShape="0">
+                    <a:schemeClr val="bg2"/>
+                  </a:outerShdw>
+                </a:effectLst>
+              </a14:hiddenEffects>
+            </a:ext>
+          </a:extLst>
+        </p:spPr>
+        <p:txBody>
+          <a:bodyPr wrap="none">
+            <a:spAutoFit/>
+          </a:bodyPr>
+          <a:lstStyle>
+            <a:lvl1pPr>
+              <a:spcBef>
+                <a:spcPct val="20000"/>
+              </a:spcBef>
+              <a:buChar char="•"/>
+              <a:defRPr sz="3200">
+                <a:solidFill>
+                  <a:schemeClr val="tx1"/>
+                </a:solidFill>
+                <a:latin typeface="Arial" panose="020B0604020202020204" pitchFamily="34" charset="0"/>
+              </a:defRPr>
+            </a:lvl1pPr>
+            <a:lvl2pPr marL="742950" indent="-285750">
+              <a:spcBef>
+                <a:spcPct val="20000"/>
+              </a:spcBef>
+              <a:buChar char="–"/>
+              <a:defRPr sz="2800">
+                <a:solidFill>
+                  <a:schemeClr val="tx1"/>
+                </a:solidFill>
+                <a:latin typeface="Arial" panose="020B0604020202020204" pitchFamily="34" charset="0"/>
+              </a:defRPr>
+            </a:lvl2pPr>
+            <a:lvl3pPr marL="1143000" indent="-228600">
+              <a:spcBef>
+                <a:spcPct val="20000"/>
+              </a:spcBef>
+              <a:buChar char="•"/>
+              <a:defRPr sz="2400">
+                <a:solidFill>
+                  <a:schemeClr val="tx1"/>
+                </a:solidFill>
+                <a:latin typeface="Arial" panose="020B0604020202020204" pitchFamily="34" charset="0"/>
+              </a:defRPr>
+            </a:lvl3pPr>
+            <a:lvl4pPr marL="1600200" indent="-228600">
+              <a:spcBef>
+                <a:spcPct val="20000"/>
+              </a:spcBef>
+              <a:buChar char="–"/>
+              <a:defRPr sz="2000">
+                <a:solidFill>
+                  <a:schemeClr val="tx1"/>
+                </a:solidFill>
+                <a:latin typeface="Arial" panose="020B0604020202020204" pitchFamily="34" charset="0"/>
+              </a:defRPr>
+            </a:lvl4pPr>
+            <a:lvl5pPr marL="2057400" indent="-228600">
+              <a:spcBef>
+                <a:spcPct val="20000"/>
+              </a:spcBef>
+              <a:buChar char="»"/>
+              <a:defRPr sz="2000">
+                <a:solidFill>
+                  <a:schemeClr val="tx1"/>
+                </a:solidFill>
+                <a:latin typeface="Arial" panose="020B0604020202020204" pitchFamily="34" charset="0"/>
+              </a:defRPr>
+            </a:lvl5pPr>
+            <a:lvl6pPr marL="2514600" indent="-228600" eaLnBrk="0" fontAlgn="base" hangingPunct="0">
+              <a:spcBef>
+                <a:spcPct val="20000"/>
+              </a:spcBef>
+              <a:spcAft>
+                <a:spcPct val="0"/>
+              </a:spcAft>
+              <a:buChar char="»"/>
+              <a:defRPr sz="2000">
+                <a:solidFill>
+                  <a:schemeClr val="tx1"/>
+                </a:solidFill>
+                <a:latin typeface="Arial" panose="020B0604020202020204" pitchFamily="34" charset="0"/>
+              </a:defRPr>
+            </a:lvl6pPr>
+            <a:lvl7pPr marL="2971800" indent="-228600" eaLnBrk="0" fontAlgn="base" hangingPunct="0">
+              <a:spcBef>
+                <a:spcPct val="20000"/>
+              </a:spcBef>
+              <a:spcAft>
+                <a:spcPct val="0"/>
+              </a:spcAft>
+              <a:buChar char="»"/>
+              <a:defRPr sz="2000">
+                <a:solidFill>
+                  <a:schemeClr val="tx1"/>
+                </a:solidFill>
+                <a:latin typeface="Arial" panose="020B0604020202020204" pitchFamily="34" charset="0"/>
+              </a:defRPr>
+            </a:lvl7pPr>
+            <a:lvl8pPr marL="3429000" indent="-228600" eaLnBrk="0" fontAlgn="base" hangingPunct="0">
+              <a:spcBef>
+                <a:spcPct val="20000"/>
+              </a:spcBef>
+              <a:spcAft>
+                <a:spcPct val="0"/>
+              </a:spcAft>
+              <a:buChar char="»"/>
+              <a:defRPr sz="2000">
+                <a:solidFill>
+                  <a:schemeClr val="tx1"/>
+                </a:solidFill>
+                <a:latin typeface="Arial" panose="020B0604020202020204" pitchFamily="34" charset="0"/>
+              </a:defRPr>
+            </a:lvl8pPr>
+            <a:lvl9pPr marL="3886200" indent="-228600" eaLnBrk="0" fontAlgn="base" hangingPunct="0">
+              <a:spcBef>
+                <a:spcPct val="20000"/>
+              </a:spcBef>
+              <a:spcAft>
+                <a:spcPct val="0"/>
+              </a:spcAft>
+              <a:buChar char="»"/>
+              <a:defRPr sz="2000">
+                <a:solidFill>
+                  <a:schemeClr val="tx1"/>
+                </a:solidFill>
+                <a:latin typeface="Arial" panose="020B0604020202020204" pitchFamily="34" charset="0"/>
+              </a:defRPr>
+            </a:lvl9pPr>
+          </a:lstStyle>
+          <a:p>
+            <a:pPr eaLnBrk="1" hangingPunct="1">
+              <a:spcBef>
+                <a:spcPct val="0"/>
+              </a:spcBef>
+              <a:buFontTx/>
+              <a:buNone/>
+            </a:pPr>
+            <a:r>
+              <a:rPr lang="fr-FR" altLang="fr-FR" sz="1600" b="1" dirty="0">
+                <a:solidFill>
+                  <a:srgbClr val="009900"/>
+                </a:solidFill>
+                <a:latin typeface="Symbol" panose="05050102010706020507" pitchFamily="18" charset="2"/>
+              </a:rPr>
+              <a:t>j</a:t>
+            </a:r>
+          </a:p>
+        </p:txBody>
+      </p:sp>
+      <p:sp>
+        <p:nvSpPr>
+          <p:cNvPr id="30" name="Line 284">
+            <a:extLst>
+              <a:ext uri="{FF2B5EF4-FFF2-40B4-BE49-F238E27FC236}">
+                <a16:creationId xmlns:a16="http://schemas.microsoft.com/office/drawing/2014/main" id="{56E9D1D7-8F32-5762-071B-44937FD656CF}"/>
+              </a:ext>
+            </a:extLst>
+          </p:cNvPr>
+          <p:cNvSpPr>
+            <a:spLocks noChangeShapeType="1"/>
+          </p:cNvSpPr>
+          <p:nvPr/>
+        </p:nvSpPr>
+        <p:spPr bwMode="auto">
+          <a:xfrm>
+            <a:off x="7339531" y="2864057"/>
+            <a:ext cx="704850" cy="0"/>
+          </a:xfrm>
+          <a:prstGeom prst="line">
+            <a:avLst/>
+          </a:prstGeom>
+          <a:noFill/>
+          <a:ln w="38100">
+            <a:solidFill>
+              <a:srgbClr val="009900"/>
+            </a:solidFill>
+            <a:round/>
+            <a:headEnd/>
+            <a:tailEnd/>
+          </a:ln>
+          <a:effectLst/>
+          <a:extLst>
+            <a:ext uri="{909E8E84-426E-40DD-AFC4-6F175D3DCCD1}">
+              <a14:hiddenFill xmlns:a14="http://schemas.microsoft.com/office/drawing/2010/main">
+                <a:noFill/>
+              </a14:hiddenFill>
+            </a:ext>
+            <a:ext uri="{AF507438-7753-43E0-B8FC-AC1667EBCBE1}">
+              <a14:hiddenEffects xmlns:a14="http://schemas.microsoft.com/office/drawing/2010/main">
+                <a:effectLst>
+                  <a:outerShdw dist="35921" dir="2700000" algn="ctr" rotWithShape="0">
+                    <a:schemeClr val="bg2"/>
+                  </a:outerShdw>
+                </a:effectLst>
+              </a14:hiddenEffects>
+            </a:ext>
+          </a:extLst>
+        </p:spPr>
+        <p:txBody>
+          <a:bodyPr/>
+          <a:lstStyle/>
+          <a:p>
+            <a:endParaRPr lang="fr-FR"/>
+          </a:p>
+        </p:txBody>
+      </p:sp>
+      <p:sp>
+        <p:nvSpPr>
+          <p:cNvPr id="31" name="Line 285">
+            <a:extLst>
+              <a:ext uri="{FF2B5EF4-FFF2-40B4-BE49-F238E27FC236}">
+                <a16:creationId xmlns:a16="http://schemas.microsoft.com/office/drawing/2014/main" id="{F06AC753-A3FB-6F7A-527B-B18C20E8E65C}"/>
+              </a:ext>
+            </a:extLst>
+          </p:cNvPr>
+          <p:cNvSpPr>
+            <a:spLocks noChangeShapeType="1"/>
+          </p:cNvSpPr>
+          <p:nvPr/>
+        </p:nvSpPr>
+        <p:spPr bwMode="auto">
+          <a:xfrm>
+            <a:off x="8044381" y="2864057"/>
+            <a:ext cx="0" cy="1038225"/>
+          </a:xfrm>
+          <a:prstGeom prst="line">
+            <a:avLst/>
+          </a:prstGeom>
+          <a:noFill/>
+          <a:ln w="38100">
+            <a:solidFill>
+              <a:srgbClr val="009900"/>
+            </a:solidFill>
+            <a:round/>
+            <a:headEnd/>
+            <a:tailEnd/>
+          </a:ln>
+          <a:effectLst/>
+          <a:extLst>
+            <a:ext uri="{909E8E84-426E-40DD-AFC4-6F175D3DCCD1}">
+              <a14:hiddenFill xmlns:a14="http://schemas.microsoft.com/office/drawing/2010/main">
+                <a:noFill/>
+              </a14:hiddenFill>
+            </a:ext>
+            <a:ext uri="{AF507438-7753-43E0-B8FC-AC1667EBCBE1}">
+              <a14:hiddenEffects xmlns:a14="http://schemas.microsoft.com/office/drawing/2010/main">
+                <a:effectLst>
+                  <a:outerShdw dist="35921" dir="2700000" algn="ctr" rotWithShape="0">
+                    <a:schemeClr val="bg2"/>
+                  </a:outerShdw>
+                </a:effectLst>
+              </a14:hiddenEffects>
+            </a:ext>
+          </a:extLst>
+        </p:spPr>
+        <p:txBody>
+          <a:bodyPr/>
+          <a:lstStyle/>
+          <a:p>
+            <a:endParaRPr lang="fr-FR"/>
+          </a:p>
+        </p:txBody>
+      </p:sp>
+      <p:sp>
+        <p:nvSpPr>
+          <p:cNvPr id="32" name="Line 286">
+            <a:extLst>
+              <a:ext uri="{FF2B5EF4-FFF2-40B4-BE49-F238E27FC236}">
+                <a16:creationId xmlns:a16="http://schemas.microsoft.com/office/drawing/2014/main" id="{842E0D5C-75E4-6D86-B879-6B22B58EFD25}"/>
+              </a:ext>
+            </a:extLst>
+          </p:cNvPr>
+          <p:cNvSpPr>
+            <a:spLocks noChangeShapeType="1"/>
+          </p:cNvSpPr>
+          <p:nvPr/>
+        </p:nvSpPr>
+        <p:spPr bwMode="auto">
+          <a:xfrm>
+            <a:off x="8034856" y="3902282"/>
+            <a:ext cx="921388" cy="0"/>
+          </a:xfrm>
+          <a:prstGeom prst="line">
+            <a:avLst/>
+          </a:prstGeom>
+          <a:noFill/>
+          <a:ln w="38100">
+            <a:solidFill>
+              <a:srgbClr val="009900"/>
+            </a:solidFill>
+            <a:round/>
+            <a:headEnd/>
+            <a:tailEnd/>
+          </a:ln>
+          <a:effectLst/>
+          <a:extLst>
+            <a:ext uri="{909E8E84-426E-40DD-AFC4-6F175D3DCCD1}">
+              <a14:hiddenFill xmlns:a14="http://schemas.microsoft.com/office/drawing/2010/main">
+                <a:noFill/>
+              </a14:hiddenFill>
+            </a:ext>
+            <a:ext uri="{AF507438-7753-43E0-B8FC-AC1667EBCBE1}">
+              <a14:hiddenEffects xmlns:a14="http://schemas.microsoft.com/office/drawing/2010/main">
+                <a:effectLst>
+                  <a:outerShdw dist="35921" dir="2700000" algn="ctr" rotWithShape="0">
+                    <a:schemeClr val="bg2"/>
+                  </a:outerShdw>
+                </a:effectLst>
+              </a14:hiddenEffects>
+            </a:ext>
+          </a:extLst>
+        </p:spPr>
+        <p:txBody>
+          <a:bodyPr/>
+          <a:lstStyle/>
+          <a:p>
+            <a:endParaRPr lang="fr-FR"/>
+          </a:p>
+        </p:txBody>
+      </p:sp>
+      <p:sp>
+        <p:nvSpPr>
+          <p:cNvPr id="33" name="Line 288">
+            <a:extLst>
+              <a:ext uri="{FF2B5EF4-FFF2-40B4-BE49-F238E27FC236}">
+                <a16:creationId xmlns:a16="http://schemas.microsoft.com/office/drawing/2014/main" id="{894E1413-C8D4-10EB-73A2-72EB0DB53482}"/>
+              </a:ext>
+            </a:extLst>
+          </p:cNvPr>
+          <p:cNvSpPr>
+            <a:spLocks noChangeShapeType="1"/>
+          </p:cNvSpPr>
+          <p:nvPr/>
+        </p:nvSpPr>
+        <p:spPr bwMode="auto">
+          <a:xfrm>
+            <a:off x="9501706" y="2864057"/>
+            <a:ext cx="781050" cy="0"/>
+          </a:xfrm>
+          <a:prstGeom prst="line">
+            <a:avLst/>
+          </a:prstGeom>
+          <a:noFill/>
+          <a:ln w="38100">
+            <a:solidFill>
+              <a:srgbClr val="009900"/>
+            </a:solidFill>
+            <a:round/>
+            <a:headEnd/>
+            <a:tailEnd/>
+          </a:ln>
+          <a:effectLst/>
+          <a:extLst>
+            <a:ext uri="{909E8E84-426E-40DD-AFC4-6F175D3DCCD1}">
+              <a14:hiddenFill xmlns:a14="http://schemas.microsoft.com/office/drawing/2010/main">
+                <a:noFill/>
+              </a14:hiddenFill>
+            </a:ext>
+            <a:ext uri="{AF507438-7753-43E0-B8FC-AC1667EBCBE1}">
+              <a14:hiddenEffects xmlns:a14="http://schemas.microsoft.com/office/drawing/2010/main">
+                <a:effectLst>
+                  <a:outerShdw dist="35921" dir="2700000" algn="ctr" rotWithShape="0">
+                    <a:schemeClr val="bg2"/>
+                  </a:outerShdw>
+                </a:effectLst>
+              </a14:hiddenEffects>
+            </a:ext>
+          </a:extLst>
+        </p:spPr>
+        <p:txBody>
+          <a:bodyPr/>
+          <a:lstStyle/>
+          <a:p>
+            <a:endParaRPr lang="fr-FR"/>
+          </a:p>
+        </p:txBody>
+      </p:sp>
+      <p:sp>
+        <p:nvSpPr>
+          <p:cNvPr id="34" name="Text Box 289">
+            <a:extLst>
+              <a:ext uri="{FF2B5EF4-FFF2-40B4-BE49-F238E27FC236}">
+                <a16:creationId xmlns:a16="http://schemas.microsoft.com/office/drawing/2014/main" id="{314AFD15-73AF-2E84-8055-656E8D27DD8F}"/>
+              </a:ext>
+            </a:extLst>
+          </p:cNvPr>
+          <p:cNvSpPr txBox="1">
+            <a:spLocks noChangeArrowheads="1"/>
+          </p:cNvSpPr>
+          <p:nvPr/>
+        </p:nvSpPr>
+        <p:spPr bwMode="auto">
+          <a:xfrm>
+            <a:off x="7320999" y="2176669"/>
+            <a:ext cx="374650" cy="366713"/>
+          </a:xfrm>
+          <a:prstGeom prst="rect">
+            <a:avLst/>
+          </a:prstGeom>
+          <a:noFill/>
+          <a:ln>
+            <a:noFill/>
+          </a:ln>
+          <a:effectLst/>
+          <a:extLst>
+            <a:ext uri="{909E8E84-426E-40DD-AFC4-6F175D3DCCD1}">
+              <a14:hiddenFill xmlns:a14="http://schemas.microsoft.com/office/drawing/2010/main">
+                <a:solidFill>
+                  <a:schemeClr val="accent1"/>
+                </a:solidFill>
+              </a14:hiddenFill>
+            </a:ext>
+            <a:ext uri="{91240B29-F687-4F45-9708-019B960494DF}">
+              <a14:hiddenLine xmlns:a14="http://schemas.microsoft.com/office/drawing/2010/main" w="9525">
+                <a:solidFill>
+                  <a:schemeClr val="tx1"/>
+                </a:solidFill>
+                <a:miter lim="800000"/>
+                <a:headEnd/>
+                <a:tailEnd/>
+              </a14:hiddenLine>
+            </a:ext>
+            <a:ext uri="{AF507438-7753-43E0-B8FC-AC1667EBCBE1}">
+              <a14:hiddenEffects xmlns:a14="http://schemas.microsoft.com/office/drawing/2010/main">
+                <a:effectLst>
+                  <a:outerShdw dist="35921" dir="2700000" algn="ctr" rotWithShape="0">
+                    <a:schemeClr val="bg2"/>
+                  </a:outerShdw>
+                </a:effectLst>
+              </a14:hiddenEffects>
+            </a:ext>
+          </a:extLst>
+        </p:spPr>
+        <p:txBody>
+          <a:bodyPr wrap="none">
+            <a:spAutoFit/>
+          </a:bodyPr>
+          <a:lstStyle>
+            <a:lvl1pPr>
+              <a:spcBef>
+                <a:spcPct val="20000"/>
+              </a:spcBef>
+              <a:buChar char="•"/>
+              <a:defRPr sz="3200">
+                <a:solidFill>
+                  <a:schemeClr val="tx1"/>
+                </a:solidFill>
+                <a:latin typeface="Arial" panose="020B0604020202020204" pitchFamily="34" charset="0"/>
+              </a:defRPr>
+            </a:lvl1pPr>
+            <a:lvl2pPr marL="742950" indent="-285750">
+              <a:spcBef>
+                <a:spcPct val="20000"/>
+              </a:spcBef>
+              <a:buChar char="–"/>
+              <a:defRPr sz="2800">
+                <a:solidFill>
+                  <a:schemeClr val="tx1"/>
+                </a:solidFill>
+                <a:latin typeface="Arial" panose="020B0604020202020204" pitchFamily="34" charset="0"/>
+              </a:defRPr>
+            </a:lvl2pPr>
+            <a:lvl3pPr marL="1143000" indent="-228600">
+              <a:spcBef>
+                <a:spcPct val="20000"/>
+              </a:spcBef>
+              <a:buChar char="•"/>
+              <a:defRPr sz="2400">
+                <a:solidFill>
+                  <a:schemeClr val="tx1"/>
+                </a:solidFill>
+                <a:latin typeface="Arial" panose="020B0604020202020204" pitchFamily="34" charset="0"/>
+              </a:defRPr>
+            </a:lvl3pPr>
+            <a:lvl4pPr marL="1600200" indent="-228600">
+              <a:spcBef>
+                <a:spcPct val="20000"/>
+              </a:spcBef>
+              <a:buChar char="–"/>
+              <a:defRPr sz="2000">
+                <a:solidFill>
+                  <a:schemeClr val="tx1"/>
+                </a:solidFill>
+                <a:latin typeface="Arial" panose="020B0604020202020204" pitchFamily="34" charset="0"/>
+              </a:defRPr>
+            </a:lvl4pPr>
+            <a:lvl5pPr marL="2057400" indent="-228600">
+              <a:spcBef>
+                <a:spcPct val="20000"/>
+              </a:spcBef>
+              <a:buChar char="»"/>
+              <a:defRPr sz="2000">
+                <a:solidFill>
+                  <a:schemeClr val="tx1"/>
+                </a:solidFill>
+                <a:latin typeface="Arial" panose="020B0604020202020204" pitchFamily="34" charset="0"/>
+              </a:defRPr>
+            </a:lvl5pPr>
+            <a:lvl6pPr marL="2514600" indent="-228600" eaLnBrk="0" fontAlgn="base" hangingPunct="0">
+              <a:spcBef>
+                <a:spcPct val="20000"/>
+              </a:spcBef>
+              <a:spcAft>
+                <a:spcPct val="0"/>
+              </a:spcAft>
+              <a:buChar char="»"/>
+              <a:defRPr sz="2000">
+                <a:solidFill>
+                  <a:schemeClr val="tx1"/>
+                </a:solidFill>
+                <a:latin typeface="Arial" panose="020B0604020202020204" pitchFamily="34" charset="0"/>
+              </a:defRPr>
+            </a:lvl6pPr>
+            <a:lvl7pPr marL="2971800" indent="-228600" eaLnBrk="0" fontAlgn="base" hangingPunct="0">
+              <a:spcBef>
+                <a:spcPct val="20000"/>
+              </a:spcBef>
+              <a:spcAft>
+                <a:spcPct val="0"/>
+              </a:spcAft>
+              <a:buChar char="»"/>
+              <a:defRPr sz="2000">
+                <a:solidFill>
+                  <a:schemeClr val="tx1"/>
+                </a:solidFill>
+                <a:latin typeface="Arial" panose="020B0604020202020204" pitchFamily="34" charset="0"/>
+              </a:defRPr>
+            </a:lvl7pPr>
+            <a:lvl8pPr marL="3429000" indent="-228600" eaLnBrk="0" fontAlgn="base" hangingPunct="0">
+              <a:spcBef>
+                <a:spcPct val="20000"/>
+              </a:spcBef>
+              <a:spcAft>
+                <a:spcPct val="0"/>
+              </a:spcAft>
+              <a:buChar char="»"/>
+              <a:defRPr sz="2000">
+                <a:solidFill>
+                  <a:schemeClr val="tx1"/>
+                </a:solidFill>
+                <a:latin typeface="Arial" panose="020B0604020202020204" pitchFamily="34" charset="0"/>
+              </a:defRPr>
+            </a:lvl8pPr>
+            <a:lvl9pPr marL="3886200" indent="-228600" eaLnBrk="0" fontAlgn="base" hangingPunct="0">
+              <a:spcBef>
+                <a:spcPct val="20000"/>
+              </a:spcBef>
+              <a:spcAft>
+                <a:spcPct val="0"/>
+              </a:spcAft>
+              <a:buChar char="»"/>
+              <a:defRPr sz="2000">
+                <a:solidFill>
+                  <a:schemeClr val="tx1"/>
+                </a:solidFill>
+                <a:latin typeface="Arial" panose="020B0604020202020204" pitchFamily="34" charset="0"/>
+              </a:defRPr>
+            </a:lvl9pPr>
+          </a:lstStyle>
+          <a:p>
+            <a:pPr eaLnBrk="1" hangingPunct="1">
+              <a:spcBef>
+                <a:spcPct val="0"/>
+              </a:spcBef>
+              <a:buFontTx/>
+              <a:buNone/>
+            </a:pPr>
+            <a:r>
+              <a:rPr lang="fr-FR" altLang="fr-FR" sz="1800" dirty="0">
+                <a:solidFill>
+                  <a:srgbClr val="009900"/>
+                </a:solidFill>
+                <a:latin typeface="Times New Roman" panose="02020603050405020304" pitchFamily="18" charset="0"/>
+              </a:rPr>
+              <a:t>v</a:t>
+            </a:r>
+            <a:r>
+              <a:rPr lang="fr-FR" altLang="fr-FR" sz="1800" baseline="-25000" dirty="0">
+                <a:solidFill>
+                  <a:srgbClr val="009900"/>
+                </a:solidFill>
+                <a:latin typeface="Times New Roman" panose="02020603050405020304" pitchFamily="18" charset="0"/>
+              </a:rPr>
+              <a:t>1</a:t>
+            </a:r>
+          </a:p>
+        </p:txBody>
+      </p:sp>
+      <p:sp>
+        <p:nvSpPr>
+          <p:cNvPr id="35" name="Text Box 290">
+            <a:extLst>
+              <a:ext uri="{FF2B5EF4-FFF2-40B4-BE49-F238E27FC236}">
+                <a16:creationId xmlns:a16="http://schemas.microsoft.com/office/drawing/2014/main" id="{15C93BCA-80DE-14F8-A74F-D6066B932435}"/>
+              </a:ext>
+            </a:extLst>
+          </p:cNvPr>
+          <p:cNvSpPr txBox="1">
+            <a:spLocks noChangeArrowheads="1"/>
+          </p:cNvSpPr>
+          <p:nvPr/>
+        </p:nvSpPr>
+        <p:spPr bwMode="auto">
+          <a:xfrm>
+            <a:off x="7052236" y="2746583"/>
+            <a:ext cx="320922" cy="338554"/>
+          </a:xfrm>
+          <a:prstGeom prst="rect">
+            <a:avLst/>
+          </a:prstGeom>
+          <a:noFill/>
+          <a:ln>
+            <a:noFill/>
+          </a:ln>
+          <a:effectLst/>
+          <a:extLst>
+            <a:ext uri="{909E8E84-426E-40DD-AFC4-6F175D3DCCD1}">
+              <a14:hiddenFill xmlns:a14="http://schemas.microsoft.com/office/drawing/2010/main">
+                <a:solidFill>
+                  <a:schemeClr val="accent1"/>
+                </a:solidFill>
+              </a14:hiddenFill>
+            </a:ext>
+            <a:ext uri="{91240B29-F687-4F45-9708-019B960494DF}">
+              <a14:hiddenLine xmlns:a14="http://schemas.microsoft.com/office/drawing/2010/main" w="9525">
+                <a:solidFill>
+                  <a:schemeClr val="tx1"/>
+                </a:solidFill>
+                <a:miter lim="800000"/>
+                <a:headEnd/>
+                <a:tailEnd/>
+              </a14:hiddenLine>
+            </a:ext>
+            <a:ext uri="{AF507438-7753-43E0-B8FC-AC1667EBCBE1}">
+              <a14:hiddenEffects xmlns:a14="http://schemas.microsoft.com/office/drawing/2010/main">
+                <a:effectLst>
+                  <a:outerShdw dist="35921" dir="2700000" algn="ctr" rotWithShape="0">
+                    <a:schemeClr val="bg2"/>
+                  </a:outerShdw>
+                </a:effectLst>
+              </a14:hiddenEffects>
+            </a:ext>
+          </a:extLst>
+        </p:spPr>
+        <p:txBody>
+          <a:bodyPr wrap="none">
+            <a:spAutoFit/>
+          </a:bodyPr>
+          <a:lstStyle>
+            <a:lvl1pPr>
+              <a:spcBef>
+                <a:spcPct val="20000"/>
+              </a:spcBef>
+              <a:buChar char="•"/>
+              <a:defRPr sz="3200">
+                <a:solidFill>
+                  <a:schemeClr val="tx1"/>
+                </a:solidFill>
+                <a:latin typeface="Arial" panose="020B0604020202020204" pitchFamily="34" charset="0"/>
+              </a:defRPr>
+            </a:lvl1pPr>
+            <a:lvl2pPr marL="742950" indent="-285750">
+              <a:spcBef>
+                <a:spcPct val="20000"/>
+              </a:spcBef>
+              <a:buChar char="–"/>
+              <a:defRPr sz="2800">
+                <a:solidFill>
+                  <a:schemeClr val="tx1"/>
+                </a:solidFill>
+                <a:latin typeface="Arial" panose="020B0604020202020204" pitchFamily="34" charset="0"/>
+              </a:defRPr>
+            </a:lvl2pPr>
+            <a:lvl3pPr marL="1143000" indent="-228600">
+              <a:spcBef>
+                <a:spcPct val="20000"/>
+              </a:spcBef>
+              <a:buChar char="•"/>
+              <a:defRPr sz="2400">
+                <a:solidFill>
+                  <a:schemeClr val="tx1"/>
+                </a:solidFill>
+                <a:latin typeface="Arial" panose="020B0604020202020204" pitchFamily="34" charset="0"/>
+              </a:defRPr>
+            </a:lvl3pPr>
+            <a:lvl4pPr marL="1600200" indent="-228600">
+              <a:spcBef>
+                <a:spcPct val="20000"/>
+              </a:spcBef>
+              <a:buChar char="–"/>
+              <a:defRPr sz="2000">
+                <a:solidFill>
+                  <a:schemeClr val="tx1"/>
+                </a:solidFill>
+                <a:latin typeface="Arial" panose="020B0604020202020204" pitchFamily="34" charset="0"/>
+              </a:defRPr>
+            </a:lvl4pPr>
+            <a:lvl5pPr marL="2057400" indent="-228600">
+              <a:spcBef>
+                <a:spcPct val="20000"/>
+              </a:spcBef>
+              <a:buChar char="»"/>
+              <a:defRPr sz="2000">
+                <a:solidFill>
+                  <a:schemeClr val="tx1"/>
+                </a:solidFill>
+                <a:latin typeface="Arial" panose="020B0604020202020204" pitchFamily="34" charset="0"/>
+              </a:defRPr>
+            </a:lvl5pPr>
+            <a:lvl6pPr marL="2514600" indent="-228600" eaLnBrk="0" fontAlgn="base" hangingPunct="0">
+              <a:spcBef>
+                <a:spcPct val="20000"/>
+              </a:spcBef>
+              <a:spcAft>
+                <a:spcPct val="0"/>
+              </a:spcAft>
+              <a:buChar char="»"/>
+              <a:defRPr sz="2000">
+                <a:solidFill>
+                  <a:schemeClr val="tx1"/>
+                </a:solidFill>
+                <a:latin typeface="Arial" panose="020B0604020202020204" pitchFamily="34" charset="0"/>
+              </a:defRPr>
+            </a:lvl6pPr>
+            <a:lvl7pPr marL="2971800" indent="-228600" eaLnBrk="0" fontAlgn="base" hangingPunct="0">
+              <a:spcBef>
+                <a:spcPct val="20000"/>
+              </a:spcBef>
+              <a:spcAft>
+                <a:spcPct val="0"/>
+              </a:spcAft>
+              <a:buChar char="»"/>
+              <a:defRPr sz="2000">
+                <a:solidFill>
+                  <a:schemeClr val="tx1"/>
+                </a:solidFill>
+                <a:latin typeface="Arial" panose="020B0604020202020204" pitchFamily="34" charset="0"/>
+              </a:defRPr>
+            </a:lvl7pPr>
+            <a:lvl8pPr marL="3429000" indent="-228600" eaLnBrk="0" fontAlgn="base" hangingPunct="0">
+              <a:spcBef>
+                <a:spcPct val="20000"/>
+              </a:spcBef>
+              <a:spcAft>
+                <a:spcPct val="0"/>
+              </a:spcAft>
+              <a:buChar char="»"/>
+              <a:defRPr sz="2000">
+                <a:solidFill>
+                  <a:schemeClr val="tx1"/>
+                </a:solidFill>
+                <a:latin typeface="Arial" panose="020B0604020202020204" pitchFamily="34" charset="0"/>
+              </a:defRPr>
+            </a:lvl8pPr>
+            <a:lvl9pPr marL="3886200" indent="-228600" eaLnBrk="0" fontAlgn="base" hangingPunct="0">
+              <a:spcBef>
+                <a:spcPct val="20000"/>
+              </a:spcBef>
+              <a:spcAft>
+                <a:spcPct val="0"/>
+              </a:spcAft>
+              <a:buChar char="»"/>
+              <a:defRPr sz="2000">
+                <a:solidFill>
+                  <a:schemeClr val="tx1"/>
+                </a:solidFill>
+                <a:latin typeface="Arial" panose="020B0604020202020204" pitchFamily="34" charset="0"/>
+              </a:defRPr>
+            </a:lvl9pPr>
+          </a:lstStyle>
+          <a:p>
+            <a:pPr eaLnBrk="1" hangingPunct="1">
+              <a:spcBef>
+                <a:spcPct val="0"/>
+              </a:spcBef>
+              <a:buFontTx/>
+              <a:buNone/>
+            </a:pPr>
+            <a:r>
+              <a:rPr lang="fr-FR" altLang="fr-FR" sz="1600" b="1" dirty="0">
+                <a:solidFill>
+                  <a:srgbClr val="009900"/>
+                </a:solidFill>
+                <a:latin typeface="Times New Roman" panose="02020603050405020304" pitchFamily="18" charset="0"/>
+              </a:rPr>
+              <a:t>E</a:t>
+            </a:r>
+            <a:endParaRPr lang="fr-FR" altLang="fr-FR" sz="1600" b="1" baseline="-25000" dirty="0">
+              <a:solidFill>
+                <a:srgbClr val="009900"/>
+              </a:solidFill>
+              <a:latin typeface="Times New Roman" panose="02020603050405020304" pitchFamily="18" charset="0"/>
+            </a:endParaRPr>
+          </a:p>
+        </p:txBody>
+      </p:sp>
+      <mc:AlternateContent xmlns:mc="http://schemas.openxmlformats.org/markup-compatibility/2006">
+        <mc:Choice xmlns:a14="http://schemas.microsoft.com/office/drawing/2010/main" Requires="a14">
+          <p:sp>
+            <p:nvSpPr>
+              <p:cNvPr id="36" name="Object 292">
+                <a:extLst>
+                  <a:ext uri="{FF2B5EF4-FFF2-40B4-BE49-F238E27FC236}">
+                    <a16:creationId xmlns:a16="http://schemas.microsoft.com/office/drawing/2014/main" id="{F459A569-7638-D164-3DEC-8540D25E78C8}"/>
+                  </a:ext>
+                </a:extLst>
+              </p:cNvPr>
+              <p:cNvSpPr txBox="1"/>
+              <p:nvPr/>
+            </p:nvSpPr>
+            <p:spPr bwMode="auto">
+              <a:xfrm>
+                <a:off x="6795810" y="3625645"/>
+                <a:ext cx="428625" cy="468312"/>
+              </a:xfrm>
+              <a:prstGeom prst="rect">
+                <a:avLst/>
+              </a:prstGeom>
+              <a:noFill/>
+              <a:ln>
+                <a:noFill/>
+              </a:ln>
+            </p:spPr>
+            <p:txBody>
+              <a:bodyPr>
+                <a:noAutofit/>
+              </a:bodyPr>
+              <a:lstStyle/>
+              <a:p>
+                <a:pPr/>
+                <a14:m>
+                  <m:oMathPara xmlns:m="http://schemas.openxmlformats.org/officeDocument/2006/math">
+                    <m:oMathParaPr>
+                      <m:jc m:val="left"/>
+                    </m:oMathParaPr>
+                    <m:oMath xmlns:m="http://schemas.openxmlformats.org/officeDocument/2006/math">
+                      <m:r>
+                        <a:rPr lang="fr-FR" sz="1600" b="1" i="1">
+                          <a:solidFill>
+                            <a:srgbClr val="000000"/>
+                          </a:solidFill>
+                          <a:latin typeface="Cambria Math" panose="02040503050406030204" pitchFamily="18" charset="0"/>
+                        </a:rPr>
+                        <m:t>−</m:t>
+                      </m:r>
+                      <m:f>
+                        <m:fPr>
+                          <m:ctrlPr>
+                            <a:rPr lang="fr-FR" sz="1600" b="1" i="1">
+                              <a:solidFill>
+                                <a:srgbClr val="000000"/>
+                              </a:solidFill>
+                              <a:latin typeface="Cambria Math" panose="02040503050406030204" pitchFamily="18" charset="0"/>
+                            </a:rPr>
+                          </m:ctrlPr>
+                        </m:fPr>
+                        <m:num>
+                          <m:sSub>
+                            <m:sSubPr>
+                              <m:ctrlPr>
+                                <a:rPr lang="fr-FR" sz="1600" b="1" i="1">
+                                  <a:solidFill>
+                                    <a:srgbClr val="000000"/>
+                                  </a:solidFill>
+                                  <a:latin typeface="Cambria Math" panose="02040503050406030204" pitchFamily="18" charset="0"/>
+                                </a:rPr>
+                              </m:ctrlPr>
+                            </m:sSubPr>
+                            <m:e>
+                              <m:r>
+                                <a:rPr lang="fr-FR" sz="1600" b="1" i="1">
+                                  <a:solidFill>
+                                    <a:srgbClr val="000000"/>
+                                  </a:solidFill>
+                                  <a:latin typeface="Cambria Math" panose="02040503050406030204" pitchFamily="18" charset="0"/>
+                                </a:rPr>
+                                <m:t>𝑽</m:t>
+                              </m:r>
+                            </m:e>
+                            <m:sub>
+                              <m:r>
+                                <a:rPr lang="fr-FR" sz="1600" b="1" i="1">
+                                  <a:solidFill>
+                                    <a:srgbClr val="000000"/>
+                                  </a:solidFill>
+                                  <a:latin typeface="Cambria Math" panose="02040503050406030204" pitchFamily="18" charset="0"/>
+                                </a:rPr>
+                                <m:t>𝑺</m:t>
+                              </m:r>
+                            </m:sub>
+                          </m:sSub>
+                        </m:num>
+                        <m:den>
+                          <m:r>
+                            <a:rPr lang="fr-FR" sz="1600" b="1" i="1">
+                              <a:solidFill>
+                                <a:srgbClr val="000000"/>
+                              </a:solidFill>
+                              <a:latin typeface="Cambria Math" panose="02040503050406030204" pitchFamily="18" charset="0"/>
+                            </a:rPr>
+                            <m:t>𝒎</m:t>
+                          </m:r>
+                        </m:den>
+                      </m:f>
+                    </m:oMath>
+                  </m:oMathPara>
+                </a14:m>
+                <a:endParaRPr lang="fr-FR" sz="1600" b="1" dirty="0"/>
+              </a:p>
+            </p:txBody>
+          </p:sp>
+        </mc:Choice>
+        <mc:Fallback>
+          <p:sp>
+            <p:nvSpPr>
+              <p:cNvPr id="36" name="Object 292">
+                <a:extLst>
+                  <a:ext uri="{FF2B5EF4-FFF2-40B4-BE49-F238E27FC236}">
+                    <a16:creationId xmlns:a16="http://schemas.microsoft.com/office/drawing/2014/main" id="{F459A569-7638-D164-3DEC-8540D25E78C8}"/>
+                  </a:ext>
+                </a:extLst>
+              </p:cNvPr>
+              <p:cNvSpPr txBox="1">
+                <a:spLocks noRot="1" noChangeAspect="1" noMove="1" noResize="1" noEditPoints="1" noAdjustHandles="1" noChangeArrowheads="1" noChangeShapeType="1" noTextEdit="1"/>
+              </p:cNvSpPr>
+              <p:nvPr/>
+            </p:nvSpPr>
+            <p:spPr bwMode="auto">
+              <a:xfrm>
+                <a:off x="6795810" y="3625645"/>
+                <a:ext cx="428625" cy="468312"/>
+              </a:xfrm>
+              <a:prstGeom prst="rect">
+                <a:avLst/>
+              </a:prstGeom>
+              <a:blipFill>
+                <a:blip r:embed="rId2"/>
+                <a:stretch>
+                  <a:fillRect r="-18571" b="-6494"/>
+                </a:stretch>
+              </a:blipFill>
+              <a:ln>
+                <a:noFill/>
+              </a:ln>
+            </p:spPr>
+            <p:txBody>
+              <a:bodyPr/>
+              <a:lstStyle/>
+              <a:p>
+                <a:r>
+                  <a:rPr lang="fr-FR">
+                    <a:noFill/>
+                  </a:rPr>
+                  <a:t> </a:t>
+                </a:r>
+              </a:p>
+            </p:txBody>
+          </p:sp>
+        </mc:Fallback>
+      </mc:AlternateContent>
+      <p:sp>
+        <p:nvSpPr>
+          <p:cNvPr id="37" name="Line 293">
+            <a:extLst>
+              <a:ext uri="{FF2B5EF4-FFF2-40B4-BE49-F238E27FC236}">
+                <a16:creationId xmlns:a16="http://schemas.microsoft.com/office/drawing/2014/main" id="{6240CD20-EE44-915D-3566-1D33313E19D1}"/>
+              </a:ext>
+            </a:extLst>
+          </p:cNvPr>
+          <p:cNvSpPr>
+            <a:spLocks noChangeShapeType="1"/>
+          </p:cNvSpPr>
+          <p:nvPr/>
+        </p:nvSpPr>
+        <p:spPr bwMode="auto">
+          <a:xfrm flipH="1">
+            <a:off x="7339531" y="3883232"/>
+            <a:ext cx="695325" cy="0"/>
+          </a:xfrm>
+          <a:prstGeom prst="line">
+            <a:avLst/>
+          </a:prstGeom>
+          <a:noFill/>
+          <a:ln w="12700">
+            <a:solidFill>
+              <a:schemeClr val="tx1"/>
+            </a:solidFill>
+            <a:prstDash val="sysDot"/>
+            <a:round/>
+            <a:headEnd/>
+            <a:tailEnd/>
+          </a:ln>
+          <a:effectLst/>
+          <a:extLst>
+            <a:ext uri="{909E8E84-426E-40DD-AFC4-6F175D3DCCD1}">
+              <a14:hiddenFill xmlns:a14="http://schemas.microsoft.com/office/drawing/2010/main">
+                <a:noFill/>
+              </a14:hiddenFill>
+            </a:ext>
+            <a:ext uri="{AF507438-7753-43E0-B8FC-AC1667EBCBE1}">
+              <a14:hiddenEffects xmlns:a14="http://schemas.microsoft.com/office/drawing/2010/main">
+                <a:effectLst>
+                  <a:outerShdw dist="35921" dir="2700000" algn="ctr" rotWithShape="0">
+                    <a:schemeClr val="bg2"/>
+                  </a:outerShdw>
+                </a:effectLst>
+              </a14:hiddenEffects>
+            </a:ext>
+          </a:extLst>
+        </p:spPr>
+        <p:txBody>
+          <a:bodyPr/>
+          <a:lstStyle/>
+          <a:p>
+            <a:endParaRPr lang="fr-FR"/>
+          </a:p>
+        </p:txBody>
+      </p:sp>
+      <p:sp>
+        <p:nvSpPr>
+          <p:cNvPr id="38" name="Line 302">
+            <a:extLst>
+              <a:ext uri="{FF2B5EF4-FFF2-40B4-BE49-F238E27FC236}">
+                <a16:creationId xmlns:a16="http://schemas.microsoft.com/office/drawing/2014/main" id="{08CCD34A-26EF-0FE5-E5E2-E286D5245792}"/>
+              </a:ext>
+            </a:extLst>
+          </p:cNvPr>
+          <p:cNvSpPr>
+            <a:spLocks noChangeShapeType="1"/>
+          </p:cNvSpPr>
+          <p:nvPr/>
+        </p:nvSpPr>
+        <p:spPr bwMode="auto">
+          <a:xfrm flipH="1" flipV="1">
+            <a:off x="8956243" y="3492706"/>
+            <a:ext cx="0" cy="428625"/>
+          </a:xfrm>
+          <a:prstGeom prst="line">
+            <a:avLst/>
+          </a:prstGeom>
+          <a:noFill/>
+          <a:ln w="38100">
+            <a:solidFill>
+              <a:srgbClr val="009900"/>
+            </a:solidFill>
+            <a:round/>
+            <a:headEnd/>
+            <a:tailEnd/>
+          </a:ln>
+          <a:effectLst/>
+          <a:extLst>
+            <a:ext uri="{909E8E84-426E-40DD-AFC4-6F175D3DCCD1}">
+              <a14:hiddenFill xmlns:a14="http://schemas.microsoft.com/office/drawing/2010/main">
+                <a:noFill/>
+              </a14:hiddenFill>
+            </a:ext>
+            <a:ext uri="{AF507438-7753-43E0-B8FC-AC1667EBCBE1}">
+              <a14:hiddenEffects xmlns:a14="http://schemas.microsoft.com/office/drawing/2010/main">
+                <a:effectLst>
+                  <a:outerShdw dist="35921" dir="2700000" algn="ctr" rotWithShape="0">
+                    <a:schemeClr val="bg2"/>
+                  </a:outerShdw>
+                </a:effectLst>
+              </a14:hiddenEffects>
+            </a:ext>
+          </a:extLst>
+        </p:spPr>
+        <p:txBody>
+          <a:bodyPr/>
+          <a:lstStyle/>
+          <a:p>
+            <a:endParaRPr lang="fr-FR"/>
+          </a:p>
+        </p:txBody>
+      </p:sp>
+      <p:sp>
+        <p:nvSpPr>
+          <p:cNvPr id="39" name="Line 293">
+            <a:extLst>
+              <a:ext uri="{FF2B5EF4-FFF2-40B4-BE49-F238E27FC236}">
+                <a16:creationId xmlns:a16="http://schemas.microsoft.com/office/drawing/2014/main" id="{47ABE971-CF6B-1F1A-794F-0602BB73AFD7}"/>
+              </a:ext>
+            </a:extLst>
+          </p:cNvPr>
+          <p:cNvSpPr>
+            <a:spLocks noChangeShapeType="1"/>
+          </p:cNvSpPr>
+          <p:nvPr/>
+        </p:nvSpPr>
+        <p:spPr bwMode="auto">
+          <a:xfrm flipH="1">
+            <a:off x="7363343" y="2629107"/>
+            <a:ext cx="695325" cy="0"/>
+          </a:xfrm>
+          <a:prstGeom prst="line">
+            <a:avLst/>
+          </a:prstGeom>
+          <a:noFill/>
+          <a:ln w="12700">
+            <a:solidFill>
+              <a:schemeClr val="tx1"/>
+            </a:solidFill>
+            <a:prstDash val="sysDot"/>
+            <a:round/>
+            <a:headEnd/>
+            <a:tailEnd/>
+          </a:ln>
+          <a:effectLst/>
+          <a:extLst>
+            <a:ext uri="{909E8E84-426E-40DD-AFC4-6F175D3DCCD1}">
+              <a14:hiddenFill xmlns:a14="http://schemas.microsoft.com/office/drawing/2010/main">
+                <a:noFill/>
+              </a14:hiddenFill>
+            </a:ext>
+            <a:ext uri="{AF507438-7753-43E0-B8FC-AC1667EBCBE1}">
+              <a14:hiddenEffects xmlns:a14="http://schemas.microsoft.com/office/drawing/2010/main">
+                <a:effectLst>
+                  <a:outerShdw dist="35921" dir="2700000" algn="ctr" rotWithShape="0">
+                    <a:schemeClr val="bg2"/>
+                  </a:outerShdw>
+                </a:effectLst>
+              </a14:hiddenEffects>
+            </a:ext>
+          </a:extLst>
+        </p:spPr>
+        <p:txBody>
+          <a:bodyPr/>
+          <a:lstStyle/>
+          <a:p>
+            <a:endParaRPr lang="fr-FR"/>
+          </a:p>
+        </p:txBody>
+      </p:sp>
+      <mc:AlternateContent xmlns:mc="http://schemas.openxmlformats.org/markup-compatibility/2006">
+        <mc:Choice xmlns:a14="http://schemas.microsoft.com/office/drawing/2010/main" Requires="a14">
+          <p:sp>
+            <p:nvSpPr>
+              <p:cNvPr id="40" name="Object 292">
+                <a:extLst>
+                  <a:ext uri="{FF2B5EF4-FFF2-40B4-BE49-F238E27FC236}">
+                    <a16:creationId xmlns:a16="http://schemas.microsoft.com/office/drawing/2014/main" id="{7E0BFF2D-FB4A-E05D-76D0-2C46AA8C48F7}"/>
+                  </a:ext>
+                </a:extLst>
+              </p:cNvPr>
+              <p:cNvSpPr txBox="1"/>
+              <p:nvPr/>
+            </p:nvSpPr>
+            <p:spPr bwMode="auto">
+              <a:xfrm>
+                <a:off x="6578949" y="2295732"/>
+                <a:ext cx="831934" cy="468312"/>
+              </a:xfrm>
+              <a:prstGeom prst="rect">
+                <a:avLst/>
+              </a:prstGeom>
+              <a:noFill/>
+              <a:ln>
+                <a:noFill/>
+              </a:ln>
+            </p:spPr>
+            <p:txBody>
+              <a:bodyPr>
+                <a:noAutofit/>
+              </a:bodyPr>
+              <a:lstStyle/>
+              <a:p>
+                <a:pPr/>
+                <a14:m>
+                  <m:oMathPara xmlns:m="http://schemas.openxmlformats.org/officeDocument/2006/math">
+                    <m:oMathParaPr>
+                      <m:jc m:val="left"/>
+                    </m:oMathParaPr>
+                    <m:oMath xmlns:m="http://schemas.openxmlformats.org/officeDocument/2006/math">
+                      <m:r>
+                        <a:rPr lang="fr-FR" sz="1600" b="1" i="1" smtClean="0">
+                          <a:solidFill>
+                            <a:srgbClr val="000000"/>
+                          </a:solidFill>
+                          <a:latin typeface="Cambria Math" panose="02040503050406030204" pitchFamily="18" charset="0"/>
+                        </a:rPr>
+                        <m:t>𝑬</m:t>
+                      </m:r>
+                      <m:r>
+                        <a:rPr lang="fr-FR" sz="1600" b="1" i="1" smtClean="0">
+                          <a:solidFill>
+                            <a:srgbClr val="000000"/>
+                          </a:solidFill>
+                          <a:latin typeface="Cambria Math" panose="02040503050406030204" pitchFamily="18" charset="0"/>
+                        </a:rPr>
+                        <m:t>+</m:t>
+                      </m:r>
+                      <m:f>
+                        <m:fPr>
+                          <m:ctrlPr>
+                            <a:rPr lang="fr-FR" sz="1600" b="1" i="1">
+                              <a:solidFill>
+                                <a:srgbClr val="000000"/>
+                              </a:solidFill>
+                              <a:latin typeface="Cambria Math" panose="02040503050406030204" pitchFamily="18" charset="0"/>
+                            </a:rPr>
+                          </m:ctrlPr>
+                        </m:fPr>
+                        <m:num>
+                          <m:sSub>
+                            <m:sSubPr>
+                              <m:ctrlPr>
+                                <a:rPr lang="fr-FR" sz="1600" b="1" i="1">
+                                  <a:solidFill>
+                                    <a:srgbClr val="000000"/>
+                                  </a:solidFill>
+                                  <a:latin typeface="Cambria Math" panose="02040503050406030204" pitchFamily="18" charset="0"/>
+                                </a:rPr>
+                              </m:ctrlPr>
+                            </m:sSubPr>
+                            <m:e>
+                              <m:r>
+                                <a:rPr lang="fr-FR" sz="1600" b="1" i="1">
+                                  <a:solidFill>
+                                    <a:srgbClr val="000000"/>
+                                  </a:solidFill>
+                                  <a:latin typeface="Cambria Math" panose="02040503050406030204" pitchFamily="18" charset="0"/>
+                                </a:rPr>
+                                <m:t>𝑽</m:t>
+                              </m:r>
+                            </m:e>
+                            <m:sub>
+                              <m:r>
+                                <a:rPr lang="fr-FR" sz="1600" b="1" i="1">
+                                  <a:solidFill>
+                                    <a:srgbClr val="000000"/>
+                                  </a:solidFill>
+                                  <a:latin typeface="Cambria Math" panose="02040503050406030204" pitchFamily="18" charset="0"/>
+                                </a:rPr>
+                                <m:t>𝑺</m:t>
+                              </m:r>
+                            </m:sub>
+                          </m:sSub>
+                        </m:num>
+                        <m:den>
+                          <m:r>
+                            <a:rPr lang="fr-FR" sz="1600" b="1" i="1">
+                              <a:solidFill>
+                                <a:srgbClr val="000000"/>
+                              </a:solidFill>
+                              <a:latin typeface="Cambria Math" panose="02040503050406030204" pitchFamily="18" charset="0"/>
+                            </a:rPr>
+                            <m:t>𝒎</m:t>
+                          </m:r>
+                        </m:den>
+                      </m:f>
+                    </m:oMath>
+                  </m:oMathPara>
+                </a14:m>
+                <a:endParaRPr lang="fr-FR" sz="1600" b="1" dirty="0"/>
+              </a:p>
+            </p:txBody>
+          </p:sp>
+        </mc:Choice>
+        <mc:Fallback>
+          <p:sp>
+            <p:nvSpPr>
+              <p:cNvPr id="40" name="Object 292">
+                <a:extLst>
+                  <a:ext uri="{FF2B5EF4-FFF2-40B4-BE49-F238E27FC236}">
+                    <a16:creationId xmlns:a16="http://schemas.microsoft.com/office/drawing/2014/main" id="{7E0BFF2D-FB4A-E05D-76D0-2C46AA8C48F7}"/>
+                  </a:ext>
+                </a:extLst>
+              </p:cNvPr>
+              <p:cNvSpPr txBox="1">
+                <a:spLocks noRot="1" noChangeAspect="1" noMove="1" noResize="1" noEditPoints="1" noAdjustHandles="1" noChangeArrowheads="1" noChangeShapeType="1" noTextEdit="1"/>
+              </p:cNvSpPr>
+              <p:nvPr/>
+            </p:nvSpPr>
+            <p:spPr bwMode="auto">
+              <a:xfrm>
+                <a:off x="6578949" y="2295732"/>
+                <a:ext cx="831934" cy="468312"/>
+              </a:xfrm>
+              <a:prstGeom prst="rect">
+                <a:avLst/>
+              </a:prstGeom>
+              <a:blipFill>
+                <a:blip r:embed="rId3"/>
+                <a:stretch>
+                  <a:fillRect b="-7895"/>
+                </a:stretch>
+              </a:blipFill>
+              <a:ln>
+                <a:noFill/>
+              </a:ln>
+            </p:spPr>
+            <p:txBody>
+              <a:bodyPr/>
+              <a:lstStyle/>
+              <a:p>
+                <a:r>
+                  <a:rPr lang="fr-FR">
+                    <a:noFill/>
+                  </a:rPr>
+                  <a:t> </a:t>
+                </a:r>
+              </a:p>
+            </p:txBody>
+          </p:sp>
+        </mc:Fallback>
+      </mc:AlternateContent>
+      <p:sp>
+        <p:nvSpPr>
+          <p:cNvPr id="41" name="Rectangle 135">
+            <a:extLst>
+              <a:ext uri="{FF2B5EF4-FFF2-40B4-BE49-F238E27FC236}">
+                <a16:creationId xmlns:a16="http://schemas.microsoft.com/office/drawing/2014/main" id="{6E00B715-3C68-1911-F2F6-053670A2F4A0}"/>
+              </a:ext>
+            </a:extLst>
+          </p:cNvPr>
+          <p:cNvSpPr>
+            <a:spLocks noChangeArrowheads="1"/>
+          </p:cNvSpPr>
+          <p:nvPr/>
+        </p:nvSpPr>
+        <p:spPr bwMode="auto">
+          <a:xfrm>
+            <a:off x="7958051" y="1961701"/>
+            <a:ext cx="232436" cy="246221"/>
+          </a:xfrm>
+          <a:prstGeom prst="rect">
+            <a:avLst/>
+          </a:prstGeom>
+          <a:noFill/>
+          <a:ln>
+            <a:noFill/>
+          </a:ln>
+          <a:extLst>
+            <a:ext uri="{909E8E84-426E-40DD-AFC4-6F175D3DCCD1}">
+              <a14:hiddenFill xmlns:a14="http://schemas.microsoft.com/office/drawing/2010/main">
+                <a:solidFill>
+                  <a:srgbClr val="FFFFFF"/>
+                </a:solidFill>
+              </a14:hiddenFill>
+            </a:ext>
+            <a:ext uri="{91240B29-F687-4F45-9708-019B960494DF}">
+              <a14:hiddenLine xmlns:a14="http://schemas.microsoft.com/office/drawing/2010/main" w="9525">
+                <a:solidFill>
+                  <a:srgbClr val="000000"/>
+                </a:solidFill>
+                <a:miter lim="800000"/>
+                <a:headEnd/>
+                <a:tailEnd/>
+              </a14:hiddenLine>
+            </a:ext>
+          </a:extLst>
+        </p:spPr>
+        <p:txBody>
+          <a:bodyPr wrap="none" lIns="0" tIns="0" rIns="0" bIns="0">
+            <a:spAutoFit/>
+          </a:bodyPr>
+          <a:lstStyle>
+            <a:lvl1pPr>
+              <a:spcBef>
+                <a:spcPct val="20000"/>
+              </a:spcBef>
+              <a:buChar char="•"/>
+              <a:defRPr sz="3200">
+                <a:solidFill>
+                  <a:schemeClr val="tx1"/>
+                </a:solidFill>
+                <a:latin typeface="Arial" panose="020B0604020202020204" pitchFamily="34" charset="0"/>
+              </a:defRPr>
+            </a:lvl1pPr>
+            <a:lvl2pPr marL="742950" indent="-285750">
+              <a:spcBef>
+                <a:spcPct val="20000"/>
+              </a:spcBef>
+              <a:buChar char="–"/>
+              <a:defRPr sz="2800">
+                <a:solidFill>
+                  <a:schemeClr val="tx1"/>
+                </a:solidFill>
+                <a:latin typeface="Arial" panose="020B0604020202020204" pitchFamily="34" charset="0"/>
+              </a:defRPr>
+            </a:lvl2pPr>
+            <a:lvl3pPr marL="1143000" indent="-228600">
+              <a:spcBef>
+                <a:spcPct val="20000"/>
+              </a:spcBef>
+              <a:buChar char="•"/>
+              <a:defRPr sz="2400">
+                <a:solidFill>
+                  <a:schemeClr val="tx1"/>
+                </a:solidFill>
+                <a:latin typeface="Arial" panose="020B0604020202020204" pitchFamily="34" charset="0"/>
+              </a:defRPr>
+            </a:lvl3pPr>
+            <a:lvl4pPr marL="1600200" indent="-228600">
+              <a:spcBef>
+                <a:spcPct val="20000"/>
+              </a:spcBef>
+              <a:buChar char="–"/>
+              <a:defRPr sz="2000">
+                <a:solidFill>
+                  <a:schemeClr val="tx1"/>
+                </a:solidFill>
+                <a:latin typeface="Arial" panose="020B0604020202020204" pitchFamily="34" charset="0"/>
+              </a:defRPr>
+            </a:lvl4pPr>
+            <a:lvl5pPr marL="2057400" indent="-228600">
+              <a:spcBef>
+                <a:spcPct val="20000"/>
+              </a:spcBef>
+              <a:buChar char="»"/>
+              <a:defRPr sz="2000">
+                <a:solidFill>
+                  <a:schemeClr val="tx1"/>
+                </a:solidFill>
+                <a:latin typeface="Arial" panose="020B0604020202020204" pitchFamily="34" charset="0"/>
+              </a:defRPr>
+            </a:lvl5pPr>
+            <a:lvl6pPr marL="2514600" indent="-228600" eaLnBrk="0" fontAlgn="base" hangingPunct="0">
+              <a:spcBef>
+                <a:spcPct val="20000"/>
+              </a:spcBef>
+              <a:spcAft>
+                <a:spcPct val="0"/>
+              </a:spcAft>
+              <a:buChar char="»"/>
+              <a:defRPr sz="2000">
+                <a:solidFill>
+                  <a:schemeClr val="tx1"/>
+                </a:solidFill>
+                <a:latin typeface="Arial" panose="020B0604020202020204" pitchFamily="34" charset="0"/>
+              </a:defRPr>
+            </a:lvl6pPr>
+            <a:lvl7pPr marL="2971800" indent="-228600" eaLnBrk="0" fontAlgn="base" hangingPunct="0">
+              <a:spcBef>
+                <a:spcPct val="20000"/>
+              </a:spcBef>
+              <a:spcAft>
+                <a:spcPct val="0"/>
+              </a:spcAft>
+              <a:buChar char="»"/>
+              <a:defRPr sz="2000">
+                <a:solidFill>
+                  <a:schemeClr val="tx1"/>
+                </a:solidFill>
+                <a:latin typeface="Arial" panose="020B0604020202020204" pitchFamily="34" charset="0"/>
+              </a:defRPr>
+            </a:lvl7pPr>
+            <a:lvl8pPr marL="3429000" indent="-228600" eaLnBrk="0" fontAlgn="base" hangingPunct="0">
+              <a:spcBef>
+                <a:spcPct val="20000"/>
+              </a:spcBef>
+              <a:spcAft>
+                <a:spcPct val="0"/>
+              </a:spcAft>
+              <a:buChar char="»"/>
+              <a:defRPr sz="2000">
+                <a:solidFill>
+                  <a:schemeClr val="tx1"/>
+                </a:solidFill>
+                <a:latin typeface="Arial" panose="020B0604020202020204" pitchFamily="34" charset="0"/>
+              </a:defRPr>
+            </a:lvl8pPr>
+            <a:lvl9pPr marL="3886200" indent="-228600" eaLnBrk="0" fontAlgn="base" hangingPunct="0">
+              <a:spcBef>
+                <a:spcPct val="20000"/>
+              </a:spcBef>
+              <a:spcAft>
+                <a:spcPct val="0"/>
+              </a:spcAft>
+              <a:buChar char="»"/>
+              <a:defRPr sz="2000">
+                <a:solidFill>
+                  <a:schemeClr val="tx1"/>
+                </a:solidFill>
+                <a:latin typeface="Arial" panose="020B0604020202020204" pitchFamily="34" charset="0"/>
+              </a:defRPr>
+            </a:lvl9pPr>
+          </a:lstStyle>
+          <a:p>
+            <a:pPr eaLnBrk="1" hangingPunct="1">
+              <a:spcBef>
+                <a:spcPct val="0"/>
+              </a:spcBef>
+              <a:buFontTx/>
+              <a:buNone/>
+            </a:pPr>
+            <a:r>
+              <a:rPr lang="el-GR" altLang="fr-FR" sz="1600" dirty="0">
+                <a:solidFill>
+                  <a:srgbClr val="000000"/>
+                </a:solidFill>
+                <a:latin typeface="Times" panose="02020603050405020304" pitchFamily="18" charset="0"/>
+              </a:rPr>
+              <a:t>α</a:t>
+            </a:r>
+            <a:r>
+              <a:rPr lang="fr-FR" altLang="fr-FR" sz="1600" dirty="0">
+                <a:solidFill>
+                  <a:srgbClr val="000000"/>
+                </a:solidFill>
+                <a:latin typeface="Times" panose="02020603050405020304" pitchFamily="18" charset="0"/>
+              </a:rPr>
+              <a:t>T</a:t>
+            </a:r>
+            <a:endParaRPr lang="fr-FR" altLang="fr-FR" sz="1600" dirty="0">
+              <a:latin typeface="Times New Roman" panose="02020603050405020304" pitchFamily="18" charset="0"/>
+            </a:endParaRPr>
+          </a:p>
+        </p:txBody>
+      </p:sp>
+      <p:sp>
+        <p:nvSpPr>
+          <p:cNvPr id="42" name="Rectangle 136">
+            <a:extLst>
+              <a:ext uri="{FF2B5EF4-FFF2-40B4-BE49-F238E27FC236}">
+                <a16:creationId xmlns:a16="http://schemas.microsoft.com/office/drawing/2014/main" id="{9B637E57-016E-EA7E-C7FB-50BB8E3E9EA2}"/>
+              </a:ext>
+            </a:extLst>
+          </p:cNvPr>
+          <p:cNvSpPr>
+            <a:spLocks noChangeArrowheads="1"/>
+          </p:cNvSpPr>
+          <p:nvPr/>
+        </p:nvSpPr>
+        <p:spPr bwMode="auto">
+          <a:xfrm>
+            <a:off x="9404264" y="1936301"/>
+            <a:ext cx="125034" cy="246221"/>
+          </a:xfrm>
+          <a:prstGeom prst="rect">
+            <a:avLst/>
+          </a:prstGeom>
+          <a:noFill/>
+          <a:ln>
+            <a:noFill/>
+          </a:ln>
+          <a:extLst>
+            <a:ext uri="{909E8E84-426E-40DD-AFC4-6F175D3DCCD1}">
+              <a14:hiddenFill xmlns:a14="http://schemas.microsoft.com/office/drawing/2010/main">
+                <a:solidFill>
+                  <a:srgbClr val="FFFFFF"/>
+                </a:solidFill>
+              </a14:hiddenFill>
+            </a:ext>
+            <a:ext uri="{91240B29-F687-4F45-9708-019B960494DF}">
+              <a14:hiddenLine xmlns:a14="http://schemas.microsoft.com/office/drawing/2010/main" w="9525">
+                <a:solidFill>
+                  <a:srgbClr val="000000"/>
+                </a:solidFill>
+                <a:miter lim="800000"/>
+                <a:headEnd/>
+                <a:tailEnd/>
+              </a14:hiddenLine>
+            </a:ext>
+          </a:extLst>
+        </p:spPr>
+        <p:txBody>
+          <a:bodyPr wrap="none" lIns="0" tIns="0" rIns="0" bIns="0">
+            <a:spAutoFit/>
+          </a:bodyPr>
+          <a:lstStyle>
+            <a:lvl1pPr>
+              <a:spcBef>
+                <a:spcPct val="20000"/>
+              </a:spcBef>
+              <a:buChar char="•"/>
+              <a:defRPr sz="3200">
+                <a:solidFill>
+                  <a:schemeClr val="tx1"/>
+                </a:solidFill>
+                <a:latin typeface="Arial" panose="020B0604020202020204" pitchFamily="34" charset="0"/>
+              </a:defRPr>
+            </a:lvl1pPr>
+            <a:lvl2pPr marL="742950" indent="-285750">
+              <a:spcBef>
+                <a:spcPct val="20000"/>
+              </a:spcBef>
+              <a:buChar char="–"/>
+              <a:defRPr sz="2800">
+                <a:solidFill>
+                  <a:schemeClr val="tx1"/>
+                </a:solidFill>
+                <a:latin typeface="Arial" panose="020B0604020202020204" pitchFamily="34" charset="0"/>
+              </a:defRPr>
+            </a:lvl2pPr>
+            <a:lvl3pPr marL="1143000" indent="-228600">
+              <a:spcBef>
+                <a:spcPct val="20000"/>
+              </a:spcBef>
+              <a:buChar char="•"/>
+              <a:defRPr sz="2400">
+                <a:solidFill>
+                  <a:schemeClr val="tx1"/>
+                </a:solidFill>
+                <a:latin typeface="Arial" panose="020B0604020202020204" pitchFamily="34" charset="0"/>
+              </a:defRPr>
+            </a:lvl3pPr>
+            <a:lvl4pPr marL="1600200" indent="-228600">
+              <a:spcBef>
+                <a:spcPct val="20000"/>
+              </a:spcBef>
+              <a:buChar char="–"/>
+              <a:defRPr sz="2000">
+                <a:solidFill>
+                  <a:schemeClr val="tx1"/>
+                </a:solidFill>
+                <a:latin typeface="Arial" panose="020B0604020202020204" pitchFamily="34" charset="0"/>
+              </a:defRPr>
+            </a:lvl4pPr>
+            <a:lvl5pPr marL="2057400" indent="-228600">
+              <a:spcBef>
+                <a:spcPct val="20000"/>
+              </a:spcBef>
+              <a:buChar char="»"/>
+              <a:defRPr sz="2000">
+                <a:solidFill>
+                  <a:schemeClr val="tx1"/>
+                </a:solidFill>
+                <a:latin typeface="Arial" panose="020B0604020202020204" pitchFamily="34" charset="0"/>
+              </a:defRPr>
+            </a:lvl5pPr>
+            <a:lvl6pPr marL="2514600" indent="-228600" eaLnBrk="0" fontAlgn="base" hangingPunct="0">
+              <a:spcBef>
+                <a:spcPct val="20000"/>
+              </a:spcBef>
+              <a:spcAft>
+                <a:spcPct val="0"/>
+              </a:spcAft>
+              <a:buChar char="»"/>
+              <a:defRPr sz="2000">
+                <a:solidFill>
+                  <a:schemeClr val="tx1"/>
+                </a:solidFill>
+                <a:latin typeface="Arial" panose="020B0604020202020204" pitchFamily="34" charset="0"/>
+              </a:defRPr>
+            </a:lvl6pPr>
+            <a:lvl7pPr marL="2971800" indent="-228600" eaLnBrk="0" fontAlgn="base" hangingPunct="0">
+              <a:spcBef>
+                <a:spcPct val="20000"/>
+              </a:spcBef>
+              <a:spcAft>
+                <a:spcPct val="0"/>
+              </a:spcAft>
+              <a:buChar char="»"/>
+              <a:defRPr sz="2000">
+                <a:solidFill>
+                  <a:schemeClr val="tx1"/>
+                </a:solidFill>
+                <a:latin typeface="Arial" panose="020B0604020202020204" pitchFamily="34" charset="0"/>
+              </a:defRPr>
+            </a:lvl7pPr>
+            <a:lvl8pPr marL="3429000" indent="-228600" eaLnBrk="0" fontAlgn="base" hangingPunct="0">
+              <a:spcBef>
+                <a:spcPct val="20000"/>
+              </a:spcBef>
+              <a:spcAft>
+                <a:spcPct val="0"/>
+              </a:spcAft>
+              <a:buChar char="»"/>
+              <a:defRPr sz="2000">
+                <a:solidFill>
+                  <a:schemeClr val="tx1"/>
+                </a:solidFill>
+                <a:latin typeface="Arial" panose="020B0604020202020204" pitchFamily="34" charset="0"/>
+              </a:defRPr>
+            </a:lvl8pPr>
+            <a:lvl9pPr marL="3886200" indent="-228600" eaLnBrk="0" fontAlgn="base" hangingPunct="0">
+              <a:spcBef>
+                <a:spcPct val="20000"/>
+              </a:spcBef>
+              <a:spcAft>
+                <a:spcPct val="0"/>
+              </a:spcAft>
+              <a:buChar char="»"/>
+              <a:defRPr sz="2000">
+                <a:solidFill>
+                  <a:schemeClr val="tx1"/>
+                </a:solidFill>
+                <a:latin typeface="Arial" panose="020B0604020202020204" pitchFamily="34" charset="0"/>
+              </a:defRPr>
+            </a:lvl9pPr>
+          </a:lstStyle>
+          <a:p>
+            <a:pPr eaLnBrk="1" hangingPunct="1">
+              <a:spcBef>
+                <a:spcPct val="0"/>
+              </a:spcBef>
+              <a:buFontTx/>
+              <a:buNone/>
+            </a:pPr>
+            <a:r>
+              <a:rPr lang="fr-FR" altLang="fr-FR" sz="1600" dirty="0">
+                <a:solidFill>
+                  <a:srgbClr val="000000"/>
+                </a:solidFill>
+                <a:latin typeface="Times" panose="02020603050405020304" pitchFamily="18" charset="0"/>
+              </a:rPr>
+              <a:t>T</a:t>
+            </a:r>
+            <a:endParaRPr lang="fr-FR" altLang="fr-FR" sz="1600" dirty="0">
+              <a:latin typeface="Times New Roman" panose="02020603050405020304" pitchFamily="18" charset="0"/>
+            </a:endParaRPr>
+          </a:p>
+        </p:txBody>
+      </p:sp>
+      <p:sp>
+        <p:nvSpPr>
+          <p:cNvPr id="43" name="Rectangle 135">
+            <a:extLst>
+              <a:ext uri="{FF2B5EF4-FFF2-40B4-BE49-F238E27FC236}">
+                <a16:creationId xmlns:a16="http://schemas.microsoft.com/office/drawing/2014/main" id="{476BD92F-F87B-1B02-09EE-EA569FBAA0DE}"/>
+              </a:ext>
+            </a:extLst>
+          </p:cNvPr>
+          <p:cNvSpPr>
+            <a:spLocks noChangeArrowheads="1"/>
+          </p:cNvSpPr>
+          <p:nvPr/>
+        </p:nvSpPr>
+        <p:spPr bwMode="auto">
+          <a:xfrm>
+            <a:off x="8083085" y="3532488"/>
+            <a:ext cx="232436" cy="246221"/>
+          </a:xfrm>
+          <a:prstGeom prst="rect">
+            <a:avLst/>
+          </a:prstGeom>
+          <a:noFill/>
+          <a:ln>
+            <a:noFill/>
+          </a:ln>
+          <a:extLst>
+            <a:ext uri="{909E8E84-426E-40DD-AFC4-6F175D3DCCD1}">
+              <a14:hiddenFill xmlns:a14="http://schemas.microsoft.com/office/drawing/2010/main">
+                <a:solidFill>
+                  <a:srgbClr val="FFFFFF"/>
+                </a:solidFill>
+              </a14:hiddenFill>
+            </a:ext>
+            <a:ext uri="{91240B29-F687-4F45-9708-019B960494DF}">
+              <a14:hiddenLine xmlns:a14="http://schemas.microsoft.com/office/drawing/2010/main" w="9525">
+                <a:solidFill>
+                  <a:srgbClr val="000000"/>
+                </a:solidFill>
+                <a:miter lim="800000"/>
+                <a:headEnd/>
+                <a:tailEnd/>
+              </a14:hiddenLine>
+            </a:ext>
+          </a:extLst>
+        </p:spPr>
+        <p:txBody>
+          <a:bodyPr wrap="none" lIns="0" tIns="0" rIns="0" bIns="0">
+            <a:spAutoFit/>
+          </a:bodyPr>
+          <a:lstStyle>
+            <a:lvl1pPr>
+              <a:spcBef>
+                <a:spcPct val="20000"/>
+              </a:spcBef>
+              <a:buChar char="•"/>
+              <a:defRPr sz="3200">
+                <a:solidFill>
+                  <a:schemeClr val="tx1"/>
+                </a:solidFill>
+                <a:latin typeface="Arial" panose="020B0604020202020204" pitchFamily="34" charset="0"/>
+              </a:defRPr>
+            </a:lvl1pPr>
+            <a:lvl2pPr marL="742950" indent="-285750">
+              <a:spcBef>
+                <a:spcPct val="20000"/>
+              </a:spcBef>
+              <a:buChar char="–"/>
+              <a:defRPr sz="2800">
+                <a:solidFill>
+                  <a:schemeClr val="tx1"/>
+                </a:solidFill>
+                <a:latin typeface="Arial" panose="020B0604020202020204" pitchFamily="34" charset="0"/>
+              </a:defRPr>
+            </a:lvl2pPr>
+            <a:lvl3pPr marL="1143000" indent="-228600">
+              <a:spcBef>
+                <a:spcPct val="20000"/>
+              </a:spcBef>
+              <a:buChar char="•"/>
+              <a:defRPr sz="2400">
+                <a:solidFill>
+                  <a:schemeClr val="tx1"/>
+                </a:solidFill>
+                <a:latin typeface="Arial" panose="020B0604020202020204" pitchFamily="34" charset="0"/>
+              </a:defRPr>
+            </a:lvl3pPr>
+            <a:lvl4pPr marL="1600200" indent="-228600">
+              <a:spcBef>
+                <a:spcPct val="20000"/>
+              </a:spcBef>
+              <a:buChar char="–"/>
+              <a:defRPr sz="2000">
+                <a:solidFill>
+                  <a:schemeClr val="tx1"/>
+                </a:solidFill>
+                <a:latin typeface="Arial" panose="020B0604020202020204" pitchFamily="34" charset="0"/>
+              </a:defRPr>
+            </a:lvl4pPr>
+            <a:lvl5pPr marL="2057400" indent="-228600">
+              <a:spcBef>
+                <a:spcPct val="20000"/>
+              </a:spcBef>
+              <a:buChar char="»"/>
+              <a:defRPr sz="2000">
+                <a:solidFill>
+                  <a:schemeClr val="tx1"/>
+                </a:solidFill>
+                <a:latin typeface="Arial" panose="020B0604020202020204" pitchFamily="34" charset="0"/>
+              </a:defRPr>
+            </a:lvl5pPr>
+            <a:lvl6pPr marL="2514600" indent="-228600" eaLnBrk="0" fontAlgn="base" hangingPunct="0">
+              <a:spcBef>
+                <a:spcPct val="20000"/>
+              </a:spcBef>
+              <a:spcAft>
+                <a:spcPct val="0"/>
+              </a:spcAft>
+              <a:buChar char="»"/>
+              <a:defRPr sz="2000">
+                <a:solidFill>
+                  <a:schemeClr val="tx1"/>
+                </a:solidFill>
+                <a:latin typeface="Arial" panose="020B0604020202020204" pitchFamily="34" charset="0"/>
+              </a:defRPr>
+            </a:lvl6pPr>
+            <a:lvl7pPr marL="2971800" indent="-228600" eaLnBrk="0" fontAlgn="base" hangingPunct="0">
+              <a:spcBef>
+                <a:spcPct val="20000"/>
+              </a:spcBef>
+              <a:spcAft>
+                <a:spcPct val="0"/>
+              </a:spcAft>
+              <a:buChar char="»"/>
+              <a:defRPr sz="2000">
+                <a:solidFill>
+                  <a:schemeClr val="tx1"/>
+                </a:solidFill>
+                <a:latin typeface="Arial" panose="020B0604020202020204" pitchFamily="34" charset="0"/>
+              </a:defRPr>
+            </a:lvl7pPr>
+            <a:lvl8pPr marL="3429000" indent="-228600" eaLnBrk="0" fontAlgn="base" hangingPunct="0">
+              <a:spcBef>
+                <a:spcPct val="20000"/>
+              </a:spcBef>
+              <a:spcAft>
+                <a:spcPct val="0"/>
+              </a:spcAft>
+              <a:buChar char="»"/>
+              <a:defRPr sz="2000">
+                <a:solidFill>
+                  <a:schemeClr val="tx1"/>
+                </a:solidFill>
+                <a:latin typeface="Arial" panose="020B0604020202020204" pitchFamily="34" charset="0"/>
+              </a:defRPr>
+            </a:lvl8pPr>
+            <a:lvl9pPr marL="3886200" indent="-228600" eaLnBrk="0" fontAlgn="base" hangingPunct="0">
+              <a:spcBef>
+                <a:spcPct val="20000"/>
+              </a:spcBef>
+              <a:spcAft>
+                <a:spcPct val="0"/>
+              </a:spcAft>
+              <a:buChar char="»"/>
+              <a:defRPr sz="2000">
+                <a:solidFill>
+                  <a:schemeClr val="tx1"/>
+                </a:solidFill>
+                <a:latin typeface="Arial" panose="020B0604020202020204" pitchFamily="34" charset="0"/>
+              </a:defRPr>
+            </a:lvl9pPr>
+          </a:lstStyle>
+          <a:p>
+            <a:pPr eaLnBrk="1" hangingPunct="1">
+              <a:spcBef>
+                <a:spcPct val="0"/>
+              </a:spcBef>
+              <a:buFontTx/>
+              <a:buNone/>
+            </a:pPr>
+            <a:r>
+              <a:rPr lang="el-GR" altLang="fr-FR" sz="1600" dirty="0">
+                <a:solidFill>
+                  <a:srgbClr val="000000"/>
+                </a:solidFill>
+                <a:latin typeface="Times" panose="02020603050405020304" pitchFamily="18" charset="0"/>
+              </a:rPr>
+              <a:t>α</a:t>
+            </a:r>
+            <a:r>
+              <a:rPr lang="fr-FR" altLang="fr-FR" sz="1600" dirty="0">
+                <a:solidFill>
+                  <a:srgbClr val="000000"/>
+                </a:solidFill>
+                <a:latin typeface="Times" panose="02020603050405020304" pitchFamily="18" charset="0"/>
+              </a:rPr>
+              <a:t>T</a:t>
+            </a:r>
+            <a:endParaRPr lang="fr-FR" altLang="fr-FR" sz="1600" dirty="0">
+              <a:latin typeface="Times New Roman" panose="02020603050405020304" pitchFamily="18" charset="0"/>
+            </a:endParaRPr>
+          </a:p>
+        </p:txBody>
+      </p:sp>
+      <p:sp>
+        <p:nvSpPr>
+          <p:cNvPr id="44" name="Rectangle 136">
+            <a:extLst>
+              <a:ext uri="{FF2B5EF4-FFF2-40B4-BE49-F238E27FC236}">
+                <a16:creationId xmlns:a16="http://schemas.microsoft.com/office/drawing/2014/main" id="{F324D766-08B3-4442-54F1-55C55AFD9436}"/>
+              </a:ext>
+            </a:extLst>
+          </p:cNvPr>
+          <p:cNvSpPr>
+            <a:spLocks noChangeArrowheads="1"/>
+          </p:cNvSpPr>
+          <p:nvPr/>
+        </p:nvSpPr>
+        <p:spPr bwMode="auto">
+          <a:xfrm>
+            <a:off x="9529298" y="3507088"/>
+            <a:ext cx="125034" cy="246221"/>
+          </a:xfrm>
+          <a:prstGeom prst="rect">
+            <a:avLst/>
+          </a:prstGeom>
+          <a:noFill/>
+          <a:ln>
+            <a:noFill/>
+          </a:ln>
+          <a:extLst>
+            <a:ext uri="{909E8E84-426E-40DD-AFC4-6F175D3DCCD1}">
+              <a14:hiddenFill xmlns:a14="http://schemas.microsoft.com/office/drawing/2010/main">
+                <a:solidFill>
+                  <a:srgbClr val="FFFFFF"/>
+                </a:solidFill>
+              </a14:hiddenFill>
+            </a:ext>
+            <a:ext uri="{91240B29-F687-4F45-9708-019B960494DF}">
+              <a14:hiddenLine xmlns:a14="http://schemas.microsoft.com/office/drawing/2010/main" w="9525">
+                <a:solidFill>
+                  <a:srgbClr val="000000"/>
+                </a:solidFill>
+                <a:miter lim="800000"/>
+                <a:headEnd/>
+                <a:tailEnd/>
+              </a14:hiddenLine>
+            </a:ext>
+          </a:extLst>
+        </p:spPr>
+        <p:txBody>
+          <a:bodyPr wrap="none" lIns="0" tIns="0" rIns="0" bIns="0">
+            <a:spAutoFit/>
+          </a:bodyPr>
+          <a:lstStyle>
+            <a:lvl1pPr>
+              <a:spcBef>
+                <a:spcPct val="20000"/>
+              </a:spcBef>
+              <a:buChar char="•"/>
+              <a:defRPr sz="3200">
+                <a:solidFill>
+                  <a:schemeClr val="tx1"/>
+                </a:solidFill>
+                <a:latin typeface="Arial" panose="020B0604020202020204" pitchFamily="34" charset="0"/>
+              </a:defRPr>
+            </a:lvl1pPr>
+            <a:lvl2pPr marL="742950" indent="-285750">
+              <a:spcBef>
+                <a:spcPct val="20000"/>
+              </a:spcBef>
+              <a:buChar char="–"/>
+              <a:defRPr sz="2800">
+                <a:solidFill>
+                  <a:schemeClr val="tx1"/>
+                </a:solidFill>
+                <a:latin typeface="Arial" panose="020B0604020202020204" pitchFamily="34" charset="0"/>
+              </a:defRPr>
+            </a:lvl2pPr>
+            <a:lvl3pPr marL="1143000" indent="-228600">
+              <a:spcBef>
+                <a:spcPct val="20000"/>
+              </a:spcBef>
+              <a:buChar char="•"/>
+              <a:defRPr sz="2400">
+                <a:solidFill>
+                  <a:schemeClr val="tx1"/>
+                </a:solidFill>
+                <a:latin typeface="Arial" panose="020B0604020202020204" pitchFamily="34" charset="0"/>
+              </a:defRPr>
+            </a:lvl3pPr>
+            <a:lvl4pPr marL="1600200" indent="-228600">
+              <a:spcBef>
+                <a:spcPct val="20000"/>
+              </a:spcBef>
+              <a:buChar char="–"/>
+              <a:defRPr sz="2000">
+                <a:solidFill>
+                  <a:schemeClr val="tx1"/>
+                </a:solidFill>
+                <a:latin typeface="Arial" panose="020B0604020202020204" pitchFamily="34" charset="0"/>
+              </a:defRPr>
+            </a:lvl4pPr>
+            <a:lvl5pPr marL="2057400" indent="-228600">
+              <a:spcBef>
+                <a:spcPct val="20000"/>
+              </a:spcBef>
+              <a:buChar char="»"/>
+              <a:defRPr sz="2000">
+                <a:solidFill>
+                  <a:schemeClr val="tx1"/>
+                </a:solidFill>
+                <a:latin typeface="Arial" panose="020B0604020202020204" pitchFamily="34" charset="0"/>
+              </a:defRPr>
+            </a:lvl5pPr>
+            <a:lvl6pPr marL="2514600" indent="-228600" eaLnBrk="0" fontAlgn="base" hangingPunct="0">
+              <a:spcBef>
+                <a:spcPct val="20000"/>
+              </a:spcBef>
+              <a:spcAft>
+                <a:spcPct val="0"/>
+              </a:spcAft>
+              <a:buChar char="»"/>
+              <a:defRPr sz="2000">
+                <a:solidFill>
+                  <a:schemeClr val="tx1"/>
+                </a:solidFill>
+                <a:latin typeface="Arial" panose="020B0604020202020204" pitchFamily="34" charset="0"/>
+              </a:defRPr>
+            </a:lvl6pPr>
+            <a:lvl7pPr marL="2971800" indent="-228600" eaLnBrk="0" fontAlgn="base" hangingPunct="0">
+              <a:spcBef>
+                <a:spcPct val="20000"/>
+              </a:spcBef>
+              <a:spcAft>
+                <a:spcPct val="0"/>
+              </a:spcAft>
+              <a:buChar char="»"/>
+              <a:defRPr sz="2000">
+                <a:solidFill>
+                  <a:schemeClr val="tx1"/>
+                </a:solidFill>
+                <a:latin typeface="Arial" panose="020B0604020202020204" pitchFamily="34" charset="0"/>
+              </a:defRPr>
+            </a:lvl7pPr>
+            <a:lvl8pPr marL="3429000" indent="-228600" eaLnBrk="0" fontAlgn="base" hangingPunct="0">
+              <a:spcBef>
+                <a:spcPct val="20000"/>
+              </a:spcBef>
+              <a:spcAft>
+                <a:spcPct val="0"/>
+              </a:spcAft>
+              <a:buChar char="»"/>
+              <a:defRPr sz="2000">
+                <a:solidFill>
+                  <a:schemeClr val="tx1"/>
+                </a:solidFill>
+                <a:latin typeface="Arial" panose="020B0604020202020204" pitchFamily="34" charset="0"/>
+              </a:defRPr>
+            </a:lvl8pPr>
+            <a:lvl9pPr marL="3886200" indent="-228600" eaLnBrk="0" fontAlgn="base" hangingPunct="0">
+              <a:spcBef>
+                <a:spcPct val="20000"/>
+              </a:spcBef>
+              <a:spcAft>
+                <a:spcPct val="0"/>
+              </a:spcAft>
+              <a:buChar char="»"/>
+              <a:defRPr sz="2000">
+                <a:solidFill>
+                  <a:schemeClr val="tx1"/>
+                </a:solidFill>
+                <a:latin typeface="Arial" panose="020B0604020202020204" pitchFamily="34" charset="0"/>
+              </a:defRPr>
+            </a:lvl9pPr>
+          </a:lstStyle>
+          <a:p>
+            <a:pPr eaLnBrk="1" hangingPunct="1">
+              <a:spcBef>
+                <a:spcPct val="0"/>
+              </a:spcBef>
+              <a:buFontTx/>
+              <a:buNone/>
+            </a:pPr>
+            <a:r>
+              <a:rPr lang="fr-FR" altLang="fr-FR" sz="1600" dirty="0">
+                <a:solidFill>
+                  <a:srgbClr val="000000"/>
+                </a:solidFill>
+                <a:latin typeface="Times" panose="02020603050405020304" pitchFamily="18" charset="0"/>
+              </a:rPr>
+              <a:t>T</a:t>
+            </a:r>
+            <a:endParaRPr lang="fr-FR" altLang="fr-FR" sz="1600" dirty="0">
+              <a:latin typeface="Times New Roman" panose="02020603050405020304" pitchFamily="18" charset="0"/>
+            </a:endParaRPr>
+          </a:p>
+        </p:txBody>
+      </p:sp>
+      <p:sp>
+        <p:nvSpPr>
+          <p:cNvPr id="45" name="Line 12">
+            <a:extLst>
+              <a:ext uri="{FF2B5EF4-FFF2-40B4-BE49-F238E27FC236}">
+                <a16:creationId xmlns:a16="http://schemas.microsoft.com/office/drawing/2014/main" id="{4F6D61F7-654D-B602-AE71-916E26E6F945}"/>
+              </a:ext>
+            </a:extLst>
+          </p:cNvPr>
+          <p:cNvSpPr>
+            <a:spLocks noChangeShapeType="1"/>
+          </p:cNvSpPr>
+          <p:nvPr/>
+        </p:nvSpPr>
+        <p:spPr bwMode="auto">
+          <a:xfrm>
+            <a:off x="8956244" y="1894639"/>
+            <a:ext cx="510537" cy="1837"/>
+          </a:xfrm>
+          <a:prstGeom prst="line">
+            <a:avLst/>
+          </a:prstGeom>
+          <a:noFill/>
+          <a:ln w="28575">
+            <a:solidFill>
+              <a:srgbClr val="009900"/>
+            </a:solidFill>
+            <a:round/>
+            <a:headEnd/>
+            <a:tailEnd/>
+          </a:ln>
+          <a:extLst>
+            <a:ext uri="{909E8E84-426E-40DD-AFC4-6F175D3DCCD1}">
+              <a14:hiddenFill xmlns:a14="http://schemas.microsoft.com/office/drawing/2010/main">
+                <a:noFill/>
+              </a14:hiddenFill>
+            </a:ext>
+          </a:extLst>
+        </p:spPr>
+        <p:txBody>
+          <a:bodyPr/>
+          <a:lstStyle/>
+          <a:p>
+            <a:endParaRPr lang="fr-FR"/>
+          </a:p>
+        </p:txBody>
+      </p:sp>
+      <p:sp>
+        <p:nvSpPr>
+          <p:cNvPr id="46" name="Line 286">
+            <a:extLst>
+              <a:ext uri="{FF2B5EF4-FFF2-40B4-BE49-F238E27FC236}">
+                <a16:creationId xmlns:a16="http://schemas.microsoft.com/office/drawing/2014/main" id="{FA2E2196-39B3-FE47-BEA8-373D2912C43B}"/>
+              </a:ext>
+            </a:extLst>
+          </p:cNvPr>
+          <p:cNvSpPr>
+            <a:spLocks noChangeShapeType="1"/>
+          </p:cNvSpPr>
+          <p:nvPr/>
+        </p:nvSpPr>
+        <p:spPr bwMode="auto">
+          <a:xfrm>
+            <a:off x="8943570" y="3478308"/>
+            <a:ext cx="535912" cy="0"/>
+          </a:xfrm>
+          <a:prstGeom prst="line">
+            <a:avLst/>
+          </a:prstGeom>
+          <a:noFill/>
+          <a:ln w="38100">
+            <a:solidFill>
+              <a:srgbClr val="009900"/>
+            </a:solidFill>
+            <a:round/>
+            <a:headEnd/>
+            <a:tailEnd/>
+          </a:ln>
+          <a:effectLst/>
+          <a:extLst>
+            <a:ext uri="{909E8E84-426E-40DD-AFC4-6F175D3DCCD1}">
+              <a14:hiddenFill xmlns:a14="http://schemas.microsoft.com/office/drawing/2010/main">
+                <a:noFill/>
+              </a14:hiddenFill>
+            </a:ext>
+            <a:ext uri="{AF507438-7753-43E0-B8FC-AC1667EBCBE1}">
+              <a14:hiddenEffects xmlns:a14="http://schemas.microsoft.com/office/drawing/2010/main">
+                <a:effectLst>
+                  <a:outerShdw dist="35921" dir="2700000" algn="ctr" rotWithShape="0">
+                    <a:schemeClr val="bg2"/>
+                  </a:outerShdw>
+                </a:effectLst>
+              </a14:hiddenEffects>
+            </a:ext>
+          </a:extLst>
+        </p:spPr>
+        <p:txBody>
+          <a:bodyPr/>
+          <a:lstStyle/>
+          <a:p>
+            <a:endParaRPr lang="fr-FR"/>
+          </a:p>
+        </p:txBody>
+      </p:sp>
+      <p:sp>
+        <p:nvSpPr>
+          <p:cNvPr id="47" name="Line 285">
+            <a:extLst>
+              <a:ext uri="{FF2B5EF4-FFF2-40B4-BE49-F238E27FC236}">
+                <a16:creationId xmlns:a16="http://schemas.microsoft.com/office/drawing/2014/main" id="{341D7EE8-99EE-E185-ECD4-1D0953DA7BEC}"/>
+              </a:ext>
+            </a:extLst>
+          </p:cNvPr>
+          <p:cNvSpPr>
+            <a:spLocks noChangeShapeType="1"/>
+          </p:cNvSpPr>
+          <p:nvPr/>
+        </p:nvSpPr>
+        <p:spPr bwMode="auto">
+          <a:xfrm>
+            <a:off x="9474401" y="2864057"/>
+            <a:ext cx="0" cy="628649"/>
+          </a:xfrm>
+          <a:prstGeom prst="line">
+            <a:avLst/>
+          </a:prstGeom>
+          <a:noFill/>
+          <a:ln w="38100">
+            <a:solidFill>
+              <a:srgbClr val="009900"/>
+            </a:solidFill>
+            <a:round/>
+            <a:headEnd/>
+            <a:tailEnd/>
+          </a:ln>
+          <a:effectLst/>
+          <a:extLst>
+            <a:ext uri="{909E8E84-426E-40DD-AFC4-6F175D3DCCD1}">
+              <a14:hiddenFill xmlns:a14="http://schemas.microsoft.com/office/drawing/2010/main">
+                <a:noFill/>
+              </a14:hiddenFill>
+            </a:ext>
+            <a:ext uri="{AF507438-7753-43E0-B8FC-AC1667EBCBE1}">
+              <a14:hiddenEffects xmlns:a14="http://schemas.microsoft.com/office/drawing/2010/main">
+                <a:effectLst>
+                  <a:outerShdw dist="35921" dir="2700000" algn="ctr" rotWithShape="0">
+                    <a:schemeClr val="bg2"/>
+                  </a:outerShdw>
+                </a:effectLst>
+              </a14:hiddenEffects>
+            </a:ext>
+          </a:extLst>
+        </p:spPr>
+        <p:txBody>
+          <a:bodyPr/>
+          <a:lstStyle/>
+          <a:p>
+            <a:endParaRPr lang="fr-FR"/>
+          </a:p>
+        </p:txBody>
+      </p:sp>
+      <p:sp>
+        <p:nvSpPr>
+          <p:cNvPr id="48" name="Line 173">
+            <a:extLst>
+              <a:ext uri="{FF2B5EF4-FFF2-40B4-BE49-F238E27FC236}">
+                <a16:creationId xmlns:a16="http://schemas.microsoft.com/office/drawing/2014/main" id="{0CBA74D6-3ECD-1C2E-36F2-AA352FBBF39B}"/>
+              </a:ext>
+            </a:extLst>
+          </p:cNvPr>
+          <p:cNvSpPr>
+            <a:spLocks noChangeShapeType="1"/>
+          </p:cNvSpPr>
+          <p:nvPr/>
+        </p:nvSpPr>
+        <p:spPr bwMode="auto">
+          <a:xfrm>
+            <a:off x="8955476" y="2871884"/>
+            <a:ext cx="511305" cy="0"/>
+          </a:xfrm>
+          <a:prstGeom prst="line">
+            <a:avLst/>
+          </a:prstGeom>
+          <a:noFill/>
+          <a:ln w="28575">
+            <a:solidFill>
+              <a:srgbClr val="000000"/>
+            </a:solidFill>
+            <a:round/>
+            <a:headEnd/>
+            <a:tailEnd/>
+          </a:ln>
+          <a:extLst>
+            <a:ext uri="{909E8E84-426E-40DD-AFC4-6F175D3DCCD1}">
+              <a14:hiddenFill xmlns:a14="http://schemas.microsoft.com/office/drawing/2010/main">
+                <a:noFill/>
+              </a14:hiddenFill>
+            </a:ext>
+          </a:extLst>
+        </p:spPr>
+        <p:txBody>
+          <a:bodyPr/>
+          <a:lstStyle/>
+          <a:p>
+            <a:endParaRPr lang="fr-FR"/>
+          </a:p>
+        </p:txBody>
+      </p:sp>
+      <p:sp>
+        <p:nvSpPr>
+          <p:cNvPr id="49" name="Line 172">
+            <a:extLst>
+              <a:ext uri="{FF2B5EF4-FFF2-40B4-BE49-F238E27FC236}">
+                <a16:creationId xmlns:a16="http://schemas.microsoft.com/office/drawing/2014/main" id="{1B6BDBCF-6B7C-C856-8BF5-6EDC6C88FC8D}"/>
+              </a:ext>
+            </a:extLst>
+          </p:cNvPr>
+          <p:cNvSpPr>
+            <a:spLocks noChangeShapeType="1"/>
+          </p:cNvSpPr>
+          <p:nvPr/>
+        </p:nvSpPr>
+        <p:spPr bwMode="auto">
+          <a:xfrm>
+            <a:off x="9483927" y="2872853"/>
+            <a:ext cx="0" cy="634235"/>
+          </a:xfrm>
+          <a:prstGeom prst="line">
+            <a:avLst/>
+          </a:prstGeom>
+          <a:noFill/>
+          <a:ln w="28575">
+            <a:solidFill>
+              <a:srgbClr val="000000"/>
             </a:solidFill>
             <a:round/>
             <a:headEnd/>
